--- a/TP_instancia2_alquileres_CABA.pptx
+++ b/TP_instancia2_alquileres_CABA.pptx
@@ -10123,51 +10123,27 @@
               </a:spcAft>
             </a:pPr>
             <a:r>
-              <a:rPr sz="4600" b="1">
+              <a:rPr sz="3000" b="1">
                 <a:solidFill>
                   <a:srgbClr val="15505E"/>
                 </a:solidFill>
                 <a:latin typeface="Bookman Old Style"/>
               </a:rPr>
-              <a:t>QUÉ CORREGIMOS</a:t>
+              <a:t>QUÉ CORREGIMOS: EL PRECIO POR M² COMUNA POR COMUNA</a:t>
             </a:r>
           </a:p>
         </p:txBody>
       </p:sp>
-      <p:pic>
-        <p:nvPicPr>
-          <p:cNvPr id="5" name="Picture 4" descr="i2_g07_prima_comuna.png"/>
-          <p:cNvPicPr>
-            <a:picLocks noChangeAspect="1"/>
-          </p:cNvPicPr>
-          <p:nvPr/>
-        </p:nvPicPr>
-        <p:blipFill>
-          <a:blip r:embed="rId3"/>
-          <a:stretch>
-            <a:fillRect/>
-          </a:stretch>
-        </p:blipFill>
-        <p:spPr>
-          <a:xfrm>
-            <a:off x="777240" y="1965960"/>
-            <a:ext cx="6583680" cy="3686861"/>
-          </a:xfrm>
-          <a:prstGeom prst="rect">
-            <a:avLst/>
-          </a:prstGeom>
-        </p:spPr>
-      </p:pic>
       <p:sp>
         <p:nvSpPr>
-          <p:cNvPr id="6" name="TextBox 5"/>
+          <p:cNvPr id="5" name="TextBox 4"/>
           <p:cNvSpPr txBox="1"/>
           <p:nvPr/>
         </p:nvSpPr>
         <p:spPr>
           <a:xfrm>
-            <a:off x="7680960" y="1874519"/>
-            <a:ext cx="3703320" cy="4114800"/>
+            <a:off x="822960" y="1444752"/>
+            <a:ext cx="10515600" cy="658368"/>
           </a:xfrm>
           <a:prstGeom prst="rect">
             <a:avLst/>
@@ -10182,77 +10158,6541 @@
           <a:p>
             <a:pPr algn="l">
               <a:lnSpc>
-                <a:spcPct val="110000"/>
+                <a:spcPct val="116000"/>
               </a:lnSpc>
               <a:spcAft>
-                <a:spcPts val="500"/>
+                <a:spcPts val="1300"/>
               </a:spcAft>
             </a:pPr>
             <a:r>
-              <a:rPr sz="1650" b="1">
+              <a:rPr sz="1400" b="1">
                 <a:solidFill>
                   <a:srgbClr val="15505E"/>
                 </a:solidFill>
                 <a:latin typeface="Calibri"/>
               </a:rPr>
-              <a:t>1) Sacamos el análisis de correlación.</a:t>
+              <a:t>Sacamos el análisis de correlación y lo reemplazamos por esta tabla. </a:t>
             </a:r>
-          </a:p>
-          <a:p>
-            <a:pPr>
-              <a:lnSpc>
-                <a:spcPct val="116000"/>
-              </a:lnSpc>
-              <a:spcAft>
-                <a:spcPts val="1400"/>
-              </a:spcAft>
-            </a:pPr>
             <a:r>
-              <a:rPr sz="1550" b="0">
+              <a:rPr sz="1400" b="0">
                 <a:solidFill>
                   <a:srgbClr val="15505E"/>
                 </a:solidFill>
                 <a:latin typeface="Calibri"/>
               </a:rPr>
-              <a:t>En su lugar comparamos, comuna por comuna, cuánto más caro es el m² de un monoambiente que el de un 3 ambientes.</a:t>
+              <a:t>Alquiler mensual por m², promedio de 2025-T3 a 2026-T2, en pesos constantes de 2026-T2.</a:t>
             </a:r>
           </a:p>
+        </p:txBody>
+      </p:sp>
+      <p:graphicFrame>
+        <p:nvGraphicFramePr>
+          <p:cNvPr id="6" name="Table 5"/>
+          <p:cNvGraphicFramePr>
+            <a:graphicFrameLocks noGrp="1"/>
+          </p:cNvGraphicFramePr>
+          <p:nvPr/>
+        </p:nvGraphicFramePr>
+        <p:xfrm>
+          <a:off x="822960" y="1965960"/>
+          <a:ext cx="10515600" cy="3986784"/>
+        </p:xfrm>
+        <a:graphic>
+          <a:graphicData uri="http://schemas.openxmlformats.org/drawingml/2006/table">
+            <a:tbl>
+              <a:tblPr>
+                <a:tableStyleId>{5C22544A-7EE6-4342-B048-85BDC9FD1C3A}</a:tableStyleId>
+              </a:tblPr>
+              <a:tblGrid>
+                <a:gridCol w="2971800"/>
+                <a:gridCol w="731520"/>
+                <a:gridCol w="1463040"/>
+                <a:gridCol w="1463040"/>
+                <a:gridCol w="1508760"/>
+                <a:gridCol w="777240"/>
+                <a:gridCol w="777240"/>
+                <a:gridCol w="822960"/>
+              </a:tblGrid>
+              <a:tr h="420624">
+                <a:tc>
+                  <a:txBody>
+                    <a:bodyPr wrap="square"/>
+                    <a:lstStyle/>
+                    <a:p>
+                      <a:pPr algn="ctr">
+                        <a:lnSpc>
+                          <a:spcPct val="102000"/>
+                        </a:lnSpc>
+                        <a:spcAft>
+                          <a:spcPts val="0"/>
+                        </a:spcAft>
+                      </a:pPr>
+                      <a:r>
+                        <a:rPr sz="850" b="1">
+                          <a:solidFill>
+                            <a:srgbClr val="F4EFE4"/>
+                          </a:solidFill>
+                          <a:latin typeface="Calibri"/>
+                        </a:rPr>
+                        <a:t>Comuna</a:t>
+                      </a:r>
+                    </a:p>
+                  </a:txBody>
+                  <a:tcPr marL="91440" marR="91440" marT="36576" marB="36576" anchor="ctr">
+                    <a:lnB w="25400" cap="flat" cmpd="sng" algn="ctr">
+                      <a:solidFill>
+                        <a:srgbClr val="15505E"/>
+                      </a:solidFill>
+                    </a:lnB>
+                    <a:lnT w="25400" cap="flat" cmpd="sng" algn="ctr">
+                      <a:solidFill>
+                        <a:srgbClr val="15505E"/>
+                      </a:solidFill>
+                    </a:lnT>
+                    <a:lnR w="25400" cap="flat" cmpd="sng" algn="ctr">
+                      <a:solidFill>
+                        <a:srgbClr val="15505E"/>
+                      </a:solidFill>
+                    </a:lnR>
+                    <a:lnL w="25400" cap="flat" cmpd="sng" algn="ctr">
+                      <a:solidFill>
+                        <a:srgbClr val="15505E"/>
+                      </a:solidFill>
+                    </a:lnL>
+                    <a:solidFill>
+                      <a:srgbClr val="15505E"/>
+                    </a:solidFill>
+                  </a:tcPr>
+                </a:tc>
+                <a:tc>
+                  <a:txBody>
+                    <a:bodyPr wrap="square"/>
+                    <a:lstStyle/>
+                    <a:p>
+                      <a:pPr algn="ctr">
+                        <a:lnSpc>
+                          <a:spcPct val="102000"/>
+                        </a:lnSpc>
+                        <a:spcAft>
+                          <a:spcPts val="0"/>
+                        </a:spcAft>
+                      </a:pPr>
+                      <a:r>
+                        <a:rPr sz="850" b="1">
+                          <a:solidFill>
+                            <a:srgbClr val="F4EFE4"/>
+                          </a:solidFill>
+                          <a:latin typeface="Calibri"/>
+                        </a:rPr>
+                        <a:t>Zona</a:t>
+                      </a:r>
+                    </a:p>
+                  </a:txBody>
+                  <a:tcPr marL="91440" marR="91440" marT="36576" marB="36576" anchor="ctr">
+                    <a:lnB w="25400" cap="flat" cmpd="sng" algn="ctr">
+                      <a:solidFill>
+                        <a:srgbClr val="15505E"/>
+                      </a:solidFill>
+                    </a:lnB>
+                    <a:lnT w="25400" cap="flat" cmpd="sng" algn="ctr">
+                      <a:solidFill>
+                        <a:srgbClr val="15505E"/>
+                      </a:solidFill>
+                    </a:lnT>
+                    <a:lnR w="25400" cap="flat" cmpd="sng" algn="ctr">
+                      <a:solidFill>
+                        <a:srgbClr val="15505E"/>
+                      </a:solidFill>
+                    </a:lnR>
+                    <a:lnL w="25400" cap="flat" cmpd="sng" algn="ctr">
+                      <a:solidFill>
+                        <a:srgbClr val="15505E"/>
+                      </a:solidFill>
+                    </a:lnL>
+                    <a:solidFill>
+                      <a:srgbClr val="15505E"/>
+                    </a:solidFill>
+                  </a:tcPr>
+                </a:tc>
+                <a:tc>
+                  <a:txBody>
+                    <a:bodyPr wrap="square"/>
+                    <a:lstStyle/>
+                    <a:p>
+                      <a:pPr algn="ctr">
+                        <a:lnSpc>
+                          <a:spcPct val="102000"/>
+                        </a:lnSpc>
+                        <a:spcAft>
+                          <a:spcPts val="0"/>
+                        </a:spcAft>
+                      </a:pPr>
+                      <a:r>
+                        <a:rPr sz="850" b="1">
+                          <a:solidFill>
+                            <a:srgbClr val="F4EFE4"/>
+                          </a:solidFill>
+                          <a:latin typeface="Calibri"/>
+                        </a:rPr>
+                        <a:t>1 ambiente
+$/m² – alquiler</a:t>
+                      </a:r>
+                    </a:p>
+                  </a:txBody>
+                  <a:tcPr marL="91440" marR="91440" marT="36576" marB="36576" anchor="ctr">
+                    <a:lnB w="25400" cap="flat" cmpd="sng" algn="ctr">
+                      <a:solidFill>
+                        <a:srgbClr val="15505E"/>
+                      </a:solidFill>
+                    </a:lnB>
+                    <a:lnT w="25400" cap="flat" cmpd="sng" algn="ctr">
+                      <a:solidFill>
+                        <a:srgbClr val="15505E"/>
+                      </a:solidFill>
+                    </a:lnT>
+                    <a:lnR w="25400" cap="flat" cmpd="sng" algn="ctr">
+                      <a:solidFill>
+                        <a:srgbClr val="15505E"/>
+                      </a:solidFill>
+                    </a:lnR>
+                    <a:lnL w="25400" cap="flat" cmpd="sng" algn="ctr">
+                      <a:solidFill>
+                        <a:srgbClr val="15505E"/>
+                      </a:solidFill>
+                    </a:lnL>
+                    <a:solidFill>
+                      <a:srgbClr val="15505E"/>
+                    </a:solidFill>
+                  </a:tcPr>
+                </a:tc>
+                <a:tc>
+                  <a:txBody>
+                    <a:bodyPr wrap="square"/>
+                    <a:lstStyle/>
+                    <a:p>
+                      <a:pPr algn="ctr">
+                        <a:lnSpc>
+                          <a:spcPct val="102000"/>
+                        </a:lnSpc>
+                        <a:spcAft>
+                          <a:spcPts val="0"/>
+                        </a:spcAft>
+                      </a:pPr>
+                      <a:r>
+                        <a:rPr sz="850" b="1">
+                          <a:solidFill>
+                            <a:srgbClr val="F4EFE4"/>
+                          </a:solidFill>
+                          <a:latin typeface="Calibri"/>
+                        </a:rPr>
+                        <a:t>2 ambientes
+$/m² – alquiler</a:t>
+                      </a:r>
+                    </a:p>
+                  </a:txBody>
+                  <a:tcPr marL="91440" marR="91440" marT="36576" marB="36576" anchor="ctr">
+                    <a:lnB w="25400" cap="flat" cmpd="sng" algn="ctr">
+                      <a:solidFill>
+                        <a:srgbClr val="15505E"/>
+                      </a:solidFill>
+                    </a:lnB>
+                    <a:lnT w="25400" cap="flat" cmpd="sng" algn="ctr">
+                      <a:solidFill>
+                        <a:srgbClr val="15505E"/>
+                      </a:solidFill>
+                    </a:lnT>
+                    <a:lnR w="25400" cap="flat" cmpd="sng" algn="ctr">
+                      <a:solidFill>
+                        <a:srgbClr val="15505E"/>
+                      </a:solidFill>
+                    </a:lnR>
+                    <a:lnL w="25400" cap="flat" cmpd="sng" algn="ctr">
+                      <a:solidFill>
+                        <a:srgbClr val="15505E"/>
+                      </a:solidFill>
+                    </a:lnL>
+                    <a:solidFill>
+                      <a:srgbClr val="15505E"/>
+                    </a:solidFill>
+                  </a:tcPr>
+                </a:tc>
+                <a:tc>
+                  <a:txBody>
+                    <a:bodyPr wrap="square"/>
+                    <a:lstStyle/>
+                    <a:p>
+                      <a:pPr algn="ctr">
+                        <a:lnSpc>
+                          <a:spcPct val="102000"/>
+                        </a:lnSpc>
+                        <a:spcAft>
+                          <a:spcPts val="0"/>
+                        </a:spcAft>
+                      </a:pPr>
+                      <a:r>
+                        <a:rPr sz="850" b="1">
+                          <a:solidFill>
+                            <a:srgbClr val="F4EFE4"/>
+                          </a:solidFill>
+                          <a:latin typeface="Calibri"/>
+                        </a:rPr>
+                        <a:t>3 ambientes
+$/m² – alquiler</a:t>
+                      </a:r>
+                    </a:p>
+                  </a:txBody>
+                  <a:tcPr marL="91440" marR="91440" marT="36576" marB="36576" anchor="ctr">
+                    <a:lnB w="25400" cap="flat" cmpd="sng" algn="ctr">
+                      <a:solidFill>
+                        <a:srgbClr val="15505E"/>
+                      </a:solidFill>
+                    </a:lnB>
+                    <a:lnT w="25400" cap="flat" cmpd="sng" algn="ctr">
+                      <a:solidFill>
+                        <a:srgbClr val="15505E"/>
+                      </a:solidFill>
+                    </a:lnT>
+                    <a:lnR w="25400" cap="flat" cmpd="sng" algn="ctr">
+                      <a:solidFill>
+                        <a:srgbClr val="15505E"/>
+                      </a:solidFill>
+                    </a:lnR>
+                    <a:lnL w="25400" cap="flat" cmpd="sng" algn="ctr">
+                      <a:solidFill>
+                        <a:srgbClr val="15505E"/>
+                      </a:solidFill>
+                    </a:lnL>
+                    <a:solidFill>
+                      <a:srgbClr val="15505E"/>
+                    </a:solidFill>
+                  </a:tcPr>
+                </a:tc>
+                <a:tc>
+                  <a:txBody>
+                    <a:bodyPr wrap="square"/>
+                    <a:lstStyle/>
+                    <a:p>
+                      <a:pPr algn="ctr">
+                        <a:lnSpc>
+                          <a:spcPct val="102000"/>
+                        </a:lnSpc>
+                        <a:spcAft>
+                          <a:spcPts val="0"/>
+                        </a:spcAft>
+                      </a:pPr>
+                      <a:r>
+                        <a:rPr sz="850" b="1">
+                          <a:solidFill>
+                            <a:srgbClr val="F4EFE4"/>
+                          </a:solidFill>
+                          <a:latin typeface="Calibri"/>
+                        </a:rPr>
+                        <a:t>Prima
+hoy</a:t>
+                      </a:r>
+                    </a:p>
+                  </a:txBody>
+                  <a:tcPr marL="91440" marR="91440" marT="36576" marB="36576" anchor="ctr">
+                    <a:lnB w="25400" cap="flat" cmpd="sng" algn="ctr">
+                      <a:solidFill>
+                        <a:srgbClr val="15505E"/>
+                      </a:solidFill>
+                    </a:lnB>
+                    <a:lnT w="25400" cap="flat" cmpd="sng" algn="ctr">
+                      <a:solidFill>
+                        <a:srgbClr val="15505E"/>
+                      </a:solidFill>
+                    </a:lnT>
+                    <a:lnR w="25400" cap="flat" cmpd="sng" algn="ctr">
+                      <a:solidFill>
+                        <a:srgbClr val="15505E"/>
+                      </a:solidFill>
+                    </a:lnR>
+                    <a:lnL w="25400" cap="flat" cmpd="sng" algn="ctr">
+                      <a:solidFill>
+                        <a:srgbClr val="15505E"/>
+                      </a:solidFill>
+                    </a:lnL>
+                    <a:solidFill>
+                      <a:srgbClr val="15505E"/>
+                    </a:solidFill>
+                  </a:tcPr>
+                </a:tc>
+                <a:tc>
+                  <a:txBody>
+                    <a:bodyPr wrap="square"/>
+                    <a:lstStyle/>
+                    <a:p>
+                      <a:pPr algn="ctr">
+                        <a:lnSpc>
+                          <a:spcPct val="102000"/>
+                        </a:lnSpc>
+                        <a:spcAft>
+                          <a:spcPts val="0"/>
+                        </a:spcAft>
+                      </a:pPr>
+                      <a:r>
+                        <a:rPr sz="850" b="1">
+                          <a:solidFill>
+                            <a:srgbClr val="F4EFE4"/>
+                          </a:solidFill>
+                          <a:latin typeface="Calibri"/>
+                        </a:rPr>
+                        <a:t>Prima
+2018</a:t>
+                      </a:r>
+                    </a:p>
+                  </a:txBody>
+                  <a:tcPr marL="91440" marR="91440" marT="36576" marB="36576" anchor="ctr">
+                    <a:lnB w="25400" cap="flat" cmpd="sng" algn="ctr">
+                      <a:solidFill>
+                        <a:srgbClr val="15505E"/>
+                      </a:solidFill>
+                    </a:lnB>
+                    <a:lnT w="25400" cap="flat" cmpd="sng" algn="ctr">
+                      <a:solidFill>
+                        <a:srgbClr val="15505E"/>
+                      </a:solidFill>
+                    </a:lnT>
+                    <a:lnR w="25400" cap="flat" cmpd="sng" algn="ctr">
+                      <a:solidFill>
+                        <a:srgbClr val="15505E"/>
+                      </a:solidFill>
+                    </a:lnR>
+                    <a:lnL w="25400" cap="flat" cmpd="sng" algn="ctr">
+                      <a:solidFill>
+                        <a:srgbClr val="15505E"/>
+                      </a:solidFill>
+                    </a:lnL>
+                    <a:solidFill>
+                      <a:srgbClr val="15505E"/>
+                    </a:solidFill>
+                  </a:tcPr>
+                </a:tc>
+                <a:tc>
+                  <a:txBody>
+                    <a:bodyPr wrap="square"/>
+                    <a:lstStyle/>
+                    <a:p>
+                      <a:pPr algn="ctr">
+                        <a:lnSpc>
+                          <a:spcPct val="102000"/>
+                        </a:lnSpc>
+                        <a:spcAft>
+                          <a:spcPts val="0"/>
+                        </a:spcAft>
+                      </a:pPr>
+                      <a:r>
+                        <a:rPr sz="850" b="1">
+                          <a:solidFill>
+                            <a:srgbClr val="F4EFE4"/>
+                          </a:solidFill>
+                          <a:latin typeface="Calibri"/>
+                        </a:rPr>
+                        <a:t>Cambio
+(pp)</a:t>
+                      </a:r>
+                    </a:p>
+                  </a:txBody>
+                  <a:tcPr marL="91440" marR="91440" marT="36576" marB="36576" anchor="ctr">
+                    <a:lnB w="25400" cap="flat" cmpd="sng" algn="ctr">
+                      <a:solidFill>
+                        <a:srgbClr val="15505E"/>
+                      </a:solidFill>
+                    </a:lnB>
+                    <a:lnT w="25400" cap="flat" cmpd="sng" algn="ctr">
+                      <a:solidFill>
+                        <a:srgbClr val="15505E"/>
+                      </a:solidFill>
+                    </a:lnT>
+                    <a:lnR w="25400" cap="flat" cmpd="sng" algn="ctr">
+                      <a:solidFill>
+                        <a:srgbClr val="15505E"/>
+                      </a:solidFill>
+                    </a:lnR>
+                    <a:lnL w="25400" cap="flat" cmpd="sng" algn="ctr">
+                      <a:solidFill>
+                        <a:srgbClr val="15505E"/>
+                      </a:solidFill>
+                    </a:lnL>
+                    <a:solidFill>
+                      <a:srgbClr val="15505E"/>
+                    </a:solidFill>
+                  </a:tcPr>
+                </a:tc>
+              </a:tr>
+              <a:tr h="237744">
+                <a:tc>
+                  <a:txBody>
+                    <a:bodyPr wrap="square"/>
+                    <a:lstStyle/>
+                    <a:p>
+                      <a:pPr algn="ctr">
+                        <a:lnSpc>
+                          <a:spcPct val="102000"/>
+                        </a:lnSpc>
+                        <a:spcAft>
+                          <a:spcPts val="0"/>
+                        </a:spcAft>
+                      </a:pPr>
+                      <a:r>
+                        <a:rPr sz="850" b="0">
+                          <a:solidFill>
+                            <a:srgbClr val="15505E"/>
+                          </a:solidFill>
+                          <a:latin typeface="Calibri"/>
+                        </a:rPr>
+                        <a:t>1 (Retiro, San Nicolás, Puerto Madero, San Telmo, Monserrat, Constitución)</a:t>
+                      </a:r>
+                    </a:p>
+                  </a:txBody>
+                  <a:tcPr marL="91440" marR="91440" marT="36576" marB="36576" anchor="ctr">
+                    <a:lnB w="25400" cap="flat" cmpd="sng" algn="ctr">
+                      <a:solidFill>
+                        <a:srgbClr val="15505E"/>
+                      </a:solidFill>
+                    </a:lnB>
+                    <a:lnT w="25400" cap="flat" cmpd="sng" algn="ctr">
+                      <a:solidFill>
+                        <a:srgbClr val="15505E"/>
+                      </a:solidFill>
+                    </a:lnT>
+                    <a:lnR w="25400" cap="flat" cmpd="sng" algn="ctr">
+                      <a:solidFill>
+                        <a:srgbClr val="15505E"/>
+                      </a:solidFill>
+                    </a:lnR>
+                    <a:lnL w="25400" cap="flat" cmpd="sng" algn="ctr">
+                      <a:solidFill>
+                        <a:srgbClr val="15505E"/>
+                      </a:solidFill>
+                    </a:lnL>
+                    <a:solidFill>
+                      <a:srgbClr val="F4EFE4"/>
+                    </a:solidFill>
+                  </a:tcPr>
+                </a:tc>
+                <a:tc>
+                  <a:txBody>
+                    <a:bodyPr wrap="square"/>
+                    <a:lstStyle/>
+                    <a:p>
+                      <a:pPr algn="ctr">
+                        <a:lnSpc>
+                          <a:spcPct val="102000"/>
+                        </a:lnSpc>
+                        <a:spcAft>
+                          <a:spcPts val="0"/>
+                        </a:spcAft>
+                      </a:pPr>
+                      <a:r>
+                        <a:rPr sz="850" b="0">
+                          <a:solidFill>
+                            <a:srgbClr val="15505E"/>
+                          </a:solidFill>
+                          <a:latin typeface="Calibri"/>
+                        </a:rPr>
+                        <a:t>Centro</a:t>
+                      </a:r>
+                    </a:p>
+                  </a:txBody>
+                  <a:tcPr marL="91440" marR="91440" marT="36576" marB="36576" anchor="ctr">
+                    <a:lnB w="25400" cap="flat" cmpd="sng" algn="ctr">
+                      <a:solidFill>
+                        <a:srgbClr val="15505E"/>
+                      </a:solidFill>
+                    </a:lnB>
+                    <a:lnT w="25400" cap="flat" cmpd="sng" algn="ctr">
+                      <a:solidFill>
+                        <a:srgbClr val="15505E"/>
+                      </a:solidFill>
+                    </a:lnT>
+                    <a:lnR w="25400" cap="flat" cmpd="sng" algn="ctr">
+                      <a:solidFill>
+                        <a:srgbClr val="15505E"/>
+                      </a:solidFill>
+                    </a:lnR>
+                    <a:lnL w="25400" cap="flat" cmpd="sng" algn="ctr">
+                      <a:solidFill>
+                        <a:srgbClr val="15505E"/>
+                      </a:solidFill>
+                    </a:lnL>
+                    <a:solidFill>
+                      <a:srgbClr val="F4EFE4"/>
+                    </a:solidFill>
+                  </a:tcPr>
+                </a:tc>
+                <a:tc>
+                  <a:txBody>
+                    <a:bodyPr wrap="square"/>
+                    <a:lstStyle/>
+                    <a:p>
+                      <a:pPr algn="ctr">
+                        <a:lnSpc>
+                          <a:spcPct val="102000"/>
+                        </a:lnSpc>
+                        <a:spcAft>
+                          <a:spcPts val="0"/>
+                        </a:spcAft>
+                      </a:pPr>
+                      <a:r>
+                        <a:rPr sz="850" b="0">
+                          <a:solidFill>
+                            <a:srgbClr val="15505E"/>
+                          </a:solidFill>
+                          <a:latin typeface="Calibri"/>
+                        </a:rPr>
+                        <a:t>17.790 – $ 533.697</a:t>
+                      </a:r>
+                    </a:p>
+                  </a:txBody>
+                  <a:tcPr marL="91440" marR="91440" marT="36576" marB="36576" anchor="ctr">
+                    <a:lnB w="25400" cap="flat" cmpd="sng" algn="ctr">
+                      <a:solidFill>
+                        <a:srgbClr val="15505E"/>
+                      </a:solidFill>
+                    </a:lnB>
+                    <a:lnT w="25400" cap="flat" cmpd="sng" algn="ctr">
+                      <a:solidFill>
+                        <a:srgbClr val="15505E"/>
+                      </a:solidFill>
+                    </a:lnT>
+                    <a:lnR w="25400" cap="flat" cmpd="sng" algn="ctr">
+                      <a:solidFill>
+                        <a:srgbClr val="15505E"/>
+                      </a:solidFill>
+                    </a:lnR>
+                    <a:lnL w="25400" cap="flat" cmpd="sng" algn="ctr">
+                      <a:solidFill>
+                        <a:srgbClr val="15505E"/>
+                      </a:solidFill>
+                    </a:lnL>
+                    <a:solidFill>
+                      <a:srgbClr val="F4EFE4"/>
+                    </a:solidFill>
+                  </a:tcPr>
+                </a:tc>
+                <a:tc>
+                  <a:txBody>
+                    <a:bodyPr wrap="square"/>
+                    <a:lstStyle/>
+                    <a:p>
+                      <a:pPr algn="ctr">
+                        <a:lnSpc>
+                          <a:spcPct val="102000"/>
+                        </a:lnSpc>
+                        <a:spcAft>
+                          <a:spcPts val="0"/>
+                        </a:spcAft>
+                      </a:pPr>
+                      <a:r>
+                        <a:rPr sz="850" b="0">
+                          <a:solidFill>
+                            <a:srgbClr val="15505E"/>
+                          </a:solidFill>
+                          <a:latin typeface="Calibri"/>
+                        </a:rPr>
+                        <a:t>16.447 – $ 707.212</a:t>
+                      </a:r>
+                    </a:p>
+                  </a:txBody>
+                  <a:tcPr marL="91440" marR="91440" marT="36576" marB="36576" anchor="ctr">
+                    <a:lnB w="25400" cap="flat" cmpd="sng" algn="ctr">
+                      <a:solidFill>
+                        <a:srgbClr val="15505E"/>
+                      </a:solidFill>
+                    </a:lnB>
+                    <a:lnT w="25400" cap="flat" cmpd="sng" algn="ctr">
+                      <a:solidFill>
+                        <a:srgbClr val="15505E"/>
+                      </a:solidFill>
+                    </a:lnT>
+                    <a:lnR w="25400" cap="flat" cmpd="sng" algn="ctr">
+                      <a:solidFill>
+                        <a:srgbClr val="15505E"/>
+                      </a:solidFill>
+                    </a:lnR>
+                    <a:lnL w="25400" cap="flat" cmpd="sng" algn="ctr">
+                      <a:solidFill>
+                        <a:srgbClr val="15505E"/>
+                      </a:solidFill>
+                    </a:lnL>
+                    <a:solidFill>
+                      <a:srgbClr val="F4EFE4"/>
+                    </a:solidFill>
+                  </a:tcPr>
+                </a:tc>
+                <a:tc>
+                  <a:txBody>
+                    <a:bodyPr wrap="square"/>
+                    <a:lstStyle/>
+                    <a:p>
+                      <a:pPr algn="ctr">
+                        <a:lnSpc>
+                          <a:spcPct val="102000"/>
+                        </a:lnSpc>
+                        <a:spcAft>
+                          <a:spcPts val="0"/>
+                        </a:spcAft>
+                      </a:pPr>
+                      <a:r>
+                        <a:rPr sz="850" b="0">
+                          <a:solidFill>
+                            <a:srgbClr val="15505E"/>
+                          </a:solidFill>
+                          <a:latin typeface="Calibri"/>
+                        </a:rPr>
+                        <a:t>14.485 – $ 1.013.978</a:t>
+                      </a:r>
+                    </a:p>
+                  </a:txBody>
+                  <a:tcPr marL="91440" marR="91440" marT="36576" marB="36576" anchor="ctr">
+                    <a:lnB w="25400" cap="flat" cmpd="sng" algn="ctr">
+                      <a:solidFill>
+                        <a:srgbClr val="15505E"/>
+                      </a:solidFill>
+                    </a:lnB>
+                    <a:lnT w="25400" cap="flat" cmpd="sng" algn="ctr">
+                      <a:solidFill>
+                        <a:srgbClr val="15505E"/>
+                      </a:solidFill>
+                    </a:lnT>
+                    <a:lnR w="25400" cap="flat" cmpd="sng" algn="ctr">
+                      <a:solidFill>
+                        <a:srgbClr val="15505E"/>
+                      </a:solidFill>
+                    </a:lnR>
+                    <a:lnL w="25400" cap="flat" cmpd="sng" algn="ctr">
+                      <a:solidFill>
+                        <a:srgbClr val="15505E"/>
+                      </a:solidFill>
+                    </a:lnL>
+                    <a:solidFill>
+                      <a:srgbClr val="F4EFE4"/>
+                    </a:solidFill>
+                  </a:tcPr>
+                </a:tc>
+                <a:tc>
+                  <a:txBody>
+                    <a:bodyPr wrap="square"/>
+                    <a:lstStyle/>
+                    <a:p>
+                      <a:pPr algn="ctr">
+                        <a:lnSpc>
+                          <a:spcPct val="102000"/>
+                        </a:lnSpc>
+                        <a:spcAft>
+                          <a:spcPts val="0"/>
+                        </a:spcAft>
+                      </a:pPr>
+                      <a:r>
+                        <a:rPr sz="850" b="0">
+                          <a:solidFill>
+                            <a:srgbClr val="15505E"/>
+                          </a:solidFill>
+                          <a:latin typeface="Calibri"/>
+                        </a:rPr>
+                        <a:t>+23%</a:t>
+                      </a:r>
+                    </a:p>
+                  </a:txBody>
+                  <a:tcPr marL="91440" marR="91440" marT="36576" marB="36576" anchor="ctr">
+                    <a:lnB w="25400" cap="flat" cmpd="sng" algn="ctr">
+                      <a:solidFill>
+                        <a:srgbClr val="15505E"/>
+                      </a:solidFill>
+                    </a:lnB>
+                    <a:lnT w="25400" cap="flat" cmpd="sng" algn="ctr">
+                      <a:solidFill>
+                        <a:srgbClr val="15505E"/>
+                      </a:solidFill>
+                    </a:lnT>
+                    <a:lnR w="25400" cap="flat" cmpd="sng" algn="ctr">
+                      <a:solidFill>
+                        <a:srgbClr val="15505E"/>
+                      </a:solidFill>
+                    </a:lnR>
+                    <a:lnL w="25400" cap="flat" cmpd="sng" algn="ctr">
+                      <a:solidFill>
+                        <a:srgbClr val="15505E"/>
+                      </a:solidFill>
+                    </a:lnL>
+                    <a:solidFill>
+                      <a:srgbClr val="F4EFE4"/>
+                    </a:solidFill>
+                  </a:tcPr>
+                </a:tc>
+                <a:tc>
+                  <a:txBody>
+                    <a:bodyPr wrap="square"/>
+                    <a:lstStyle/>
+                    <a:p>
+                      <a:pPr algn="ctr">
+                        <a:lnSpc>
+                          <a:spcPct val="102000"/>
+                        </a:lnSpc>
+                        <a:spcAft>
+                          <a:spcPts val="0"/>
+                        </a:spcAft>
+                      </a:pPr>
+                      <a:r>
+                        <a:rPr sz="850" b="0">
+                          <a:solidFill>
+                            <a:srgbClr val="15505E"/>
+                          </a:solidFill>
+                          <a:latin typeface="Calibri"/>
+                        </a:rPr>
+                        <a:t>+8%</a:t>
+                      </a:r>
+                    </a:p>
+                  </a:txBody>
+                  <a:tcPr marL="91440" marR="91440" marT="36576" marB="36576" anchor="ctr">
+                    <a:lnB w="25400" cap="flat" cmpd="sng" algn="ctr">
+                      <a:solidFill>
+                        <a:srgbClr val="15505E"/>
+                      </a:solidFill>
+                    </a:lnB>
+                    <a:lnT w="25400" cap="flat" cmpd="sng" algn="ctr">
+                      <a:solidFill>
+                        <a:srgbClr val="15505E"/>
+                      </a:solidFill>
+                    </a:lnT>
+                    <a:lnR w="25400" cap="flat" cmpd="sng" algn="ctr">
+                      <a:solidFill>
+                        <a:srgbClr val="15505E"/>
+                      </a:solidFill>
+                    </a:lnR>
+                    <a:lnL w="25400" cap="flat" cmpd="sng" algn="ctr">
+                      <a:solidFill>
+                        <a:srgbClr val="15505E"/>
+                      </a:solidFill>
+                    </a:lnL>
+                    <a:solidFill>
+                      <a:srgbClr val="F4EFE4"/>
+                    </a:solidFill>
+                  </a:tcPr>
+                </a:tc>
+                <a:tc>
+                  <a:txBody>
+                    <a:bodyPr wrap="square"/>
+                    <a:lstStyle/>
+                    <a:p>
+                      <a:pPr algn="ctr">
+                        <a:lnSpc>
+                          <a:spcPct val="102000"/>
+                        </a:lnSpc>
+                        <a:spcAft>
+                          <a:spcPts val="0"/>
+                        </a:spcAft>
+                      </a:pPr>
+                      <a:r>
+                        <a:rPr sz="850" b="0">
+                          <a:solidFill>
+                            <a:srgbClr val="15505E"/>
+                          </a:solidFill>
+                          <a:latin typeface="Calibri"/>
+                        </a:rPr>
+                        <a:t>+14,3 pp</a:t>
+                      </a:r>
+                    </a:p>
+                  </a:txBody>
+                  <a:tcPr marL="91440" marR="91440" marT="36576" marB="36576" anchor="ctr">
+                    <a:lnB w="25400" cap="flat" cmpd="sng" algn="ctr">
+                      <a:solidFill>
+                        <a:srgbClr val="15505E"/>
+                      </a:solidFill>
+                    </a:lnB>
+                    <a:lnT w="25400" cap="flat" cmpd="sng" algn="ctr">
+                      <a:solidFill>
+                        <a:srgbClr val="15505E"/>
+                      </a:solidFill>
+                    </a:lnT>
+                    <a:lnR w="25400" cap="flat" cmpd="sng" algn="ctr">
+                      <a:solidFill>
+                        <a:srgbClr val="15505E"/>
+                      </a:solidFill>
+                    </a:lnR>
+                    <a:lnL w="25400" cap="flat" cmpd="sng" algn="ctr">
+                      <a:solidFill>
+                        <a:srgbClr val="15505E"/>
+                      </a:solidFill>
+                    </a:lnL>
+                    <a:solidFill>
+                      <a:srgbClr val="F4EFE4"/>
+                    </a:solidFill>
+                  </a:tcPr>
+                </a:tc>
+              </a:tr>
+              <a:tr h="237744">
+                <a:tc>
+                  <a:txBody>
+                    <a:bodyPr wrap="square"/>
+                    <a:lstStyle/>
+                    <a:p>
+                      <a:pPr algn="ctr">
+                        <a:lnSpc>
+                          <a:spcPct val="102000"/>
+                        </a:lnSpc>
+                        <a:spcAft>
+                          <a:spcPts val="0"/>
+                        </a:spcAft>
+                      </a:pPr>
+                      <a:r>
+                        <a:rPr sz="850" b="0">
+                          <a:solidFill>
+                            <a:srgbClr val="15505E"/>
+                          </a:solidFill>
+                          <a:latin typeface="Calibri"/>
+                        </a:rPr>
+                        <a:t>3 (Balvanera, San Cristóbal)</a:t>
+                      </a:r>
+                    </a:p>
+                  </a:txBody>
+                  <a:tcPr marL="91440" marR="91440" marT="36576" marB="36576" anchor="ctr">
+                    <a:lnB w="25400" cap="flat" cmpd="sng" algn="ctr">
+                      <a:solidFill>
+                        <a:srgbClr val="15505E"/>
+                      </a:solidFill>
+                    </a:lnB>
+                    <a:lnT w="25400" cap="flat" cmpd="sng" algn="ctr">
+                      <a:solidFill>
+                        <a:srgbClr val="15505E"/>
+                      </a:solidFill>
+                    </a:lnT>
+                    <a:lnR w="25400" cap="flat" cmpd="sng" algn="ctr">
+                      <a:solidFill>
+                        <a:srgbClr val="15505E"/>
+                      </a:solidFill>
+                    </a:lnR>
+                    <a:lnL w="25400" cap="flat" cmpd="sng" algn="ctr">
+                      <a:solidFill>
+                        <a:srgbClr val="15505E"/>
+                      </a:solidFill>
+                    </a:lnL>
+                    <a:solidFill>
+                      <a:srgbClr val="F4EFE4"/>
+                    </a:solidFill>
+                  </a:tcPr>
+                </a:tc>
+                <a:tc>
+                  <a:txBody>
+                    <a:bodyPr wrap="square"/>
+                    <a:lstStyle/>
+                    <a:p>
+                      <a:pPr algn="ctr">
+                        <a:lnSpc>
+                          <a:spcPct val="102000"/>
+                        </a:lnSpc>
+                        <a:spcAft>
+                          <a:spcPts val="0"/>
+                        </a:spcAft>
+                      </a:pPr>
+                      <a:r>
+                        <a:rPr sz="850" b="0">
+                          <a:solidFill>
+                            <a:srgbClr val="15505E"/>
+                          </a:solidFill>
+                          <a:latin typeface="Calibri"/>
+                        </a:rPr>
+                        <a:t>Centro</a:t>
+                      </a:r>
+                    </a:p>
+                  </a:txBody>
+                  <a:tcPr marL="91440" marR="91440" marT="36576" marB="36576" anchor="ctr">
+                    <a:lnB w="25400" cap="flat" cmpd="sng" algn="ctr">
+                      <a:solidFill>
+                        <a:srgbClr val="15505E"/>
+                      </a:solidFill>
+                    </a:lnB>
+                    <a:lnT w="25400" cap="flat" cmpd="sng" algn="ctr">
+                      <a:solidFill>
+                        <a:srgbClr val="15505E"/>
+                      </a:solidFill>
+                    </a:lnT>
+                    <a:lnR w="25400" cap="flat" cmpd="sng" algn="ctr">
+                      <a:solidFill>
+                        <a:srgbClr val="15505E"/>
+                      </a:solidFill>
+                    </a:lnR>
+                    <a:lnL w="25400" cap="flat" cmpd="sng" algn="ctr">
+                      <a:solidFill>
+                        <a:srgbClr val="15505E"/>
+                      </a:solidFill>
+                    </a:lnL>
+                    <a:solidFill>
+                      <a:srgbClr val="F4EFE4"/>
+                    </a:solidFill>
+                  </a:tcPr>
+                </a:tc>
+                <a:tc>
+                  <a:txBody>
+                    <a:bodyPr wrap="square"/>
+                    <a:lstStyle/>
+                    <a:p>
+                      <a:pPr algn="ctr">
+                        <a:lnSpc>
+                          <a:spcPct val="102000"/>
+                        </a:lnSpc>
+                        <a:spcAft>
+                          <a:spcPts val="0"/>
+                        </a:spcAft>
+                      </a:pPr>
+                      <a:r>
+                        <a:rPr sz="850" b="0">
+                          <a:solidFill>
+                            <a:srgbClr val="15505E"/>
+                          </a:solidFill>
+                          <a:latin typeface="Calibri"/>
+                        </a:rPr>
+                        <a:t>17.594 – $ 527.808</a:t>
+                      </a:r>
+                    </a:p>
+                  </a:txBody>
+                  <a:tcPr marL="91440" marR="91440" marT="36576" marB="36576" anchor="ctr">
+                    <a:lnB w="25400" cap="flat" cmpd="sng" algn="ctr">
+                      <a:solidFill>
+                        <a:srgbClr val="15505E"/>
+                      </a:solidFill>
+                    </a:lnB>
+                    <a:lnT w="25400" cap="flat" cmpd="sng" algn="ctr">
+                      <a:solidFill>
+                        <a:srgbClr val="15505E"/>
+                      </a:solidFill>
+                    </a:lnT>
+                    <a:lnR w="25400" cap="flat" cmpd="sng" algn="ctr">
+                      <a:solidFill>
+                        <a:srgbClr val="15505E"/>
+                      </a:solidFill>
+                    </a:lnR>
+                    <a:lnL w="25400" cap="flat" cmpd="sng" algn="ctr">
+                      <a:solidFill>
+                        <a:srgbClr val="15505E"/>
+                      </a:solidFill>
+                    </a:lnL>
+                    <a:solidFill>
+                      <a:srgbClr val="F4EFE4"/>
+                    </a:solidFill>
+                  </a:tcPr>
+                </a:tc>
+                <a:tc>
+                  <a:txBody>
+                    <a:bodyPr wrap="square"/>
+                    <a:lstStyle/>
+                    <a:p>
+                      <a:pPr algn="ctr">
+                        <a:lnSpc>
+                          <a:spcPct val="102000"/>
+                        </a:lnSpc>
+                        <a:spcAft>
+                          <a:spcPts val="0"/>
+                        </a:spcAft>
+                      </a:pPr>
+                      <a:r>
+                        <a:rPr sz="850" b="0">
+                          <a:solidFill>
+                            <a:srgbClr val="15505E"/>
+                          </a:solidFill>
+                          <a:latin typeface="Calibri"/>
+                        </a:rPr>
+                        <a:t>16.056 – $ 690.399</a:t>
+                      </a:r>
+                    </a:p>
+                  </a:txBody>
+                  <a:tcPr marL="91440" marR="91440" marT="36576" marB="36576" anchor="ctr">
+                    <a:lnB w="25400" cap="flat" cmpd="sng" algn="ctr">
+                      <a:solidFill>
+                        <a:srgbClr val="15505E"/>
+                      </a:solidFill>
+                    </a:lnB>
+                    <a:lnT w="25400" cap="flat" cmpd="sng" algn="ctr">
+                      <a:solidFill>
+                        <a:srgbClr val="15505E"/>
+                      </a:solidFill>
+                    </a:lnT>
+                    <a:lnR w="25400" cap="flat" cmpd="sng" algn="ctr">
+                      <a:solidFill>
+                        <a:srgbClr val="15505E"/>
+                      </a:solidFill>
+                    </a:lnR>
+                    <a:lnL w="25400" cap="flat" cmpd="sng" algn="ctr">
+                      <a:solidFill>
+                        <a:srgbClr val="15505E"/>
+                      </a:solidFill>
+                    </a:lnL>
+                    <a:solidFill>
+                      <a:srgbClr val="F4EFE4"/>
+                    </a:solidFill>
+                  </a:tcPr>
+                </a:tc>
+                <a:tc>
+                  <a:txBody>
+                    <a:bodyPr wrap="square"/>
+                    <a:lstStyle/>
+                    <a:p>
+                      <a:pPr algn="ctr">
+                        <a:lnSpc>
+                          <a:spcPct val="102000"/>
+                        </a:lnSpc>
+                        <a:spcAft>
+                          <a:spcPts val="0"/>
+                        </a:spcAft>
+                      </a:pPr>
+                      <a:r>
+                        <a:rPr sz="850" b="0">
+                          <a:solidFill>
+                            <a:srgbClr val="15505E"/>
+                          </a:solidFill>
+                          <a:latin typeface="Calibri"/>
+                        </a:rPr>
+                        <a:t>14.527 – $ 1.016.862</a:t>
+                      </a:r>
+                    </a:p>
+                  </a:txBody>
+                  <a:tcPr marL="91440" marR="91440" marT="36576" marB="36576" anchor="ctr">
+                    <a:lnB w="25400" cap="flat" cmpd="sng" algn="ctr">
+                      <a:solidFill>
+                        <a:srgbClr val="15505E"/>
+                      </a:solidFill>
+                    </a:lnB>
+                    <a:lnT w="25400" cap="flat" cmpd="sng" algn="ctr">
+                      <a:solidFill>
+                        <a:srgbClr val="15505E"/>
+                      </a:solidFill>
+                    </a:lnT>
+                    <a:lnR w="25400" cap="flat" cmpd="sng" algn="ctr">
+                      <a:solidFill>
+                        <a:srgbClr val="15505E"/>
+                      </a:solidFill>
+                    </a:lnR>
+                    <a:lnL w="25400" cap="flat" cmpd="sng" algn="ctr">
+                      <a:solidFill>
+                        <a:srgbClr val="15505E"/>
+                      </a:solidFill>
+                    </a:lnL>
+                    <a:solidFill>
+                      <a:srgbClr val="F4EFE4"/>
+                    </a:solidFill>
+                  </a:tcPr>
+                </a:tc>
+                <a:tc>
+                  <a:txBody>
+                    <a:bodyPr wrap="square"/>
+                    <a:lstStyle/>
+                    <a:p>
+                      <a:pPr algn="ctr">
+                        <a:lnSpc>
+                          <a:spcPct val="102000"/>
+                        </a:lnSpc>
+                        <a:spcAft>
+                          <a:spcPts val="0"/>
+                        </a:spcAft>
+                      </a:pPr>
+                      <a:r>
+                        <a:rPr sz="850" b="0">
+                          <a:solidFill>
+                            <a:srgbClr val="15505E"/>
+                          </a:solidFill>
+                          <a:latin typeface="Calibri"/>
+                        </a:rPr>
+                        <a:t>+21%</a:t>
+                      </a:r>
+                    </a:p>
+                  </a:txBody>
+                  <a:tcPr marL="91440" marR="91440" marT="36576" marB="36576" anchor="ctr">
+                    <a:lnB w="25400" cap="flat" cmpd="sng" algn="ctr">
+                      <a:solidFill>
+                        <a:srgbClr val="15505E"/>
+                      </a:solidFill>
+                    </a:lnB>
+                    <a:lnT w="25400" cap="flat" cmpd="sng" algn="ctr">
+                      <a:solidFill>
+                        <a:srgbClr val="15505E"/>
+                      </a:solidFill>
+                    </a:lnT>
+                    <a:lnR w="25400" cap="flat" cmpd="sng" algn="ctr">
+                      <a:solidFill>
+                        <a:srgbClr val="15505E"/>
+                      </a:solidFill>
+                    </a:lnR>
+                    <a:lnL w="25400" cap="flat" cmpd="sng" algn="ctr">
+                      <a:solidFill>
+                        <a:srgbClr val="15505E"/>
+                      </a:solidFill>
+                    </a:lnL>
+                    <a:solidFill>
+                      <a:srgbClr val="F4EFE4"/>
+                    </a:solidFill>
+                  </a:tcPr>
+                </a:tc>
+                <a:tc>
+                  <a:txBody>
+                    <a:bodyPr wrap="square"/>
+                    <a:lstStyle/>
+                    <a:p>
+                      <a:pPr algn="ctr">
+                        <a:lnSpc>
+                          <a:spcPct val="102000"/>
+                        </a:lnSpc>
+                        <a:spcAft>
+                          <a:spcPts val="0"/>
+                        </a:spcAft>
+                      </a:pPr>
+                      <a:r>
+                        <a:rPr sz="850" b="0">
+                          <a:solidFill>
+                            <a:srgbClr val="15505E"/>
+                          </a:solidFill>
+                          <a:latin typeface="Calibri"/>
+                        </a:rPr>
+                        <a:t>+20%</a:t>
+                      </a:r>
+                    </a:p>
+                  </a:txBody>
+                  <a:tcPr marL="91440" marR="91440" marT="36576" marB="36576" anchor="ctr">
+                    <a:lnB w="25400" cap="flat" cmpd="sng" algn="ctr">
+                      <a:solidFill>
+                        <a:srgbClr val="15505E"/>
+                      </a:solidFill>
+                    </a:lnB>
+                    <a:lnT w="25400" cap="flat" cmpd="sng" algn="ctr">
+                      <a:solidFill>
+                        <a:srgbClr val="15505E"/>
+                      </a:solidFill>
+                    </a:lnT>
+                    <a:lnR w="25400" cap="flat" cmpd="sng" algn="ctr">
+                      <a:solidFill>
+                        <a:srgbClr val="15505E"/>
+                      </a:solidFill>
+                    </a:lnR>
+                    <a:lnL w="25400" cap="flat" cmpd="sng" algn="ctr">
+                      <a:solidFill>
+                        <a:srgbClr val="15505E"/>
+                      </a:solidFill>
+                    </a:lnL>
+                    <a:solidFill>
+                      <a:srgbClr val="F4EFE4"/>
+                    </a:solidFill>
+                  </a:tcPr>
+                </a:tc>
+                <a:tc>
+                  <a:txBody>
+                    <a:bodyPr wrap="square"/>
+                    <a:lstStyle/>
+                    <a:p>
+                      <a:pPr algn="ctr">
+                        <a:lnSpc>
+                          <a:spcPct val="102000"/>
+                        </a:lnSpc>
+                        <a:spcAft>
+                          <a:spcPts val="0"/>
+                        </a:spcAft>
+                      </a:pPr>
+                      <a:r>
+                        <a:rPr sz="850" b="0">
+                          <a:solidFill>
+                            <a:srgbClr val="15505E"/>
+                          </a:solidFill>
+                          <a:latin typeface="Calibri"/>
+                        </a:rPr>
+                        <a:t>+1,0 pp</a:t>
+                      </a:r>
+                    </a:p>
+                  </a:txBody>
+                  <a:tcPr marL="91440" marR="91440" marT="36576" marB="36576" anchor="ctr">
+                    <a:lnB w="25400" cap="flat" cmpd="sng" algn="ctr">
+                      <a:solidFill>
+                        <a:srgbClr val="15505E"/>
+                      </a:solidFill>
+                    </a:lnB>
+                    <a:lnT w="25400" cap="flat" cmpd="sng" algn="ctr">
+                      <a:solidFill>
+                        <a:srgbClr val="15505E"/>
+                      </a:solidFill>
+                    </a:lnT>
+                    <a:lnR w="25400" cap="flat" cmpd="sng" algn="ctr">
+                      <a:solidFill>
+                        <a:srgbClr val="15505E"/>
+                      </a:solidFill>
+                    </a:lnR>
+                    <a:lnL w="25400" cap="flat" cmpd="sng" algn="ctr">
+                      <a:solidFill>
+                        <a:srgbClr val="15505E"/>
+                      </a:solidFill>
+                    </a:lnL>
+                    <a:solidFill>
+                      <a:srgbClr val="F4EFE4"/>
+                    </a:solidFill>
+                  </a:tcPr>
+                </a:tc>
+              </a:tr>
+              <a:tr h="237744">
+                <a:tc>
+                  <a:txBody>
+                    <a:bodyPr wrap="square"/>
+                    <a:lstStyle/>
+                    <a:p>
+                      <a:pPr algn="ctr">
+                        <a:lnSpc>
+                          <a:spcPct val="102000"/>
+                        </a:lnSpc>
+                        <a:spcAft>
+                          <a:spcPts val="0"/>
+                        </a:spcAft>
+                      </a:pPr>
+                      <a:r>
+                        <a:rPr sz="850" b="0">
+                          <a:solidFill>
+                            <a:srgbClr val="15505E"/>
+                          </a:solidFill>
+                          <a:latin typeface="Calibri"/>
+                        </a:rPr>
+                        <a:t>4 (La Boca, Barracas, Parque Patricios, Nueva Pompeya)</a:t>
+                      </a:r>
+                    </a:p>
+                  </a:txBody>
+                  <a:tcPr marL="91440" marR="91440" marT="36576" marB="36576" anchor="ctr">
+                    <a:lnB w="25400" cap="flat" cmpd="sng" algn="ctr">
+                      <a:solidFill>
+                        <a:srgbClr val="15505E"/>
+                      </a:solidFill>
+                    </a:lnB>
+                    <a:lnT w="25400" cap="flat" cmpd="sng" algn="ctr">
+                      <a:solidFill>
+                        <a:srgbClr val="15505E"/>
+                      </a:solidFill>
+                    </a:lnT>
+                    <a:lnR w="25400" cap="flat" cmpd="sng" algn="ctr">
+                      <a:solidFill>
+                        <a:srgbClr val="15505E"/>
+                      </a:solidFill>
+                    </a:lnR>
+                    <a:lnL w="25400" cap="flat" cmpd="sng" algn="ctr">
+                      <a:solidFill>
+                        <a:srgbClr val="15505E"/>
+                      </a:solidFill>
+                    </a:lnL>
+                    <a:solidFill>
+                      <a:srgbClr val="F4EFE4"/>
+                    </a:solidFill>
+                  </a:tcPr>
+                </a:tc>
+                <a:tc>
+                  <a:txBody>
+                    <a:bodyPr wrap="square"/>
+                    <a:lstStyle/>
+                    <a:p>
+                      <a:pPr algn="ctr">
+                        <a:lnSpc>
+                          <a:spcPct val="102000"/>
+                        </a:lnSpc>
+                        <a:spcAft>
+                          <a:spcPts val="0"/>
+                        </a:spcAft>
+                      </a:pPr>
+                      <a:r>
+                        <a:rPr sz="850" b="0">
+                          <a:solidFill>
+                            <a:srgbClr val="15505E"/>
+                          </a:solidFill>
+                          <a:latin typeface="Calibri"/>
+                        </a:rPr>
+                        <a:t>Sur</a:t>
+                      </a:r>
+                    </a:p>
+                  </a:txBody>
+                  <a:tcPr marL="91440" marR="91440" marT="36576" marB="36576" anchor="ctr">
+                    <a:lnB w="25400" cap="flat" cmpd="sng" algn="ctr">
+                      <a:solidFill>
+                        <a:srgbClr val="15505E"/>
+                      </a:solidFill>
+                    </a:lnB>
+                    <a:lnT w="25400" cap="flat" cmpd="sng" algn="ctr">
+                      <a:solidFill>
+                        <a:srgbClr val="15505E"/>
+                      </a:solidFill>
+                    </a:lnT>
+                    <a:lnR w="25400" cap="flat" cmpd="sng" algn="ctr">
+                      <a:solidFill>
+                        <a:srgbClr val="15505E"/>
+                      </a:solidFill>
+                    </a:lnR>
+                    <a:lnL w="25400" cap="flat" cmpd="sng" algn="ctr">
+                      <a:solidFill>
+                        <a:srgbClr val="15505E"/>
+                      </a:solidFill>
+                    </a:lnL>
+                    <a:solidFill>
+                      <a:srgbClr val="F4EFE4"/>
+                    </a:solidFill>
+                  </a:tcPr>
+                </a:tc>
+                <a:tc>
+                  <a:txBody>
+                    <a:bodyPr wrap="square"/>
+                    <a:lstStyle/>
+                    <a:p>
+                      <a:pPr algn="ctr">
+                        <a:lnSpc>
+                          <a:spcPct val="102000"/>
+                        </a:lnSpc>
+                        <a:spcAft>
+                          <a:spcPts val="0"/>
+                        </a:spcAft>
+                      </a:pPr>
+                      <a:r>
+                        <a:rPr sz="850" b="0">
+                          <a:solidFill>
+                            <a:srgbClr val="15505E"/>
+                          </a:solidFill>
+                          <a:latin typeface="Calibri"/>
+                        </a:rPr>
+                        <a:t>17.304 – $ 519.117</a:t>
+                      </a:r>
+                    </a:p>
+                  </a:txBody>
+                  <a:tcPr marL="91440" marR="91440" marT="36576" marB="36576" anchor="ctr">
+                    <a:lnB w="25400" cap="flat" cmpd="sng" algn="ctr">
+                      <a:solidFill>
+                        <a:srgbClr val="15505E"/>
+                      </a:solidFill>
+                    </a:lnB>
+                    <a:lnT w="25400" cap="flat" cmpd="sng" algn="ctr">
+                      <a:solidFill>
+                        <a:srgbClr val="15505E"/>
+                      </a:solidFill>
+                    </a:lnT>
+                    <a:lnR w="25400" cap="flat" cmpd="sng" algn="ctr">
+                      <a:solidFill>
+                        <a:srgbClr val="15505E"/>
+                      </a:solidFill>
+                    </a:lnR>
+                    <a:lnL w="25400" cap="flat" cmpd="sng" algn="ctr">
+                      <a:solidFill>
+                        <a:srgbClr val="15505E"/>
+                      </a:solidFill>
+                    </a:lnL>
+                    <a:solidFill>
+                      <a:srgbClr val="F4EFE4"/>
+                    </a:solidFill>
+                  </a:tcPr>
+                </a:tc>
+                <a:tc>
+                  <a:txBody>
+                    <a:bodyPr wrap="square"/>
+                    <a:lstStyle/>
+                    <a:p>
+                      <a:pPr algn="ctr">
+                        <a:lnSpc>
+                          <a:spcPct val="102000"/>
+                        </a:lnSpc>
+                        <a:spcAft>
+                          <a:spcPts val="0"/>
+                        </a:spcAft>
+                      </a:pPr>
+                      <a:r>
+                        <a:rPr sz="850" b="0">
+                          <a:solidFill>
+                            <a:srgbClr val="15505E"/>
+                          </a:solidFill>
+                          <a:latin typeface="Calibri"/>
+                        </a:rPr>
+                        <a:t>15.473 – $ 665.330</a:t>
+                      </a:r>
+                    </a:p>
+                  </a:txBody>
+                  <a:tcPr marL="91440" marR="91440" marT="36576" marB="36576" anchor="ctr">
+                    <a:lnB w="25400" cap="flat" cmpd="sng" algn="ctr">
+                      <a:solidFill>
+                        <a:srgbClr val="15505E"/>
+                      </a:solidFill>
+                    </a:lnB>
+                    <a:lnT w="25400" cap="flat" cmpd="sng" algn="ctr">
+                      <a:solidFill>
+                        <a:srgbClr val="15505E"/>
+                      </a:solidFill>
+                    </a:lnT>
+                    <a:lnR w="25400" cap="flat" cmpd="sng" algn="ctr">
+                      <a:solidFill>
+                        <a:srgbClr val="15505E"/>
+                      </a:solidFill>
+                    </a:lnR>
+                    <a:lnL w="25400" cap="flat" cmpd="sng" algn="ctr">
+                      <a:solidFill>
+                        <a:srgbClr val="15505E"/>
+                      </a:solidFill>
+                    </a:lnL>
+                    <a:solidFill>
+                      <a:srgbClr val="F4EFE4"/>
+                    </a:solidFill>
+                  </a:tcPr>
+                </a:tc>
+                <a:tc>
+                  <a:txBody>
+                    <a:bodyPr wrap="square"/>
+                    <a:lstStyle/>
+                    <a:p>
+                      <a:pPr algn="ctr">
+                        <a:lnSpc>
+                          <a:spcPct val="102000"/>
+                        </a:lnSpc>
+                        <a:spcAft>
+                          <a:spcPts val="0"/>
+                        </a:spcAft>
+                      </a:pPr>
+                      <a:r>
+                        <a:rPr sz="850" b="0">
+                          <a:solidFill>
+                            <a:srgbClr val="15505E"/>
+                          </a:solidFill>
+                          <a:latin typeface="Calibri"/>
+                        </a:rPr>
+                        <a:t>14.758 – $ 1.033.067</a:t>
+                      </a:r>
+                    </a:p>
+                  </a:txBody>
+                  <a:tcPr marL="91440" marR="91440" marT="36576" marB="36576" anchor="ctr">
+                    <a:lnB w="25400" cap="flat" cmpd="sng" algn="ctr">
+                      <a:solidFill>
+                        <a:srgbClr val="15505E"/>
+                      </a:solidFill>
+                    </a:lnB>
+                    <a:lnT w="25400" cap="flat" cmpd="sng" algn="ctr">
+                      <a:solidFill>
+                        <a:srgbClr val="15505E"/>
+                      </a:solidFill>
+                    </a:lnT>
+                    <a:lnR w="25400" cap="flat" cmpd="sng" algn="ctr">
+                      <a:solidFill>
+                        <a:srgbClr val="15505E"/>
+                      </a:solidFill>
+                    </a:lnR>
+                    <a:lnL w="25400" cap="flat" cmpd="sng" algn="ctr">
+                      <a:solidFill>
+                        <a:srgbClr val="15505E"/>
+                      </a:solidFill>
+                    </a:lnL>
+                    <a:solidFill>
+                      <a:srgbClr val="F4EFE4"/>
+                    </a:solidFill>
+                  </a:tcPr>
+                </a:tc>
+                <a:tc>
+                  <a:txBody>
+                    <a:bodyPr wrap="square"/>
+                    <a:lstStyle/>
+                    <a:p>
+                      <a:pPr algn="ctr">
+                        <a:lnSpc>
+                          <a:spcPct val="102000"/>
+                        </a:lnSpc>
+                        <a:spcAft>
+                          <a:spcPts val="0"/>
+                        </a:spcAft>
+                      </a:pPr>
+                      <a:r>
+                        <a:rPr sz="850" b="0">
+                          <a:solidFill>
+                            <a:srgbClr val="15505E"/>
+                          </a:solidFill>
+                          <a:latin typeface="Calibri"/>
+                        </a:rPr>
+                        <a:t>+17%</a:t>
+                      </a:r>
+                    </a:p>
+                  </a:txBody>
+                  <a:tcPr marL="91440" marR="91440" marT="36576" marB="36576" anchor="ctr">
+                    <a:lnB w="25400" cap="flat" cmpd="sng" algn="ctr">
+                      <a:solidFill>
+                        <a:srgbClr val="15505E"/>
+                      </a:solidFill>
+                    </a:lnB>
+                    <a:lnT w="25400" cap="flat" cmpd="sng" algn="ctr">
+                      <a:solidFill>
+                        <a:srgbClr val="15505E"/>
+                      </a:solidFill>
+                    </a:lnT>
+                    <a:lnR w="25400" cap="flat" cmpd="sng" algn="ctr">
+                      <a:solidFill>
+                        <a:srgbClr val="15505E"/>
+                      </a:solidFill>
+                    </a:lnR>
+                    <a:lnL w="25400" cap="flat" cmpd="sng" algn="ctr">
+                      <a:solidFill>
+                        <a:srgbClr val="15505E"/>
+                      </a:solidFill>
+                    </a:lnL>
+                    <a:solidFill>
+                      <a:srgbClr val="F4EFE4"/>
+                    </a:solidFill>
+                  </a:tcPr>
+                </a:tc>
+                <a:tc>
+                  <a:txBody>
+                    <a:bodyPr wrap="square"/>
+                    <a:lstStyle/>
+                    <a:p>
+                      <a:pPr algn="ctr">
+                        <a:lnSpc>
+                          <a:spcPct val="102000"/>
+                        </a:lnSpc>
+                        <a:spcAft>
+                          <a:spcPts val="0"/>
+                        </a:spcAft>
+                      </a:pPr>
+                      <a:r>
+                        <a:rPr sz="850" b="0">
+                          <a:solidFill>
+                            <a:srgbClr val="15505E"/>
+                          </a:solidFill>
+                          <a:latin typeface="Calibri"/>
+                        </a:rPr>
+                        <a:t>s/d</a:t>
+                      </a:r>
+                    </a:p>
+                  </a:txBody>
+                  <a:tcPr marL="91440" marR="91440" marT="36576" marB="36576" anchor="ctr">
+                    <a:lnB w="25400" cap="flat" cmpd="sng" algn="ctr">
+                      <a:solidFill>
+                        <a:srgbClr val="15505E"/>
+                      </a:solidFill>
+                    </a:lnB>
+                    <a:lnT w="25400" cap="flat" cmpd="sng" algn="ctr">
+                      <a:solidFill>
+                        <a:srgbClr val="15505E"/>
+                      </a:solidFill>
+                    </a:lnT>
+                    <a:lnR w="25400" cap="flat" cmpd="sng" algn="ctr">
+                      <a:solidFill>
+                        <a:srgbClr val="15505E"/>
+                      </a:solidFill>
+                    </a:lnR>
+                    <a:lnL w="25400" cap="flat" cmpd="sng" algn="ctr">
+                      <a:solidFill>
+                        <a:srgbClr val="15505E"/>
+                      </a:solidFill>
+                    </a:lnL>
+                    <a:solidFill>
+                      <a:srgbClr val="F4EFE4"/>
+                    </a:solidFill>
+                  </a:tcPr>
+                </a:tc>
+                <a:tc>
+                  <a:txBody>
+                    <a:bodyPr wrap="square"/>
+                    <a:lstStyle/>
+                    <a:p>
+                      <a:pPr algn="ctr">
+                        <a:lnSpc>
+                          <a:spcPct val="102000"/>
+                        </a:lnSpc>
+                        <a:spcAft>
+                          <a:spcPts val="0"/>
+                        </a:spcAft>
+                      </a:pPr>
+                      <a:r>
+                        <a:rPr sz="850" b="0">
+                          <a:solidFill>
+                            <a:srgbClr val="15505E"/>
+                          </a:solidFill>
+                          <a:latin typeface="Calibri"/>
+                        </a:rPr>
+                        <a:t>s/d</a:t>
+                      </a:r>
+                    </a:p>
+                  </a:txBody>
+                  <a:tcPr marL="91440" marR="91440" marT="36576" marB="36576" anchor="ctr">
+                    <a:lnB w="25400" cap="flat" cmpd="sng" algn="ctr">
+                      <a:solidFill>
+                        <a:srgbClr val="15505E"/>
+                      </a:solidFill>
+                    </a:lnB>
+                    <a:lnT w="25400" cap="flat" cmpd="sng" algn="ctr">
+                      <a:solidFill>
+                        <a:srgbClr val="15505E"/>
+                      </a:solidFill>
+                    </a:lnT>
+                    <a:lnR w="25400" cap="flat" cmpd="sng" algn="ctr">
+                      <a:solidFill>
+                        <a:srgbClr val="15505E"/>
+                      </a:solidFill>
+                    </a:lnR>
+                    <a:lnL w="25400" cap="flat" cmpd="sng" algn="ctr">
+                      <a:solidFill>
+                        <a:srgbClr val="15505E"/>
+                      </a:solidFill>
+                    </a:lnL>
+                    <a:solidFill>
+                      <a:srgbClr val="F4EFE4"/>
+                    </a:solidFill>
+                  </a:tcPr>
+                </a:tc>
+              </a:tr>
+              <a:tr h="237744">
+                <a:tc>
+                  <a:txBody>
+                    <a:bodyPr wrap="square"/>
+                    <a:lstStyle/>
+                    <a:p>
+                      <a:pPr algn="ctr">
+                        <a:lnSpc>
+                          <a:spcPct val="102000"/>
+                        </a:lnSpc>
+                        <a:spcAft>
+                          <a:spcPts val="0"/>
+                        </a:spcAft>
+                      </a:pPr>
+                      <a:r>
+                        <a:rPr sz="850" b="0">
+                          <a:solidFill>
+                            <a:srgbClr val="15505E"/>
+                          </a:solidFill>
+                          <a:latin typeface="Calibri"/>
+                        </a:rPr>
+                        <a:t>5 (Almagro, Boedo)</a:t>
+                      </a:r>
+                    </a:p>
+                  </a:txBody>
+                  <a:tcPr marL="91440" marR="91440" marT="36576" marB="36576" anchor="ctr">
+                    <a:lnB w="25400" cap="flat" cmpd="sng" algn="ctr">
+                      <a:solidFill>
+                        <a:srgbClr val="15505E"/>
+                      </a:solidFill>
+                    </a:lnB>
+                    <a:lnT w="25400" cap="flat" cmpd="sng" algn="ctr">
+                      <a:solidFill>
+                        <a:srgbClr val="15505E"/>
+                      </a:solidFill>
+                    </a:lnT>
+                    <a:lnR w="25400" cap="flat" cmpd="sng" algn="ctr">
+                      <a:solidFill>
+                        <a:srgbClr val="15505E"/>
+                      </a:solidFill>
+                    </a:lnR>
+                    <a:lnL w="25400" cap="flat" cmpd="sng" algn="ctr">
+                      <a:solidFill>
+                        <a:srgbClr val="15505E"/>
+                      </a:solidFill>
+                    </a:lnL>
+                    <a:solidFill>
+                      <a:srgbClr val="F4EFE4"/>
+                    </a:solidFill>
+                  </a:tcPr>
+                </a:tc>
+                <a:tc>
+                  <a:txBody>
+                    <a:bodyPr wrap="square"/>
+                    <a:lstStyle/>
+                    <a:p>
+                      <a:pPr algn="ctr">
+                        <a:lnSpc>
+                          <a:spcPct val="102000"/>
+                        </a:lnSpc>
+                        <a:spcAft>
+                          <a:spcPts val="0"/>
+                        </a:spcAft>
+                      </a:pPr>
+                      <a:r>
+                        <a:rPr sz="850" b="0">
+                          <a:solidFill>
+                            <a:srgbClr val="15505E"/>
+                          </a:solidFill>
+                          <a:latin typeface="Calibri"/>
+                        </a:rPr>
+                        <a:t>Centro</a:t>
+                      </a:r>
+                    </a:p>
+                  </a:txBody>
+                  <a:tcPr marL="91440" marR="91440" marT="36576" marB="36576" anchor="ctr">
+                    <a:lnB w="25400" cap="flat" cmpd="sng" algn="ctr">
+                      <a:solidFill>
+                        <a:srgbClr val="15505E"/>
+                      </a:solidFill>
+                    </a:lnB>
+                    <a:lnT w="25400" cap="flat" cmpd="sng" algn="ctr">
+                      <a:solidFill>
+                        <a:srgbClr val="15505E"/>
+                      </a:solidFill>
+                    </a:lnT>
+                    <a:lnR w="25400" cap="flat" cmpd="sng" algn="ctr">
+                      <a:solidFill>
+                        <a:srgbClr val="15505E"/>
+                      </a:solidFill>
+                    </a:lnR>
+                    <a:lnL w="25400" cap="flat" cmpd="sng" algn="ctr">
+                      <a:solidFill>
+                        <a:srgbClr val="15505E"/>
+                      </a:solidFill>
+                    </a:lnL>
+                    <a:solidFill>
+                      <a:srgbClr val="F4EFE4"/>
+                    </a:solidFill>
+                  </a:tcPr>
+                </a:tc>
+                <a:tc>
+                  <a:txBody>
+                    <a:bodyPr wrap="square"/>
+                    <a:lstStyle/>
+                    <a:p>
+                      <a:pPr algn="ctr">
+                        <a:lnSpc>
+                          <a:spcPct val="102000"/>
+                        </a:lnSpc>
+                        <a:spcAft>
+                          <a:spcPts val="0"/>
+                        </a:spcAft>
+                      </a:pPr>
+                      <a:r>
+                        <a:rPr sz="850" b="0">
+                          <a:solidFill>
+                            <a:srgbClr val="15505E"/>
+                          </a:solidFill>
+                          <a:latin typeface="Calibri"/>
+                        </a:rPr>
+                        <a:t>19.030 – $ 570.906</a:t>
+                      </a:r>
+                    </a:p>
+                  </a:txBody>
+                  <a:tcPr marL="91440" marR="91440" marT="36576" marB="36576" anchor="ctr">
+                    <a:lnB w="25400" cap="flat" cmpd="sng" algn="ctr">
+                      <a:solidFill>
+                        <a:srgbClr val="15505E"/>
+                      </a:solidFill>
+                    </a:lnB>
+                    <a:lnT w="25400" cap="flat" cmpd="sng" algn="ctr">
+                      <a:solidFill>
+                        <a:srgbClr val="15505E"/>
+                      </a:solidFill>
+                    </a:lnT>
+                    <a:lnR w="25400" cap="flat" cmpd="sng" algn="ctr">
+                      <a:solidFill>
+                        <a:srgbClr val="15505E"/>
+                      </a:solidFill>
+                    </a:lnR>
+                    <a:lnL w="25400" cap="flat" cmpd="sng" algn="ctr">
+                      <a:solidFill>
+                        <a:srgbClr val="15505E"/>
+                      </a:solidFill>
+                    </a:lnL>
+                    <a:solidFill>
+                      <a:srgbClr val="F4EFE4"/>
+                    </a:solidFill>
+                  </a:tcPr>
+                </a:tc>
+                <a:tc>
+                  <a:txBody>
+                    <a:bodyPr wrap="square"/>
+                    <a:lstStyle/>
+                    <a:p>
+                      <a:pPr algn="ctr">
+                        <a:lnSpc>
+                          <a:spcPct val="102000"/>
+                        </a:lnSpc>
+                        <a:spcAft>
+                          <a:spcPts val="0"/>
+                        </a:spcAft>
+                      </a:pPr>
+                      <a:r>
+                        <a:rPr sz="850" b="0">
+                          <a:solidFill>
+                            <a:srgbClr val="15505E"/>
+                          </a:solidFill>
+                          <a:latin typeface="Calibri"/>
+                        </a:rPr>
+                        <a:t>17.233 – $ 741.028</a:t>
+                      </a:r>
+                    </a:p>
+                  </a:txBody>
+                  <a:tcPr marL="91440" marR="91440" marT="36576" marB="36576" anchor="ctr">
+                    <a:lnB w="25400" cap="flat" cmpd="sng" algn="ctr">
+                      <a:solidFill>
+                        <a:srgbClr val="15505E"/>
+                      </a:solidFill>
+                    </a:lnB>
+                    <a:lnT w="25400" cap="flat" cmpd="sng" algn="ctr">
+                      <a:solidFill>
+                        <a:srgbClr val="15505E"/>
+                      </a:solidFill>
+                    </a:lnT>
+                    <a:lnR w="25400" cap="flat" cmpd="sng" algn="ctr">
+                      <a:solidFill>
+                        <a:srgbClr val="15505E"/>
+                      </a:solidFill>
+                    </a:lnR>
+                    <a:lnL w="25400" cap="flat" cmpd="sng" algn="ctr">
+                      <a:solidFill>
+                        <a:srgbClr val="15505E"/>
+                      </a:solidFill>
+                    </a:lnL>
+                    <a:solidFill>
+                      <a:srgbClr val="F4EFE4"/>
+                    </a:solidFill>
+                  </a:tcPr>
+                </a:tc>
+                <a:tc>
+                  <a:txBody>
+                    <a:bodyPr wrap="square"/>
+                    <a:lstStyle/>
+                    <a:p>
+                      <a:pPr algn="ctr">
+                        <a:lnSpc>
+                          <a:spcPct val="102000"/>
+                        </a:lnSpc>
+                        <a:spcAft>
+                          <a:spcPts val="0"/>
+                        </a:spcAft>
+                      </a:pPr>
+                      <a:r>
+                        <a:rPr sz="850" b="0">
+                          <a:solidFill>
+                            <a:srgbClr val="15505E"/>
+                          </a:solidFill>
+                          <a:latin typeface="Calibri"/>
+                        </a:rPr>
+                        <a:t>16.350 – $ 1.144.535</a:t>
+                      </a:r>
+                    </a:p>
+                  </a:txBody>
+                  <a:tcPr marL="91440" marR="91440" marT="36576" marB="36576" anchor="ctr">
+                    <a:lnB w="25400" cap="flat" cmpd="sng" algn="ctr">
+                      <a:solidFill>
+                        <a:srgbClr val="15505E"/>
+                      </a:solidFill>
+                    </a:lnB>
+                    <a:lnT w="25400" cap="flat" cmpd="sng" algn="ctr">
+                      <a:solidFill>
+                        <a:srgbClr val="15505E"/>
+                      </a:solidFill>
+                    </a:lnT>
+                    <a:lnR w="25400" cap="flat" cmpd="sng" algn="ctr">
+                      <a:solidFill>
+                        <a:srgbClr val="15505E"/>
+                      </a:solidFill>
+                    </a:lnR>
+                    <a:lnL w="25400" cap="flat" cmpd="sng" algn="ctr">
+                      <a:solidFill>
+                        <a:srgbClr val="15505E"/>
+                      </a:solidFill>
+                    </a:lnL>
+                    <a:solidFill>
+                      <a:srgbClr val="F4EFE4"/>
+                    </a:solidFill>
+                  </a:tcPr>
+                </a:tc>
+                <a:tc>
+                  <a:txBody>
+                    <a:bodyPr wrap="square"/>
+                    <a:lstStyle/>
+                    <a:p>
+                      <a:pPr algn="ctr">
+                        <a:lnSpc>
+                          <a:spcPct val="102000"/>
+                        </a:lnSpc>
+                        <a:spcAft>
+                          <a:spcPts val="0"/>
+                        </a:spcAft>
+                      </a:pPr>
+                      <a:r>
+                        <a:rPr sz="850" b="0">
+                          <a:solidFill>
+                            <a:srgbClr val="15505E"/>
+                          </a:solidFill>
+                          <a:latin typeface="Calibri"/>
+                        </a:rPr>
+                        <a:t>+16%</a:t>
+                      </a:r>
+                    </a:p>
+                  </a:txBody>
+                  <a:tcPr marL="91440" marR="91440" marT="36576" marB="36576" anchor="ctr">
+                    <a:lnB w="25400" cap="flat" cmpd="sng" algn="ctr">
+                      <a:solidFill>
+                        <a:srgbClr val="15505E"/>
+                      </a:solidFill>
+                    </a:lnB>
+                    <a:lnT w="25400" cap="flat" cmpd="sng" algn="ctr">
+                      <a:solidFill>
+                        <a:srgbClr val="15505E"/>
+                      </a:solidFill>
+                    </a:lnT>
+                    <a:lnR w="25400" cap="flat" cmpd="sng" algn="ctr">
+                      <a:solidFill>
+                        <a:srgbClr val="15505E"/>
+                      </a:solidFill>
+                    </a:lnR>
+                    <a:lnL w="25400" cap="flat" cmpd="sng" algn="ctr">
+                      <a:solidFill>
+                        <a:srgbClr val="15505E"/>
+                      </a:solidFill>
+                    </a:lnL>
+                    <a:solidFill>
+                      <a:srgbClr val="F4EFE4"/>
+                    </a:solidFill>
+                  </a:tcPr>
+                </a:tc>
+                <a:tc>
+                  <a:txBody>
+                    <a:bodyPr wrap="square"/>
+                    <a:lstStyle/>
+                    <a:p>
+                      <a:pPr algn="ctr">
+                        <a:lnSpc>
+                          <a:spcPct val="102000"/>
+                        </a:lnSpc>
+                        <a:spcAft>
+                          <a:spcPts val="0"/>
+                        </a:spcAft>
+                      </a:pPr>
+                      <a:r>
+                        <a:rPr sz="850" b="0">
+                          <a:solidFill>
+                            <a:srgbClr val="15505E"/>
+                          </a:solidFill>
+                          <a:latin typeface="Calibri"/>
+                        </a:rPr>
+                        <a:t>+19%</a:t>
+                      </a:r>
+                    </a:p>
+                  </a:txBody>
+                  <a:tcPr marL="91440" marR="91440" marT="36576" marB="36576" anchor="ctr">
+                    <a:lnB w="25400" cap="flat" cmpd="sng" algn="ctr">
+                      <a:solidFill>
+                        <a:srgbClr val="15505E"/>
+                      </a:solidFill>
+                    </a:lnB>
+                    <a:lnT w="25400" cap="flat" cmpd="sng" algn="ctr">
+                      <a:solidFill>
+                        <a:srgbClr val="15505E"/>
+                      </a:solidFill>
+                    </a:lnT>
+                    <a:lnR w="25400" cap="flat" cmpd="sng" algn="ctr">
+                      <a:solidFill>
+                        <a:srgbClr val="15505E"/>
+                      </a:solidFill>
+                    </a:lnR>
+                    <a:lnL w="25400" cap="flat" cmpd="sng" algn="ctr">
+                      <a:solidFill>
+                        <a:srgbClr val="15505E"/>
+                      </a:solidFill>
+                    </a:lnL>
+                    <a:solidFill>
+                      <a:srgbClr val="F4EFE4"/>
+                    </a:solidFill>
+                  </a:tcPr>
+                </a:tc>
+                <a:tc>
+                  <a:txBody>
+                    <a:bodyPr wrap="square"/>
+                    <a:lstStyle/>
+                    <a:p>
+                      <a:pPr algn="ctr">
+                        <a:lnSpc>
+                          <a:spcPct val="102000"/>
+                        </a:lnSpc>
+                        <a:spcAft>
+                          <a:spcPts val="0"/>
+                        </a:spcAft>
+                      </a:pPr>
+                      <a:r>
+                        <a:rPr sz="850" b="0">
+                          <a:solidFill>
+                            <a:srgbClr val="15505E"/>
+                          </a:solidFill>
+                          <a:latin typeface="Calibri"/>
+                        </a:rPr>
+                        <a:t>-2,3 pp</a:t>
+                      </a:r>
+                    </a:p>
+                  </a:txBody>
+                  <a:tcPr marL="91440" marR="91440" marT="36576" marB="36576" anchor="ctr">
+                    <a:lnB w="25400" cap="flat" cmpd="sng" algn="ctr">
+                      <a:solidFill>
+                        <a:srgbClr val="15505E"/>
+                      </a:solidFill>
+                    </a:lnB>
+                    <a:lnT w="25400" cap="flat" cmpd="sng" algn="ctr">
+                      <a:solidFill>
+                        <a:srgbClr val="15505E"/>
+                      </a:solidFill>
+                    </a:lnT>
+                    <a:lnR w="25400" cap="flat" cmpd="sng" algn="ctr">
+                      <a:solidFill>
+                        <a:srgbClr val="15505E"/>
+                      </a:solidFill>
+                    </a:lnR>
+                    <a:lnL w="25400" cap="flat" cmpd="sng" algn="ctr">
+                      <a:solidFill>
+                        <a:srgbClr val="15505E"/>
+                      </a:solidFill>
+                    </a:lnL>
+                    <a:solidFill>
+                      <a:srgbClr val="F4EFE4"/>
+                    </a:solidFill>
+                  </a:tcPr>
+                </a:tc>
+              </a:tr>
+              <a:tr h="237744">
+                <a:tc>
+                  <a:txBody>
+                    <a:bodyPr wrap="square"/>
+                    <a:lstStyle/>
+                    <a:p>
+                      <a:pPr algn="ctr">
+                        <a:lnSpc>
+                          <a:spcPct val="102000"/>
+                        </a:lnSpc>
+                        <a:spcAft>
+                          <a:spcPts val="0"/>
+                        </a:spcAft>
+                      </a:pPr>
+                      <a:r>
+                        <a:rPr sz="850" b="0">
+                          <a:solidFill>
+                            <a:srgbClr val="15505E"/>
+                          </a:solidFill>
+                          <a:latin typeface="Calibri"/>
+                        </a:rPr>
+                        <a:t>7 (Flores, Parque Chacabuco)</a:t>
+                      </a:r>
+                    </a:p>
+                  </a:txBody>
+                  <a:tcPr marL="91440" marR="91440" marT="36576" marB="36576" anchor="ctr">
+                    <a:lnB w="25400" cap="flat" cmpd="sng" algn="ctr">
+                      <a:solidFill>
+                        <a:srgbClr val="15505E"/>
+                      </a:solidFill>
+                    </a:lnB>
+                    <a:lnT w="25400" cap="flat" cmpd="sng" algn="ctr">
+                      <a:solidFill>
+                        <a:srgbClr val="15505E"/>
+                      </a:solidFill>
+                    </a:lnT>
+                    <a:lnR w="25400" cap="flat" cmpd="sng" algn="ctr">
+                      <a:solidFill>
+                        <a:srgbClr val="15505E"/>
+                      </a:solidFill>
+                    </a:lnR>
+                    <a:lnL w="25400" cap="flat" cmpd="sng" algn="ctr">
+                      <a:solidFill>
+                        <a:srgbClr val="15505E"/>
+                      </a:solidFill>
+                    </a:lnL>
+                    <a:solidFill>
+                      <a:srgbClr val="F4EFE4"/>
+                    </a:solidFill>
+                  </a:tcPr>
+                </a:tc>
+                <a:tc>
+                  <a:txBody>
+                    <a:bodyPr wrap="square"/>
+                    <a:lstStyle/>
+                    <a:p>
+                      <a:pPr algn="ctr">
+                        <a:lnSpc>
+                          <a:spcPct val="102000"/>
+                        </a:lnSpc>
+                        <a:spcAft>
+                          <a:spcPts val="0"/>
+                        </a:spcAft>
+                      </a:pPr>
+                      <a:r>
+                        <a:rPr sz="850" b="0">
+                          <a:solidFill>
+                            <a:srgbClr val="15505E"/>
+                          </a:solidFill>
+                          <a:latin typeface="Calibri"/>
+                        </a:rPr>
+                        <a:t>Sur</a:t>
+                      </a:r>
+                    </a:p>
+                  </a:txBody>
+                  <a:tcPr marL="91440" marR="91440" marT="36576" marB="36576" anchor="ctr">
+                    <a:lnB w="25400" cap="flat" cmpd="sng" algn="ctr">
+                      <a:solidFill>
+                        <a:srgbClr val="15505E"/>
+                      </a:solidFill>
+                    </a:lnB>
+                    <a:lnT w="25400" cap="flat" cmpd="sng" algn="ctr">
+                      <a:solidFill>
+                        <a:srgbClr val="15505E"/>
+                      </a:solidFill>
+                    </a:lnT>
+                    <a:lnR w="25400" cap="flat" cmpd="sng" algn="ctr">
+                      <a:solidFill>
+                        <a:srgbClr val="15505E"/>
+                      </a:solidFill>
+                    </a:lnR>
+                    <a:lnL w="25400" cap="flat" cmpd="sng" algn="ctr">
+                      <a:solidFill>
+                        <a:srgbClr val="15505E"/>
+                      </a:solidFill>
+                    </a:lnL>
+                    <a:solidFill>
+                      <a:srgbClr val="F4EFE4"/>
+                    </a:solidFill>
+                  </a:tcPr>
+                </a:tc>
+                <a:tc>
+                  <a:txBody>
+                    <a:bodyPr wrap="square"/>
+                    <a:lstStyle/>
+                    <a:p>
+                      <a:pPr algn="ctr">
+                        <a:lnSpc>
+                          <a:spcPct val="102000"/>
+                        </a:lnSpc>
+                        <a:spcAft>
+                          <a:spcPts val="0"/>
+                        </a:spcAft>
+                      </a:pPr>
+                      <a:r>
+                        <a:rPr sz="850" b="0">
+                          <a:solidFill>
+                            <a:srgbClr val="15505E"/>
+                          </a:solidFill>
+                          <a:latin typeface="Calibri"/>
+                        </a:rPr>
+                        <a:t>17.723 – $ 531.687</a:t>
+                      </a:r>
+                    </a:p>
+                  </a:txBody>
+                  <a:tcPr marL="91440" marR="91440" marT="36576" marB="36576" anchor="ctr">
+                    <a:lnB w="25400" cap="flat" cmpd="sng" algn="ctr">
+                      <a:solidFill>
+                        <a:srgbClr val="15505E"/>
+                      </a:solidFill>
+                    </a:lnB>
+                    <a:lnT w="25400" cap="flat" cmpd="sng" algn="ctr">
+                      <a:solidFill>
+                        <a:srgbClr val="15505E"/>
+                      </a:solidFill>
+                    </a:lnT>
+                    <a:lnR w="25400" cap="flat" cmpd="sng" algn="ctr">
+                      <a:solidFill>
+                        <a:srgbClr val="15505E"/>
+                      </a:solidFill>
+                    </a:lnR>
+                    <a:lnL w="25400" cap="flat" cmpd="sng" algn="ctr">
+                      <a:solidFill>
+                        <a:srgbClr val="15505E"/>
+                      </a:solidFill>
+                    </a:lnL>
+                    <a:solidFill>
+                      <a:srgbClr val="F4EFE4"/>
+                    </a:solidFill>
+                  </a:tcPr>
+                </a:tc>
+                <a:tc>
+                  <a:txBody>
+                    <a:bodyPr wrap="square"/>
+                    <a:lstStyle/>
+                    <a:p>
+                      <a:pPr algn="ctr">
+                        <a:lnSpc>
+                          <a:spcPct val="102000"/>
+                        </a:lnSpc>
+                        <a:spcAft>
+                          <a:spcPts val="0"/>
+                        </a:spcAft>
+                      </a:pPr>
+                      <a:r>
+                        <a:rPr sz="850" b="0">
+                          <a:solidFill>
+                            <a:srgbClr val="15505E"/>
+                          </a:solidFill>
+                          <a:latin typeface="Calibri"/>
+                        </a:rPr>
+                        <a:t>16.322 – $ 701.855</a:t>
+                      </a:r>
+                    </a:p>
+                  </a:txBody>
+                  <a:tcPr marL="91440" marR="91440" marT="36576" marB="36576" anchor="ctr">
+                    <a:lnB w="25400" cap="flat" cmpd="sng" algn="ctr">
+                      <a:solidFill>
+                        <a:srgbClr val="15505E"/>
+                      </a:solidFill>
+                    </a:lnB>
+                    <a:lnT w="25400" cap="flat" cmpd="sng" algn="ctr">
+                      <a:solidFill>
+                        <a:srgbClr val="15505E"/>
+                      </a:solidFill>
+                    </a:lnT>
+                    <a:lnR w="25400" cap="flat" cmpd="sng" algn="ctr">
+                      <a:solidFill>
+                        <a:srgbClr val="15505E"/>
+                      </a:solidFill>
+                    </a:lnR>
+                    <a:lnL w="25400" cap="flat" cmpd="sng" algn="ctr">
+                      <a:solidFill>
+                        <a:srgbClr val="15505E"/>
+                      </a:solidFill>
+                    </a:lnL>
+                    <a:solidFill>
+                      <a:srgbClr val="F4EFE4"/>
+                    </a:solidFill>
+                  </a:tcPr>
+                </a:tc>
+                <a:tc>
+                  <a:txBody>
+                    <a:bodyPr wrap="square"/>
+                    <a:lstStyle/>
+                    <a:p>
+                      <a:pPr algn="ctr">
+                        <a:lnSpc>
+                          <a:spcPct val="102000"/>
+                        </a:lnSpc>
+                        <a:spcAft>
+                          <a:spcPts val="0"/>
+                        </a:spcAft>
+                      </a:pPr>
+                      <a:r>
+                        <a:rPr sz="850" b="0">
+                          <a:solidFill>
+                            <a:srgbClr val="15505E"/>
+                          </a:solidFill>
+                          <a:latin typeface="Calibri"/>
+                        </a:rPr>
+                        <a:t>15.440 – $ 1.080.779</a:t>
+                      </a:r>
+                    </a:p>
+                  </a:txBody>
+                  <a:tcPr marL="91440" marR="91440" marT="36576" marB="36576" anchor="ctr">
+                    <a:lnB w="25400" cap="flat" cmpd="sng" algn="ctr">
+                      <a:solidFill>
+                        <a:srgbClr val="15505E"/>
+                      </a:solidFill>
+                    </a:lnB>
+                    <a:lnT w="25400" cap="flat" cmpd="sng" algn="ctr">
+                      <a:solidFill>
+                        <a:srgbClr val="15505E"/>
+                      </a:solidFill>
+                    </a:lnT>
+                    <a:lnR w="25400" cap="flat" cmpd="sng" algn="ctr">
+                      <a:solidFill>
+                        <a:srgbClr val="15505E"/>
+                      </a:solidFill>
+                    </a:lnR>
+                    <a:lnL w="25400" cap="flat" cmpd="sng" algn="ctr">
+                      <a:solidFill>
+                        <a:srgbClr val="15505E"/>
+                      </a:solidFill>
+                    </a:lnL>
+                    <a:solidFill>
+                      <a:srgbClr val="F4EFE4"/>
+                    </a:solidFill>
+                  </a:tcPr>
+                </a:tc>
+                <a:tc>
+                  <a:txBody>
+                    <a:bodyPr wrap="square"/>
+                    <a:lstStyle/>
+                    <a:p>
+                      <a:pPr algn="ctr">
+                        <a:lnSpc>
+                          <a:spcPct val="102000"/>
+                        </a:lnSpc>
+                        <a:spcAft>
+                          <a:spcPts val="0"/>
+                        </a:spcAft>
+                      </a:pPr>
+                      <a:r>
+                        <a:rPr sz="850" b="0">
+                          <a:solidFill>
+                            <a:srgbClr val="15505E"/>
+                          </a:solidFill>
+                          <a:latin typeface="Calibri"/>
+                        </a:rPr>
+                        <a:t>+15%</a:t>
+                      </a:r>
+                    </a:p>
+                  </a:txBody>
+                  <a:tcPr marL="91440" marR="91440" marT="36576" marB="36576" anchor="ctr">
+                    <a:lnB w="25400" cap="flat" cmpd="sng" algn="ctr">
+                      <a:solidFill>
+                        <a:srgbClr val="15505E"/>
+                      </a:solidFill>
+                    </a:lnB>
+                    <a:lnT w="25400" cap="flat" cmpd="sng" algn="ctr">
+                      <a:solidFill>
+                        <a:srgbClr val="15505E"/>
+                      </a:solidFill>
+                    </a:lnT>
+                    <a:lnR w="25400" cap="flat" cmpd="sng" algn="ctr">
+                      <a:solidFill>
+                        <a:srgbClr val="15505E"/>
+                      </a:solidFill>
+                    </a:lnR>
+                    <a:lnL w="25400" cap="flat" cmpd="sng" algn="ctr">
+                      <a:solidFill>
+                        <a:srgbClr val="15505E"/>
+                      </a:solidFill>
+                    </a:lnL>
+                    <a:solidFill>
+                      <a:srgbClr val="F4EFE4"/>
+                    </a:solidFill>
+                  </a:tcPr>
+                </a:tc>
+                <a:tc>
+                  <a:txBody>
+                    <a:bodyPr wrap="square"/>
+                    <a:lstStyle/>
+                    <a:p>
+                      <a:pPr algn="ctr">
+                        <a:lnSpc>
+                          <a:spcPct val="102000"/>
+                        </a:lnSpc>
+                        <a:spcAft>
+                          <a:spcPts val="0"/>
+                        </a:spcAft>
+                      </a:pPr>
+                      <a:r>
+                        <a:rPr sz="850" b="0">
+                          <a:solidFill>
+                            <a:srgbClr val="15505E"/>
+                          </a:solidFill>
+                          <a:latin typeface="Calibri"/>
+                        </a:rPr>
+                        <a:t>+16%</a:t>
+                      </a:r>
+                    </a:p>
+                  </a:txBody>
+                  <a:tcPr marL="91440" marR="91440" marT="36576" marB="36576" anchor="ctr">
+                    <a:lnB w="25400" cap="flat" cmpd="sng" algn="ctr">
+                      <a:solidFill>
+                        <a:srgbClr val="15505E"/>
+                      </a:solidFill>
+                    </a:lnB>
+                    <a:lnT w="25400" cap="flat" cmpd="sng" algn="ctr">
+                      <a:solidFill>
+                        <a:srgbClr val="15505E"/>
+                      </a:solidFill>
+                    </a:lnT>
+                    <a:lnR w="25400" cap="flat" cmpd="sng" algn="ctr">
+                      <a:solidFill>
+                        <a:srgbClr val="15505E"/>
+                      </a:solidFill>
+                    </a:lnR>
+                    <a:lnL w="25400" cap="flat" cmpd="sng" algn="ctr">
+                      <a:solidFill>
+                        <a:srgbClr val="15505E"/>
+                      </a:solidFill>
+                    </a:lnL>
+                    <a:solidFill>
+                      <a:srgbClr val="F4EFE4"/>
+                    </a:solidFill>
+                  </a:tcPr>
+                </a:tc>
+                <a:tc>
+                  <a:txBody>
+                    <a:bodyPr wrap="square"/>
+                    <a:lstStyle/>
+                    <a:p>
+                      <a:pPr algn="ctr">
+                        <a:lnSpc>
+                          <a:spcPct val="102000"/>
+                        </a:lnSpc>
+                        <a:spcAft>
+                          <a:spcPts val="0"/>
+                        </a:spcAft>
+                      </a:pPr>
+                      <a:r>
+                        <a:rPr sz="850" b="0">
+                          <a:solidFill>
+                            <a:srgbClr val="15505E"/>
+                          </a:solidFill>
+                          <a:latin typeface="Calibri"/>
+                        </a:rPr>
+                        <a:t>-1,4 pp</a:t>
+                      </a:r>
+                    </a:p>
+                  </a:txBody>
+                  <a:tcPr marL="91440" marR="91440" marT="36576" marB="36576" anchor="ctr">
+                    <a:lnB w="25400" cap="flat" cmpd="sng" algn="ctr">
+                      <a:solidFill>
+                        <a:srgbClr val="15505E"/>
+                      </a:solidFill>
+                    </a:lnB>
+                    <a:lnT w="25400" cap="flat" cmpd="sng" algn="ctr">
+                      <a:solidFill>
+                        <a:srgbClr val="15505E"/>
+                      </a:solidFill>
+                    </a:lnT>
+                    <a:lnR w="25400" cap="flat" cmpd="sng" algn="ctr">
+                      <a:solidFill>
+                        <a:srgbClr val="15505E"/>
+                      </a:solidFill>
+                    </a:lnR>
+                    <a:lnL w="25400" cap="flat" cmpd="sng" algn="ctr">
+                      <a:solidFill>
+                        <a:srgbClr val="15505E"/>
+                      </a:solidFill>
+                    </a:lnL>
+                    <a:solidFill>
+                      <a:srgbClr val="F4EFE4"/>
+                    </a:solidFill>
+                  </a:tcPr>
+                </a:tc>
+              </a:tr>
+              <a:tr h="237744">
+                <a:tc>
+                  <a:txBody>
+                    <a:bodyPr wrap="square"/>
+                    <a:lstStyle/>
+                    <a:p>
+                      <a:pPr algn="ctr">
+                        <a:lnSpc>
+                          <a:spcPct val="102000"/>
+                        </a:lnSpc>
+                        <a:spcAft>
+                          <a:spcPts val="0"/>
+                        </a:spcAft>
+                      </a:pPr>
+                      <a:r>
+                        <a:rPr sz="850" b="0">
+                          <a:solidFill>
+                            <a:srgbClr val="15505E"/>
+                          </a:solidFill>
+                          <a:latin typeface="Calibri"/>
+                        </a:rPr>
+                        <a:t>2 (Recoleta)</a:t>
+                      </a:r>
+                    </a:p>
+                  </a:txBody>
+                  <a:tcPr marL="91440" marR="91440" marT="36576" marB="36576" anchor="ctr">
+                    <a:lnB w="25400" cap="flat" cmpd="sng" algn="ctr">
+                      <a:solidFill>
+                        <a:srgbClr val="15505E"/>
+                      </a:solidFill>
+                    </a:lnB>
+                    <a:lnT w="25400" cap="flat" cmpd="sng" algn="ctr">
+                      <a:solidFill>
+                        <a:srgbClr val="15505E"/>
+                      </a:solidFill>
+                    </a:lnT>
+                    <a:lnR w="25400" cap="flat" cmpd="sng" algn="ctr">
+                      <a:solidFill>
+                        <a:srgbClr val="15505E"/>
+                      </a:solidFill>
+                    </a:lnR>
+                    <a:lnL w="25400" cap="flat" cmpd="sng" algn="ctr">
+                      <a:solidFill>
+                        <a:srgbClr val="15505E"/>
+                      </a:solidFill>
+                    </a:lnL>
+                    <a:solidFill>
+                      <a:srgbClr val="F4EFE4"/>
+                    </a:solidFill>
+                  </a:tcPr>
+                </a:tc>
+                <a:tc>
+                  <a:txBody>
+                    <a:bodyPr wrap="square"/>
+                    <a:lstStyle/>
+                    <a:p>
+                      <a:pPr algn="ctr">
+                        <a:lnSpc>
+                          <a:spcPct val="102000"/>
+                        </a:lnSpc>
+                        <a:spcAft>
+                          <a:spcPts val="0"/>
+                        </a:spcAft>
+                      </a:pPr>
+                      <a:r>
+                        <a:rPr sz="850" b="0">
+                          <a:solidFill>
+                            <a:srgbClr val="15505E"/>
+                          </a:solidFill>
+                          <a:latin typeface="Calibri"/>
+                        </a:rPr>
+                        <a:t>Norte</a:t>
+                      </a:r>
+                    </a:p>
+                  </a:txBody>
+                  <a:tcPr marL="91440" marR="91440" marT="36576" marB="36576" anchor="ctr">
+                    <a:lnB w="25400" cap="flat" cmpd="sng" algn="ctr">
+                      <a:solidFill>
+                        <a:srgbClr val="15505E"/>
+                      </a:solidFill>
+                    </a:lnB>
+                    <a:lnT w="25400" cap="flat" cmpd="sng" algn="ctr">
+                      <a:solidFill>
+                        <a:srgbClr val="15505E"/>
+                      </a:solidFill>
+                    </a:lnT>
+                    <a:lnR w="25400" cap="flat" cmpd="sng" algn="ctr">
+                      <a:solidFill>
+                        <a:srgbClr val="15505E"/>
+                      </a:solidFill>
+                    </a:lnR>
+                    <a:lnL w="25400" cap="flat" cmpd="sng" algn="ctr">
+                      <a:solidFill>
+                        <a:srgbClr val="15505E"/>
+                      </a:solidFill>
+                    </a:lnL>
+                    <a:solidFill>
+                      <a:srgbClr val="F4EFE4"/>
+                    </a:solidFill>
+                  </a:tcPr>
+                </a:tc>
+                <a:tc>
+                  <a:txBody>
+                    <a:bodyPr wrap="square"/>
+                    <a:lstStyle/>
+                    <a:p>
+                      <a:pPr algn="ctr">
+                        <a:lnSpc>
+                          <a:spcPct val="102000"/>
+                        </a:lnSpc>
+                        <a:spcAft>
+                          <a:spcPts val="0"/>
+                        </a:spcAft>
+                      </a:pPr>
+                      <a:r>
+                        <a:rPr sz="850" b="0">
+                          <a:solidFill>
+                            <a:srgbClr val="15505E"/>
+                          </a:solidFill>
+                          <a:latin typeface="Calibri"/>
+                        </a:rPr>
+                        <a:t>19.929 – $ 597.882</a:t>
+                      </a:r>
+                    </a:p>
+                  </a:txBody>
+                  <a:tcPr marL="91440" marR="91440" marT="36576" marB="36576" anchor="ctr">
+                    <a:lnB w="25400" cap="flat" cmpd="sng" algn="ctr">
+                      <a:solidFill>
+                        <a:srgbClr val="15505E"/>
+                      </a:solidFill>
+                    </a:lnB>
+                    <a:lnT w="25400" cap="flat" cmpd="sng" algn="ctr">
+                      <a:solidFill>
+                        <a:srgbClr val="15505E"/>
+                      </a:solidFill>
+                    </a:lnT>
+                    <a:lnR w="25400" cap="flat" cmpd="sng" algn="ctr">
+                      <a:solidFill>
+                        <a:srgbClr val="15505E"/>
+                      </a:solidFill>
+                    </a:lnR>
+                    <a:lnL w="25400" cap="flat" cmpd="sng" algn="ctr">
+                      <a:solidFill>
+                        <a:srgbClr val="15505E"/>
+                      </a:solidFill>
+                    </a:lnL>
+                    <a:solidFill>
+                      <a:srgbClr val="F4EFE4"/>
+                    </a:solidFill>
+                  </a:tcPr>
+                </a:tc>
+                <a:tc>
+                  <a:txBody>
+                    <a:bodyPr wrap="square"/>
+                    <a:lstStyle/>
+                    <a:p>
+                      <a:pPr algn="ctr">
+                        <a:lnSpc>
+                          <a:spcPct val="102000"/>
+                        </a:lnSpc>
+                        <a:spcAft>
+                          <a:spcPts val="0"/>
+                        </a:spcAft>
+                      </a:pPr>
+                      <a:r>
+                        <a:rPr sz="850" b="0">
+                          <a:solidFill>
+                            <a:srgbClr val="15505E"/>
+                          </a:solidFill>
+                          <a:latin typeface="Calibri"/>
+                        </a:rPr>
+                        <a:t>18.482 – $ 794.704</a:t>
+                      </a:r>
+                    </a:p>
+                  </a:txBody>
+                  <a:tcPr marL="91440" marR="91440" marT="36576" marB="36576" anchor="ctr">
+                    <a:lnB w="25400" cap="flat" cmpd="sng" algn="ctr">
+                      <a:solidFill>
+                        <a:srgbClr val="15505E"/>
+                      </a:solidFill>
+                    </a:lnB>
+                    <a:lnT w="25400" cap="flat" cmpd="sng" algn="ctr">
+                      <a:solidFill>
+                        <a:srgbClr val="15505E"/>
+                      </a:solidFill>
+                    </a:lnT>
+                    <a:lnR w="25400" cap="flat" cmpd="sng" algn="ctr">
+                      <a:solidFill>
+                        <a:srgbClr val="15505E"/>
+                      </a:solidFill>
+                    </a:lnR>
+                    <a:lnL w="25400" cap="flat" cmpd="sng" algn="ctr">
+                      <a:solidFill>
+                        <a:srgbClr val="15505E"/>
+                      </a:solidFill>
+                    </a:lnL>
+                    <a:solidFill>
+                      <a:srgbClr val="F4EFE4"/>
+                    </a:solidFill>
+                  </a:tcPr>
+                </a:tc>
+                <a:tc>
+                  <a:txBody>
+                    <a:bodyPr wrap="square"/>
+                    <a:lstStyle/>
+                    <a:p>
+                      <a:pPr algn="ctr">
+                        <a:lnSpc>
+                          <a:spcPct val="102000"/>
+                        </a:lnSpc>
+                        <a:spcAft>
+                          <a:spcPts val="0"/>
+                        </a:spcAft>
+                      </a:pPr>
+                      <a:r>
+                        <a:rPr sz="850" b="0">
+                          <a:solidFill>
+                            <a:srgbClr val="15505E"/>
+                          </a:solidFill>
+                          <a:latin typeface="Calibri"/>
+                        </a:rPr>
+                        <a:t>17.375 – $ 1.216.264</a:t>
+                      </a:r>
+                    </a:p>
+                  </a:txBody>
+                  <a:tcPr marL="91440" marR="91440" marT="36576" marB="36576" anchor="ctr">
+                    <a:lnB w="25400" cap="flat" cmpd="sng" algn="ctr">
+                      <a:solidFill>
+                        <a:srgbClr val="15505E"/>
+                      </a:solidFill>
+                    </a:lnB>
+                    <a:lnT w="25400" cap="flat" cmpd="sng" algn="ctr">
+                      <a:solidFill>
+                        <a:srgbClr val="15505E"/>
+                      </a:solidFill>
+                    </a:lnT>
+                    <a:lnR w="25400" cap="flat" cmpd="sng" algn="ctr">
+                      <a:solidFill>
+                        <a:srgbClr val="15505E"/>
+                      </a:solidFill>
+                    </a:lnR>
+                    <a:lnL w="25400" cap="flat" cmpd="sng" algn="ctr">
+                      <a:solidFill>
+                        <a:srgbClr val="15505E"/>
+                      </a:solidFill>
+                    </a:lnL>
+                    <a:solidFill>
+                      <a:srgbClr val="F4EFE4"/>
+                    </a:solidFill>
+                  </a:tcPr>
+                </a:tc>
+                <a:tc>
+                  <a:txBody>
+                    <a:bodyPr wrap="square"/>
+                    <a:lstStyle/>
+                    <a:p>
+                      <a:pPr algn="ctr">
+                        <a:lnSpc>
+                          <a:spcPct val="102000"/>
+                        </a:lnSpc>
+                        <a:spcAft>
+                          <a:spcPts val="0"/>
+                        </a:spcAft>
+                      </a:pPr>
+                      <a:r>
+                        <a:rPr sz="850" b="0">
+                          <a:solidFill>
+                            <a:srgbClr val="15505E"/>
+                          </a:solidFill>
+                          <a:latin typeface="Calibri"/>
+                        </a:rPr>
+                        <a:t>+15%</a:t>
+                      </a:r>
+                    </a:p>
+                  </a:txBody>
+                  <a:tcPr marL="91440" marR="91440" marT="36576" marB="36576" anchor="ctr">
+                    <a:lnB w="25400" cap="flat" cmpd="sng" algn="ctr">
+                      <a:solidFill>
+                        <a:srgbClr val="15505E"/>
+                      </a:solidFill>
+                    </a:lnB>
+                    <a:lnT w="25400" cap="flat" cmpd="sng" algn="ctr">
+                      <a:solidFill>
+                        <a:srgbClr val="15505E"/>
+                      </a:solidFill>
+                    </a:lnT>
+                    <a:lnR w="25400" cap="flat" cmpd="sng" algn="ctr">
+                      <a:solidFill>
+                        <a:srgbClr val="15505E"/>
+                      </a:solidFill>
+                    </a:lnR>
+                    <a:lnL w="25400" cap="flat" cmpd="sng" algn="ctr">
+                      <a:solidFill>
+                        <a:srgbClr val="15505E"/>
+                      </a:solidFill>
+                    </a:lnL>
+                    <a:solidFill>
+                      <a:srgbClr val="F4EFE4"/>
+                    </a:solidFill>
+                  </a:tcPr>
+                </a:tc>
+                <a:tc>
+                  <a:txBody>
+                    <a:bodyPr wrap="square"/>
+                    <a:lstStyle/>
+                    <a:p>
+                      <a:pPr algn="ctr">
+                        <a:lnSpc>
+                          <a:spcPct val="102000"/>
+                        </a:lnSpc>
+                        <a:spcAft>
+                          <a:spcPts val="0"/>
+                        </a:spcAft>
+                      </a:pPr>
+                      <a:r>
+                        <a:rPr sz="850" b="0">
+                          <a:solidFill>
+                            <a:srgbClr val="15505E"/>
+                          </a:solidFill>
+                          <a:latin typeface="Calibri"/>
+                        </a:rPr>
+                        <a:t>+19%</a:t>
+                      </a:r>
+                    </a:p>
+                  </a:txBody>
+                  <a:tcPr marL="91440" marR="91440" marT="36576" marB="36576" anchor="ctr">
+                    <a:lnB w="25400" cap="flat" cmpd="sng" algn="ctr">
+                      <a:solidFill>
+                        <a:srgbClr val="15505E"/>
+                      </a:solidFill>
+                    </a:lnB>
+                    <a:lnT w="25400" cap="flat" cmpd="sng" algn="ctr">
+                      <a:solidFill>
+                        <a:srgbClr val="15505E"/>
+                      </a:solidFill>
+                    </a:lnT>
+                    <a:lnR w="25400" cap="flat" cmpd="sng" algn="ctr">
+                      <a:solidFill>
+                        <a:srgbClr val="15505E"/>
+                      </a:solidFill>
+                    </a:lnR>
+                    <a:lnL w="25400" cap="flat" cmpd="sng" algn="ctr">
+                      <a:solidFill>
+                        <a:srgbClr val="15505E"/>
+                      </a:solidFill>
+                    </a:lnL>
+                    <a:solidFill>
+                      <a:srgbClr val="F4EFE4"/>
+                    </a:solidFill>
+                  </a:tcPr>
+                </a:tc>
+                <a:tc>
+                  <a:txBody>
+                    <a:bodyPr wrap="square"/>
+                    <a:lstStyle/>
+                    <a:p>
+                      <a:pPr algn="ctr">
+                        <a:lnSpc>
+                          <a:spcPct val="102000"/>
+                        </a:lnSpc>
+                        <a:spcAft>
+                          <a:spcPts val="0"/>
+                        </a:spcAft>
+                      </a:pPr>
+                      <a:r>
+                        <a:rPr sz="850" b="0">
+                          <a:solidFill>
+                            <a:srgbClr val="15505E"/>
+                          </a:solidFill>
+                          <a:latin typeface="Calibri"/>
+                        </a:rPr>
+                        <a:t>-4,3 pp</a:t>
+                      </a:r>
+                    </a:p>
+                  </a:txBody>
+                  <a:tcPr marL="91440" marR="91440" marT="36576" marB="36576" anchor="ctr">
+                    <a:lnB w="25400" cap="flat" cmpd="sng" algn="ctr">
+                      <a:solidFill>
+                        <a:srgbClr val="15505E"/>
+                      </a:solidFill>
+                    </a:lnB>
+                    <a:lnT w="25400" cap="flat" cmpd="sng" algn="ctr">
+                      <a:solidFill>
+                        <a:srgbClr val="15505E"/>
+                      </a:solidFill>
+                    </a:lnT>
+                    <a:lnR w="25400" cap="flat" cmpd="sng" algn="ctr">
+                      <a:solidFill>
+                        <a:srgbClr val="15505E"/>
+                      </a:solidFill>
+                    </a:lnR>
+                    <a:lnL w="25400" cap="flat" cmpd="sng" algn="ctr">
+                      <a:solidFill>
+                        <a:srgbClr val="15505E"/>
+                      </a:solidFill>
+                    </a:lnL>
+                    <a:solidFill>
+                      <a:srgbClr val="F4EFE4"/>
+                    </a:solidFill>
+                  </a:tcPr>
+                </a:tc>
+              </a:tr>
+              <a:tr h="237744">
+                <a:tc>
+                  <a:txBody>
+                    <a:bodyPr wrap="square"/>
+                    <a:lstStyle/>
+                    <a:p>
+                      <a:pPr algn="ctr">
+                        <a:lnSpc>
+                          <a:spcPct val="102000"/>
+                        </a:lnSpc>
+                        <a:spcAft>
+                          <a:spcPts val="0"/>
+                        </a:spcAft>
+                      </a:pPr>
+                      <a:r>
+                        <a:rPr sz="850" b="0">
+                          <a:solidFill>
+                            <a:srgbClr val="15505E"/>
+                          </a:solidFill>
+                          <a:latin typeface="Calibri"/>
+                        </a:rPr>
+                        <a:t>6 (Caballito)</a:t>
+                      </a:r>
+                    </a:p>
+                  </a:txBody>
+                  <a:tcPr marL="91440" marR="91440" marT="36576" marB="36576" anchor="ctr">
+                    <a:lnB w="25400" cap="flat" cmpd="sng" algn="ctr">
+                      <a:solidFill>
+                        <a:srgbClr val="15505E"/>
+                      </a:solidFill>
+                    </a:lnB>
+                    <a:lnT w="25400" cap="flat" cmpd="sng" algn="ctr">
+                      <a:solidFill>
+                        <a:srgbClr val="15505E"/>
+                      </a:solidFill>
+                    </a:lnT>
+                    <a:lnR w="25400" cap="flat" cmpd="sng" algn="ctr">
+                      <a:solidFill>
+                        <a:srgbClr val="15505E"/>
+                      </a:solidFill>
+                    </a:lnR>
+                    <a:lnL w="25400" cap="flat" cmpd="sng" algn="ctr">
+                      <a:solidFill>
+                        <a:srgbClr val="15505E"/>
+                      </a:solidFill>
+                    </a:lnL>
+                    <a:solidFill>
+                      <a:srgbClr val="F4EFE4"/>
+                    </a:solidFill>
+                  </a:tcPr>
+                </a:tc>
+                <a:tc>
+                  <a:txBody>
+                    <a:bodyPr wrap="square"/>
+                    <a:lstStyle/>
+                    <a:p>
+                      <a:pPr algn="ctr">
+                        <a:lnSpc>
+                          <a:spcPct val="102000"/>
+                        </a:lnSpc>
+                        <a:spcAft>
+                          <a:spcPts val="0"/>
+                        </a:spcAft>
+                      </a:pPr>
+                      <a:r>
+                        <a:rPr sz="850" b="0">
+                          <a:solidFill>
+                            <a:srgbClr val="15505E"/>
+                          </a:solidFill>
+                          <a:latin typeface="Calibri"/>
+                        </a:rPr>
+                        <a:t>Centro</a:t>
+                      </a:r>
+                    </a:p>
+                  </a:txBody>
+                  <a:tcPr marL="91440" marR="91440" marT="36576" marB="36576" anchor="ctr">
+                    <a:lnB w="25400" cap="flat" cmpd="sng" algn="ctr">
+                      <a:solidFill>
+                        <a:srgbClr val="15505E"/>
+                      </a:solidFill>
+                    </a:lnB>
+                    <a:lnT w="25400" cap="flat" cmpd="sng" algn="ctr">
+                      <a:solidFill>
+                        <a:srgbClr val="15505E"/>
+                      </a:solidFill>
+                    </a:lnT>
+                    <a:lnR w="25400" cap="flat" cmpd="sng" algn="ctr">
+                      <a:solidFill>
+                        <a:srgbClr val="15505E"/>
+                      </a:solidFill>
+                    </a:lnR>
+                    <a:lnL w="25400" cap="flat" cmpd="sng" algn="ctr">
+                      <a:solidFill>
+                        <a:srgbClr val="15505E"/>
+                      </a:solidFill>
+                    </a:lnL>
+                    <a:solidFill>
+                      <a:srgbClr val="F4EFE4"/>
+                    </a:solidFill>
+                  </a:tcPr>
+                </a:tc>
+                <a:tc>
+                  <a:txBody>
+                    <a:bodyPr wrap="square"/>
+                    <a:lstStyle/>
+                    <a:p>
+                      <a:pPr algn="ctr">
+                        <a:lnSpc>
+                          <a:spcPct val="102000"/>
+                        </a:lnSpc>
+                        <a:spcAft>
+                          <a:spcPts val="0"/>
+                        </a:spcAft>
+                      </a:pPr>
+                      <a:r>
+                        <a:rPr sz="850" b="0">
+                          <a:solidFill>
+                            <a:srgbClr val="15505E"/>
+                          </a:solidFill>
+                          <a:latin typeface="Calibri"/>
+                        </a:rPr>
+                        <a:t>19.163 – $ 574.896</a:t>
+                      </a:r>
+                    </a:p>
+                  </a:txBody>
+                  <a:tcPr marL="91440" marR="91440" marT="36576" marB="36576" anchor="ctr">
+                    <a:lnB w="25400" cap="flat" cmpd="sng" algn="ctr">
+                      <a:solidFill>
+                        <a:srgbClr val="15505E"/>
+                      </a:solidFill>
+                    </a:lnB>
+                    <a:lnT w="25400" cap="flat" cmpd="sng" algn="ctr">
+                      <a:solidFill>
+                        <a:srgbClr val="15505E"/>
+                      </a:solidFill>
+                    </a:lnT>
+                    <a:lnR w="25400" cap="flat" cmpd="sng" algn="ctr">
+                      <a:solidFill>
+                        <a:srgbClr val="15505E"/>
+                      </a:solidFill>
+                    </a:lnR>
+                    <a:lnL w="25400" cap="flat" cmpd="sng" algn="ctr">
+                      <a:solidFill>
+                        <a:srgbClr val="15505E"/>
+                      </a:solidFill>
+                    </a:lnL>
+                    <a:solidFill>
+                      <a:srgbClr val="F4EFE4"/>
+                    </a:solidFill>
+                  </a:tcPr>
+                </a:tc>
+                <a:tc>
+                  <a:txBody>
+                    <a:bodyPr wrap="square"/>
+                    <a:lstStyle/>
+                    <a:p>
+                      <a:pPr algn="ctr">
+                        <a:lnSpc>
+                          <a:spcPct val="102000"/>
+                        </a:lnSpc>
+                        <a:spcAft>
+                          <a:spcPts val="0"/>
+                        </a:spcAft>
+                      </a:pPr>
+                      <a:r>
+                        <a:rPr sz="850" b="0">
+                          <a:solidFill>
+                            <a:srgbClr val="15505E"/>
+                          </a:solidFill>
+                          <a:latin typeface="Calibri"/>
+                        </a:rPr>
+                        <a:t>17.880 – $ 768.831</a:t>
+                      </a:r>
+                    </a:p>
+                  </a:txBody>
+                  <a:tcPr marL="91440" marR="91440" marT="36576" marB="36576" anchor="ctr">
+                    <a:lnB w="25400" cap="flat" cmpd="sng" algn="ctr">
+                      <a:solidFill>
+                        <a:srgbClr val="15505E"/>
+                      </a:solidFill>
+                    </a:lnB>
+                    <a:lnT w="25400" cap="flat" cmpd="sng" algn="ctr">
+                      <a:solidFill>
+                        <a:srgbClr val="15505E"/>
+                      </a:solidFill>
+                    </a:lnT>
+                    <a:lnR w="25400" cap="flat" cmpd="sng" algn="ctr">
+                      <a:solidFill>
+                        <a:srgbClr val="15505E"/>
+                      </a:solidFill>
+                    </a:lnR>
+                    <a:lnL w="25400" cap="flat" cmpd="sng" algn="ctr">
+                      <a:solidFill>
+                        <a:srgbClr val="15505E"/>
+                      </a:solidFill>
+                    </a:lnL>
+                    <a:solidFill>
+                      <a:srgbClr val="F4EFE4"/>
+                    </a:solidFill>
+                  </a:tcPr>
+                </a:tc>
+                <a:tc>
+                  <a:txBody>
+                    <a:bodyPr wrap="square"/>
+                    <a:lstStyle/>
+                    <a:p>
+                      <a:pPr algn="ctr">
+                        <a:lnSpc>
+                          <a:spcPct val="102000"/>
+                        </a:lnSpc>
+                        <a:spcAft>
+                          <a:spcPts val="0"/>
+                        </a:spcAft>
+                      </a:pPr>
+                      <a:r>
+                        <a:rPr sz="850" b="0">
+                          <a:solidFill>
+                            <a:srgbClr val="15505E"/>
+                          </a:solidFill>
+                          <a:latin typeface="Calibri"/>
+                        </a:rPr>
+                        <a:t>17.099 – $ 1.196.944</a:t>
+                      </a:r>
+                    </a:p>
+                  </a:txBody>
+                  <a:tcPr marL="91440" marR="91440" marT="36576" marB="36576" anchor="ctr">
+                    <a:lnB w="25400" cap="flat" cmpd="sng" algn="ctr">
+                      <a:solidFill>
+                        <a:srgbClr val="15505E"/>
+                      </a:solidFill>
+                    </a:lnB>
+                    <a:lnT w="25400" cap="flat" cmpd="sng" algn="ctr">
+                      <a:solidFill>
+                        <a:srgbClr val="15505E"/>
+                      </a:solidFill>
+                    </a:lnT>
+                    <a:lnR w="25400" cap="flat" cmpd="sng" algn="ctr">
+                      <a:solidFill>
+                        <a:srgbClr val="15505E"/>
+                      </a:solidFill>
+                    </a:lnR>
+                    <a:lnL w="25400" cap="flat" cmpd="sng" algn="ctr">
+                      <a:solidFill>
+                        <a:srgbClr val="15505E"/>
+                      </a:solidFill>
+                    </a:lnL>
+                    <a:solidFill>
+                      <a:srgbClr val="F4EFE4"/>
+                    </a:solidFill>
+                  </a:tcPr>
+                </a:tc>
+                <a:tc>
+                  <a:txBody>
+                    <a:bodyPr wrap="square"/>
+                    <a:lstStyle/>
+                    <a:p>
+                      <a:pPr algn="ctr">
+                        <a:lnSpc>
+                          <a:spcPct val="102000"/>
+                        </a:lnSpc>
+                        <a:spcAft>
+                          <a:spcPts val="0"/>
+                        </a:spcAft>
+                      </a:pPr>
+                      <a:r>
+                        <a:rPr sz="850" b="0">
+                          <a:solidFill>
+                            <a:srgbClr val="15505E"/>
+                          </a:solidFill>
+                          <a:latin typeface="Calibri"/>
+                        </a:rPr>
+                        <a:t>+12%</a:t>
+                      </a:r>
+                    </a:p>
+                  </a:txBody>
+                  <a:tcPr marL="91440" marR="91440" marT="36576" marB="36576" anchor="ctr">
+                    <a:lnB w="25400" cap="flat" cmpd="sng" algn="ctr">
+                      <a:solidFill>
+                        <a:srgbClr val="15505E"/>
+                      </a:solidFill>
+                    </a:lnB>
+                    <a:lnT w="25400" cap="flat" cmpd="sng" algn="ctr">
+                      <a:solidFill>
+                        <a:srgbClr val="15505E"/>
+                      </a:solidFill>
+                    </a:lnT>
+                    <a:lnR w="25400" cap="flat" cmpd="sng" algn="ctr">
+                      <a:solidFill>
+                        <a:srgbClr val="15505E"/>
+                      </a:solidFill>
+                    </a:lnR>
+                    <a:lnL w="25400" cap="flat" cmpd="sng" algn="ctr">
+                      <a:solidFill>
+                        <a:srgbClr val="15505E"/>
+                      </a:solidFill>
+                    </a:lnL>
+                    <a:solidFill>
+                      <a:srgbClr val="F4EFE4"/>
+                    </a:solidFill>
+                  </a:tcPr>
+                </a:tc>
+                <a:tc>
+                  <a:txBody>
+                    <a:bodyPr wrap="square"/>
+                    <a:lstStyle/>
+                    <a:p>
+                      <a:pPr algn="ctr">
+                        <a:lnSpc>
+                          <a:spcPct val="102000"/>
+                        </a:lnSpc>
+                        <a:spcAft>
+                          <a:spcPts val="0"/>
+                        </a:spcAft>
+                      </a:pPr>
+                      <a:r>
+                        <a:rPr sz="850" b="0">
+                          <a:solidFill>
+                            <a:srgbClr val="15505E"/>
+                          </a:solidFill>
+                          <a:latin typeface="Calibri"/>
+                        </a:rPr>
+                        <a:t>+14%</a:t>
+                      </a:r>
+                    </a:p>
+                  </a:txBody>
+                  <a:tcPr marL="91440" marR="91440" marT="36576" marB="36576" anchor="ctr">
+                    <a:lnB w="25400" cap="flat" cmpd="sng" algn="ctr">
+                      <a:solidFill>
+                        <a:srgbClr val="15505E"/>
+                      </a:solidFill>
+                    </a:lnB>
+                    <a:lnT w="25400" cap="flat" cmpd="sng" algn="ctr">
+                      <a:solidFill>
+                        <a:srgbClr val="15505E"/>
+                      </a:solidFill>
+                    </a:lnT>
+                    <a:lnR w="25400" cap="flat" cmpd="sng" algn="ctr">
+                      <a:solidFill>
+                        <a:srgbClr val="15505E"/>
+                      </a:solidFill>
+                    </a:lnR>
+                    <a:lnL w="25400" cap="flat" cmpd="sng" algn="ctr">
+                      <a:solidFill>
+                        <a:srgbClr val="15505E"/>
+                      </a:solidFill>
+                    </a:lnL>
+                    <a:solidFill>
+                      <a:srgbClr val="F4EFE4"/>
+                    </a:solidFill>
+                  </a:tcPr>
+                </a:tc>
+                <a:tc>
+                  <a:txBody>
+                    <a:bodyPr wrap="square"/>
+                    <a:lstStyle/>
+                    <a:p>
+                      <a:pPr algn="ctr">
+                        <a:lnSpc>
+                          <a:spcPct val="102000"/>
+                        </a:lnSpc>
+                        <a:spcAft>
+                          <a:spcPts val="0"/>
+                        </a:spcAft>
+                      </a:pPr>
+                      <a:r>
+                        <a:rPr sz="850" b="0">
+                          <a:solidFill>
+                            <a:srgbClr val="15505E"/>
+                          </a:solidFill>
+                          <a:latin typeface="Calibri"/>
+                        </a:rPr>
+                        <a:t>-2,0 pp</a:t>
+                      </a:r>
+                    </a:p>
+                  </a:txBody>
+                  <a:tcPr marL="91440" marR="91440" marT="36576" marB="36576" anchor="ctr">
+                    <a:lnB w="25400" cap="flat" cmpd="sng" algn="ctr">
+                      <a:solidFill>
+                        <a:srgbClr val="15505E"/>
+                      </a:solidFill>
+                    </a:lnB>
+                    <a:lnT w="25400" cap="flat" cmpd="sng" algn="ctr">
+                      <a:solidFill>
+                        <a:srgbClr val="15505E"/>
+                      </a:solidFill>
+                    </a:lnT>
+                    <a:lnR w="25400" cap="flat" cmpd="sng" algn="ctr">
+                      <a:solidFill>
+                        <a:srgbClr val="15505E"/>
+                      </a:solidFill>
+                    </a:lnR>
+                    <a:lnL w="25400" cap="flat" cmpd="sng" algn="ctr">
+                      <a:solidFill>
+                        <a:srgbClr val="15505E"/>
+                      </a:solidFill>
+                    </a:lnL>
+                    <a:solidFill>
+                      <a:srgbClr val="F4EFE4"/>
+                    </a:solidFill>
+                  </a:tcPr>
+                </a:tc>
+              </a:tr>
+              <a:tr h="237744">
+                <a:tc>
+                  <a:txBody>
+                    <a:bodyPr wrap="square"/>
+                    <a:lstStyle/>
+                    <a:p>
+                      <a:pPr algn="ctr">
+                        <a:lnSpc>
+                          <a:spcPct val="102000"/>
+                        </a:lnSpc>
+                        <a:spcAft>
+                          <a:spcPts val="0"/>
+                        </a:spcAft>
+                      </a:pPr>
+                      <a:r>
+                        <a:rPr sz="850" b="0">
+                          <a:solidFill>
+                            <a:srgbClr val="15505E"/>
+                          </a:solidFill>
+                          <a:latin typeface="Calibri"/>
+                        </a:rPr>
+                        <a:t>10 (Villa Real, Monte Castro, Versalles, Floresta, Vélez Sarsfield, Villa Luro)</a:t>
+                      </a:r>
+                    </a:p>
+                  </a:txBody>
+                  <a:tcPr marL="91440" marR="91440" marT="36576" marB="36576" anchor="ctr">
+                    <a:lnB w="25400" cap="flat" cmpd="sng" algn="ctr">
+                      <a:solidFill>
+                        <a:srgbClr val="15505E"/>
+                      </a:solidFill>
+                    </a:lnB>
+                    <a:lnT w="25400" cap="flat" cmpd="sng" algn="ctr">
+                      <a:solidFill>
+                        <a:srgbClr val="15505E"/>
+                      </a:solidFill>
+                    </a:lnT>
+                    <a:lnR w="25400" cap="flat" cmpd="sng" algn="ctr">
+                      <a:solidFill>
+                        <a:srgbClr val="15505E"/>
+                      </a:solidFill>
+                    </a:lnR>
+                    <a:lnL w="25400" cap="flat" cmpd="sng" algn="ctr">
+                      <a:solidFill>
+                        <a:srgbClr val="15505E"/>
+                      </a:solidFill>
+                    </a:lnL>
+                    <a:solidFill>
+                      <a:srgbClr val="F4EFE4"/>
+                    </a:solidFill>
+                  </a:tcPr>
+                </a:tc>
+                <a:tc>
+                  <a:txBody>
+                    <a:bodyPr wrap="square"/>
+                    <a:lstStyle/>
+                    <a:p>
+                      <a:pPr algn="ctr">
+                        <a:lnSpc>
+                          <a:spcPct val="102000"/>
+                        </a:lnSpc>
+                        <a:spcAft>
+                          <a:spcPts val="0"/>
+                        </a:spcAft>
+                      </a:pPr>
+                      <a:r>
+                        <a:rPr sz="850" b="0">
+                          <a:solidFill>
+                            <a:srgbClr val="15505E"/>
+                          </a:solidFill>
+                          <a:latin typeface="Calibri"/>
+                        </a:rPr>
+                        <a:t>Oeste</a:t>
+                      </a:r>
+                    </a:p>
+                  </a:txBody>
+                  <a:tcPr marL="91440" marR="91440" marT="36576" marB="36576" anchor="ctr">
+                    <a:lnB w="25400" cap="flat" cmpd="sng" algn="ctr">
+                      <a:solidFill>
+                        <a:srgbClr val="15505E"/>
+                      </a:solidFill>
+                    </a:lnB>
+                    <a:lnT w="25400" cap="flat" cmpd="sng" algn="ctr">
+                      <a:solidFill>
+                        <a:srgbClr val="15505E"/>
+                      </a:solidFill>
+                    </a:lnT>
+                    <a:lnR w="25400" cap="flat" cmpd="sng" algn="ctr">
+                      <a:solidFill>
+                        <a:srgbClr val="15505E"/>
+                      </a:solidFill>
+                    </a:lnR>
+                    <a:lnL w="25400" cap="flat" cmpd="sng" algn="ctr">
+                      <a:solidFill>
+                        <a:srgbClr val="15505E"/>
+                      </a:solidFill>
+                    </a:lnL>
+                    <a:solidFill>
+                      <a:srgbClr val="F4EFE4"/>
+                    </a:solidFill>
+                  </a:tcPr>
+                </a:tc>
+                <a:tc>
+                  <a:txBody>
+                    <a:bodyPr wrap="square"/>
+                    <a:lstStyle/>
+                    <a:p>
+                      <a:pPr algn="ctr">
+                        <a:lnSpc>
+                          <a:spcPct val="102000"/>
+                        </a:lnSpc>
+                        <a:spcAft>
+                          <a:spcPts val="0"/>
+                        </a:spcAft>
+                      </a:pPr>
+                      <a:r>
+                        <a:rPr sz="850" b="0">
+                          <a:solidFill>
+                            <a:srgbClr val="15505E"/>
+                          </a:solidFill>
+                          <a:latin typeface="Calibri"/>
+                        </a:rPr>
+                        <a:t>16.894 – $ 506.829</a:t>
+                      </a:r>
+                    </a:p>
+                  </a:txBody>
+                  <a:tcPr marL="91440" marR="91440" marT="36576" marB="36576" anchor="ctr">
+                    <a:lnB w="25400" cap="flat" cmpd="sng" algn="ctr">
+                      <a:solidFill>
+                        <a:srgbClr val="15505E"/>
+                      </a:solidFill>
+                    </a:lnB>
+                    <a:lnT w="25400" cap="flat" cmpd="sng" algn="ctr">
+                      <a:solidFill>
+                        <a:srgbClr val="15505E"/>
+                      </a:solidFill>
+                    </a:lnT>
+                    <a:lnR w="25400" cap="flat" cmpd="sng" algn="ctr">
+                      <a:solidFill>
+                        <a:srgbClr val="15505E"/>
+                      </a:solidFill>
+                    </a:lnR>
+                    <a:lnL w="25400" cap="flat" cmpd="sng" algn="ctr">
+                      <a:solidFill>
+                        <a:srgbClr val="15505E"/>
+                      </a:solidFill>
+                    </a:lnL>
+                    <a:solidFill>
+                      <a:srgbClr val="F4EFE4"/>
+                    </a:solidFill>
+                  </a:tcPr>
+                </a:tc>
+                <a:tc>
+                  <a:txBody>
+                    <a:bodyPr wrap="square"/>
+                    <a:lstStyle/>
+                    <a:p>
+                      <a:pPr algn="ctr">
+                        <a:lnSpc>
+                          <a:spcPct val="102000"/>
+                        </a:lnSpc>
+                        <a:spcAft>
+                          <a:spcPts val="0"/>
+                        </a:spcAft>
+                      </a:pPr>
+                      <a:r>
+                        <a:rPr sz="850" b="0">
+                          <a:solidFill>
+                            <a:srgbClr val="15505E"/>
+                          </a:solidFill>
+                          <a:latin typeface="Calibri"/>
+                        </a:rPr>
+                        <a:t>16.665 – $ 716.599</a:t>
+                      </a:r>
+                    </a:p>
+                  </a:txBody>
+                  <a:tcPr marL="91440" marR="91440" marT="36576" marB="36576" anchor="ctr">
+                    <a:lnB w="25400" cap="flat" cmpd="sng" algn="ctr">
+                      <a:solidFill>
+                        <a:srgbClr val="15505E"/>
+                      </a:solidFill>
+                    </a:lnB>
+                    <a:lnT w="25400" cap="flat" cmpd="sng" algn="ctr">
+                      <a:solidFill>
+                        <a:srgbClr val="15505E"/>
+                      </a:solidFill>
+                    </a:lnT>
+                    <a:lnR w="25400" cap="flat" cmpd="sng" algn="ctr">
+                      <a:solidFill>
+                        <a:srgbClr val="15505E"/>
+                      </a:solidFill>
+                    </a:lnR>
+                    <a:lnL w="25400" cap="flat" cmpd="sng" algn="ctr">
+                      <a:solidFill>
+                        <a:srgbClr val="15505E"/>
+                      </a:solidFill>
+                    </a:lnL>
+                    <a:solidFill>
+                      <a:srgbClr val="F4EFE4"/>
+                    </a:solidFill>
+                  </a:tcPr>
+                </a:tc>
+                <a:tc>
+                  <a:txBody>
+                    <a:bodyPr wrap="square"/>
+                    <a:lstStyle/>
+                    <a:p>
+                      <a:pPr algn="ctr">
+                        <a:lnSpc>
+                          <a:spcPct val="102000"/>
+                        </a:lnSpc>
+                        <a:spcAft>
+                          <a:spcPts val="0"/>
+                        </a:spcAft>
+                      </a:pPr>
+                      <a:r>
+                        <a:rPr sz="850" b="0">
+                          <a:solidFill>
+                            <a:srgbClr val="15505E"/>
+                          </a:solidFill>
+                          <a:latin typeface="Calibri"/>
+                        </a:rPr>
+                        <a:t>15.101 – $ 1.057.056</a:t>
+                      </a:r>
+                    </a:p>
+                  </a:txBody>
+                  <a:tcPr marL="91440" marR="91440" marT="36576" marB="36576" anchor="ctr">
+                    <a:lnB w="25400" cap="flat" cmpd="sng" algn="ctr">
+                      <a:solidFill>
+                        <a:srgbClr val="15505E"/>
+                      </a:solidFill>
+                    </a:lnB>
+                    <a:lnT w="25400" cap="flat" cmpd="sng" algn="ctr">
+                      <a:solidFill>
+                        <a:srgbClr val="15505E"/>
+                      </a:solidFill>
+                    </a:lnT>
+                    <a:lnR w="25400" cap="flat" cmpd="sng" algn="ctr">
+                      <a:solidFill>
+                        <a:srgbClr val="15505E"/>
+                      </a:solidFill>
+                    </a:lnR>
+                    <a:lnL w="25400" cap="flat" cmpd="sng" algn="ctr">
+                      <a:solidFill>
+                        <a:srgbClr val="15505E"/>
+                      </a:solidFill>
+                    </a:lnL>
+                    <a:solidFill>
+                      <a:srgbClr val="F4EFE4"/>
+                    </a:solidFill>
+                  </a:tcPr>
+                </a:tc>
+                <a:tc>
+                  <a:txBody>
+                    <a:bodyPr wrap="square"/>
+                    <a:lstStyle/>
+                    <a:p>
+                      <a:pPr algn="ctr">
+                        <a:lnSpc>
+                          <a:spcPct val="102000"/>
+                        </a:lnSpc>
+                        <a:spcAft>
+                          <a:spcPts val="0"/>
+                        </a:spcAft>
+                      </a:pPr>
+                      <a:r>
+                        <a:rPr sz="850" b="0">
+                          <a:solidFill>
+                            <a:srgbClr val="15505E"/>
+                          </a:solidFill>
+                          <a:latin typeface="Calibri"/>
+                        </a:rPr>
+                        <a:t>+12%</a:t>
+                      </a:r>
+                    </a:p>
+                  </a:txBody>
+                  <a:tcPr marL="91440" marR="91440" marT="36576" marB="36576" anchor="ctr">
+                    <a:lnB w="25400" cap="flat" cmpd="sng" algn="ctr">
+                      <a:solidFill>
+                        <a:srgbClr val="15505E"/>
+                      </a:solidFill>
+                    </a:lnB>
+                    <a:lnT w="25400" cap="flat" cmpd="sng" algn="ctr">
+                      <a:solidFill>
+                        <a:srgbClr val="15505E"/>
+                      </a:solidFill>
+                    </a:lnT>
+                    <a:lnR w="25400" cap="flat" cmpd="sng" algn="ctr">
+                      <a:solidFill>
+                        <a:srgbClr val="15505E"/>
+                      </a:solidFill>
+                    </a:lnR>
+                    <a:lnL w="25400" cap="flat" cmpd="sng" algn="ctr">
+                      <a:solidFill>
+                        <a:srgbClr val="15505E"/>
+                      </a:solidFill>
+                    </a:lnL>
+                    <a:solidFill>
+                      <a:srgbClr val="F4EFE4"/>
+                    </a:solidFill>
+                  </a:tcPr>
+                </a:tc>
+                <a:tc>
+                  <a:txBody>
+                    <a:bodyPr wrap="square"/>
+                    <a:lstStyle/>
+                    <a:p>
+                      <a:pPr algn="ctr">
+                        <a:lnSpc>
+                          <a:spcPct val="102000"/>
+                        </a:lnSpc>
+                        <a:spcAft>
+                          <a:spcPts val="0"/>
+                        </a:spcAft>
+                      </a:pPr>
+                      <a:r>
+                        <a:rPr sz="850" b="0">
+                          <a:solidFill>
+                            <a:srgbClr val="15505E"/>
+                          </a:solidFill>
+                          <a:latin typeface="Calibri"/>
+                        </a:rPr>
+                        <a:t>+12%</a:t>
+                      </a:r>
+                    </a:p>
+                  </a:txBody>
+                  <a:tcPr marL="91440" marR="91440" marT="36576" marB="36576" anchor="ctr">
+                    <a:lnB w="25400" cap="flat" cmpd="sng" algn="ctr">
+                      <a:solidFill>
+                        <a:srgbClr val="15505E"/>
+                      </a:solidFill>
+                    </a:lnB>
+                    <a:lnT w="25400" cap="flat" cmpd="sng" algn="ctr">
+                      <a:solidFill>
+                        <a:srgbClr val="15505E"/>
+                      </a:solidFill>
+                    </a:lnT>
+                    <a:lnR w="25400" cap="flat" cmpd="sng" algn="ctr">
+                      <a:solidFill>
+                        <a:srgbClr val="15505E"/>
+                      </a:solidFill>
+                    </a:lnR>
+                    <a:lnL w="25400" cap="flat" cmpd="sng" algn="ctr">
+                      <a:solidFill>
+                        <a:srgbClr val="15505E"/>
+                      </a:solidFill>
+                    </a:lnL>
+                    <a:solidFill>
+                      <a:srgbClr val="F4EFE4"/>
+                    </a:solidFill>
+                  </a:tcPr>
+                </a:tc>
+                <a:tc>
+                  <a:txBody>
+                    <a:bodyPr wrap="square"/>
+                    <a:lstStyle/>
+                    <a:p>
+                      <a:pPr algn="ctr">
+                        <a:lnSpc>
+                          <a:spcPct val="102000"/>
+                        </a:lnSpc>
+                        <a:spcAft>
+                          <a:spcPts val="0"/>
+                        </a:spcAft>
+                      </a:pPr>
+                      <a:r>
+                        <a:rPr sz="850" b="0">
+                          <a:solidFill>
+                            <a:srgbClr val="15505E"/>
+                          </a:solidFill>
+                          <a:latin typeface="Calibri"/>
+                        </a:rPr>
+                        <a:t>+0,4 pp</a:t>
+                      </a:r>
+                    </a:p>
+                  </a:txBody>
+                  <a:tcPr marL="91440" marR="91440" marT="36576" marB="36576" anchor="ctr">
+                    <a:lnB w="25400" cap="flat" cmpd="sng" algn="ctr">
+                      <a:solidFill>
+                        <a:srgbClr val="15505E"/>
+                      </a:solidFill>
+                    </a:lnB>
+                    <a:lnT w="25400" cap="flat" cmpd="sng" algn="ctr">
+                      <a:solidFill>
+                        <a:srgbClr val="15505E"/>
+                      </a:solidFill>
+                    </a:lnT>
+                    <a:lnR w="25400" cap="flat" cmpd="sng" algn="ctr">
+                      <a:solidFill>
+                        <a:srgbClr val="15505E"/>
+                      </a:solidFill>
+                    </a:lnR>
+                    <a:lnL w="25400" cap="flat" cmpd="sng" algn="ctr">
+                      <a:solidFill>
+                        <a:srgbClr val="15505E"/>
+                      </a:solidFill>
+                    </a:lnL>
+                    <a:solidFill>
+                      <a:srgbClr val="F4EFE4"/>
+                    </a:solidFill>
+                  </a:tcPr>
+                </a:tc>
+              </a:tr>
+              <a:tr h="237744">
+                <a:tc>
+                  <a:txBody>
+                    <a:bodyPr wrap="square"/>
+                    <a:lstStyle/>
+                    <a:p>
+                      <a:pPr algn="ctr">
+                        <a:lnSpc>
+                          <a:spcPct val="102000"/>
+                        </a:lnSpc>
+                        <a:spcAft>
+                          <a:spcPts val="0"/>
+                        </a:spcAft>
+                      </a:pPr>
+                      <a:r>
+                        <a:rPr sz="850" b="0">
+                          <a:solidFill>
+                            <a:srgbClr val="15505E"/>
+                          </a:solidFill>
+                          <a:latin typeface="Calibri"/>
+                        </a:rPr>
+                        <a:t>15 (Chacarita, Villa Crespo, La Paternal, Villa Ortúzar, Agronomía, Parque Chas)</a:t>
+                      </a:r>
+                    </a:p>
+                  </a:txBody>
+                  <a:tcPr marL="91440" marR="91440" marT="36576" marB="36576" anchor="ctr">
+                    <a:lnB w="25400" cap="flat" cmpd="sng" algn="ctr">
+                      <a:solidFill>
+                        <a:srgbClr val="15505E"/>
+                      </a:solidFill>
+                    </a:lnB>
+                    <a:lnT w="25400" cap="flat" cmpd="sng" algn="ctr">
+                      <a:solidFill>
+                        <a:srgbClr val="15505E"/>
+                      </a:solidFill>
+                    </a:lnT>
+                    <a:lnR w="25400" cap="flat" cmpd="sng" algn="ctr">
+                      <a:solidFill>
+                        <a:srgbClr val="15505E"/>
+                      </a:solidFill>
+                    </a:lnR>
+                    <a:lnL w="25400" cap="flat" cmpd="sng" algn="ctr">
+                      <a:solidFill>
+                        <a:srgbClr val="15505E"/>
+                      </a:solidFill>
+                    </a:lnL>
+                    <a:solidFill>
+                      <a:srgbClr val="F4EFE4"/>
+                    </a:solidFill>
+                  </a:tcPr>
+                </a:tc>
+                <a:tc>
+                  <a:txBody>
+                    <a:bodyPr wrap="square"/>
+                    <a:lstStyle/>
+                    <a:p>
+                      <a:pPr algn="ctr">
+                        <a:lnSpc>
+                          <a:spcPct val="102000"/>
+                        </a:lnSpc>
+                        <a:spcAft>
+                          <a:spcPts val="0"/>
+                        </a:spcAft>
+                      </a:pPr>
+                      <a:r>
+                        <a:rPr sz="850" b="0">
+                          <a:solidFill>
+                            <a:srgbClr val="15505E"/>
+                          </a:solidFill>
+                          <a:latin typeface="Calibri"/>
+                        </a:rPr>
+                        <a:t>Centro</a:t>
+                      </a:r>
+                    </a:p>
+                  </a:txBody>
+                  <a:tcPr marL="91440" marR="91440" marT="36576" marB="36576" anchor="ctr">
+                    <a:lnB w="25400" cap="flat" cmpd="sng" algn="ctr">
+                      <a:solidFill>
+                        <a:srgbClr val="15505E"/>
+                      </a:solidFill>
+                    </a:lnB>
+                    <a:lnT w="25400" cap="flat" cmpd="sng" algn="ctr">
+                      <a:solidFill>
+                        <a:srgbClr val="15505E"/>
+                      </a:solidFill>
+                    </a:lnT>
+                    <a:lnR w="25400" cap="flat" cmpd="sng" algn="ctr">
+                      <a:solidFill>
+                        <a:srgbClr val="15505E"/>
+                      </a:solidFill>
+                    </a:lnR>
+                    <a:lnL w="25400" cap="flat" cmpd="sng" algn="ctr">
+                      <a:solidFill>
+                        <a:srgbClr val="15505E"/>
+                      </a:solidFill>
+                    </a:lnL>
+                    <a:solidFill>
+                      <a:srgbClr val="F4EFE4"/>
+                    </a:solidFill>
+                  </a:tcPr>
+                </a:tc>
+                <a:tc>
+                  <a:txBody>
+                    <a:bodyPr wrap="square"/>
+                    <a:lstStyle/>
+                    <a:p>
+                      <a:pPr algn="ctr">
+                        <a:lnSpc>
+                          <a:spcPct val="102000"/>
+                        </a:lnSpc>
+                        <a:spcAft>
+                          <a:spcPts val="0"/>
+                        </a:spcAft>
+                      </a:pPr>
+                      <a:r>
+                        <a:rPr sz="850" b="0">
+                          <a:solidFill>
+                            <a:srgbClr val="15505E"/>
+                          </a:solidFill>
+                          <a:latin typeface="Calibri"/>
+                        </a:rPr>
+                        <a:t>19.402 – $ 582.060</a:t>
+                      </a:r>
+                    </a:p>
+                  </a:txBody>
+                  <a:tcPr marL="91440" marR="91440" marT="36576" marB="36576" anchor="ctr">
+                    <a:lnB w="25400" cap="flat" cmpd="sng" algn="ctr">
+                      <a:solidFill>
+                        <a:srgbClr val="15505E"/>
+                      </a:solidFill>
+                    </a:lnB>
+                    <a:lnT w="25400" cap="flat" cmpd="sng" algn="ctr">
+                      <a:solidFill>
+                        <a:srgbClr val="15505E"/>
+                      </a:solidFill>
+                    </a:lnT>
+                    <a:lnR w="25400" cap="flat" cmpd="sng" algn="ctr">
+                      <a:solidFill>
+                        <a:srgbClr val="15505E"/>
+                      </a:solidFill>
+                    </a:lnR>
+                    <a:lnL w="25400" cap="flat" cmpd="sng" algn="ctr">
+                      <a:solidFill>
+                        <a:srgbClr val="15505E"/>
+                      </a:solidFill>
+                    </a:lnL>
+                    <a:solidFill>
+                      <a:srgbClr val="F4EFE4"/>
+                    </a:solidFill>
+                  </a:tcPr>
+                </a:tc>
+                <a:tc>
+                  <a:txBody>
+                    <a:bodyPr wrap="square"/>
+                    <a:lstStyle/>
+                    <a:p>
+                      <a:pPr algn="ctr">
+                        <a:lnSpc>
+                          <a:spcPct val="102000"/>
+                        </a:lnSpc>
+                        <a:spcAft>
+                          <a:spcPts val="0"/>
+                        </a:spcAft>
+                      </a:pPr>
+                      <a:r>
+                        <a:rPr sz="850" b="0">
+                          <a:solidFill>
+                            <a:srgbClr val="15505E"/>
+                          </a:solidFill>
+                          <a:latin typeface="Calibri"/>
+                        </a:rPr>
+                        <a:t>18.625 – $ 800.871</a:t>
+                      </a:r>
+                    </a:p>
+                  </a:txBody>
+                  <a:tcPr marL="91440" marR="91440" marT="36576" marB="36576" anchor="ctr">
+                    <a:lnB w="25400" cap="flat" cmpd="sng" algn="ctr">
+                      <a:solidFill>
+                        <a:srgbClr val="15505E"/>
+                      </a:solidFill>
+                    </a:lnB>
+                    <a:lnT w="25400" cap="flat" cmpd="sng" algn="ctr">
+                      <a:solidFill>
+                        <a:srgbClr val="15505E"/>
+                      </a:solidFill>
+                    </a:lnT>
+                    <a:lnR w="25400" cap="flat" cmpd="sng" algn="ctr">
+                      <a:solidFill>
+                        <a:srgbClr val="15505E"/>
+                      </a:solidFill>
+                    </a:lnR>
+                    <a:lnL w="25400" cap="flat" cmpd="sng" algn="ctr">
+                      <a:solidFill>
+                        <a:srgbClr val="15505E"/>
+                      </a:solidFill>
+                    </a:lnL>
+                    <a:solidFill>
+                      <a:srgbClr val="F4EFE4"/>
+                    </a:solidFill>
+                  </a:tcPr>
+                </a:tc>
+                <a:tc>
+                  <a:txBody>
+                    <a:bodyPr wrap="square"/>
+                    <a:lstStyle/>
+                    <a:p>
+                      <a:pPr algn="ctr">
+                        <a:lnSpc>
+                          <a:spcPct val="102000"/>
+                        </a:lnSpc>
+                        <a:spcAft>
+                          <a:spcPts val="0"/>
+                        </a:spcAft>
+                      </a:pPr>
+                      <a:r>
+                        <a:rPr sz="850" b="0">
+                          <a:solidFill>
+                            <a:srgbClr val="15505E"/>
+                          </a:solidFill>
+                          <a:latin typeface="Calibri"/>
+                        </a:rPr>
+                        <a:t>17.448 – $ 1.221.346</a:t>
+                      </a:r>
+                    </a:p>
+                  </a:txBody>
+                  <a:tcPr marL="91440" marR="91440" marT="36576" marB="36576" anchor="ctr">
+                    <a:lnB w="25400" cap="flat" cmpd="sng" algn="ctr">
+                      <a:solidFill>
+                        <a:srgbClr val="15505E"/>
+                      </a:solidFill>
+                    </a:lnB>
+                    <a:lnT w="25400" cap="flat" cmpd="sng" algn="ctr">
+                      <a:solidFill>
+                        <a:srgbClr val="15505E"/>
+                      </a:solidFill>
+                    </a:lnT>
+                    <a:lnR w="25400" cap="flat" cmpd="sng" algn="ctr">
+                      <a:solidFill>
+                        <a:srgbClr val="15505E"/>
+                      </a:solidFill>
+                    </a:lnR>
+                    <a:lnL w="25400" cap="flat" cmpd="sng" algn="ctr">
+                      <a:solidFill>
+                        <a:srgbClr val="15505E"/>
+                      </a:solidFill>
+                    </a:lnL>
+                    <a:solidFill>
+                      <a:srgbClr val="F4EFE4"/>
+                    </a:solidFill>
+                  </a:tcPr>
+                </a:tc>
+                <a:tc>
+                  <a:txBody>
+                    <a:bodyPr wrap="square"/>
+                    <a:lstStyle/>
+                    <a:p>
+                      <a:pPr algn="ctr">
+                        <a:lnSpc>
+                          <a:spcPct val="102000"/>
+                        </a:lnSpc>
+                        <a:spcAft>
+                          <a:spcPts val="0"/>
+                        </a:spcAft>
+                      </a:pPr>
+                      <a:r>
+                        <a:rPr sz="850" b="0">
+                          <a:solidFill>
+                            <a:srgbClr val="15505E"/>
+                          </a:solidFill>
+                          <a:latin typeface="Calibri"/>
+                        </a:rPr>
+                        <a:t>+11%</a:t>
+                      </a:r>
+                    </a:p>
+                  </a:txBody>
+                  <a:tcPr marL="91440" marR="91440" marT="36576" marB="36576" anchor="ctr">
+                    <a:lnB w="25400" cap="flat" cmpd="sng" algn="ctr">
+                      <a:solidFill>
+                        <a:srgbClr val="15505E"/>
+                      </a:solidFill>
+                    </a:lnB>
+                    <a:lnT w="25400" cap="flat" cmpd="sng" algn="ctr">
+                      <a:solidFill>
+                        <a:srgbClr val="15505E"/>
+                      </a:solidFill>
+                    </a:lnT>
+                    <a:lnR w="25400" cap="flat" cmpd="sng" algn="ctr">
+                      <a:solidFill>
+                        <a:srgbClr val="15505E"/>
+                      </a:solidFill>
+                    </a:lnR>
+                    <a:lnL w="25400" cap="flat" cmpd="sng" algn="ctr">
+                      <a:solidFill>
+                        <a:srgbClr val="15505E"/>
+                      </a:solidFill>
+                    </a:lnL>
+                    <a:solidFill>
+                      <a:srgbClr val="F4EFE4"/>
+                    </a:solidFill>
+                  </a:tcPr>
+                </a:tc>
+                <a:tc>
+                  <a:txBody>
+                    <a:bodyPr wrap="square"/>
+                    <a:lstStyle/>
+                    <a:p>
+                      <a:pPr algn="ctr">
+                        <a:lnSpc>
+                          <a:spcPct val="102000"/>
+                        </a:lnSpc>
+                        <a:spcAft>
+                          <a:spcPts val="0"/>
+                        </a:spcAft>
+                      </a:pPr>
+                      <a:r>
+                        <a:rPr sz="850" b="0">
+                          <a:solidFill>
+                            <a:srgbClr val="15505E"/>
+                          </a:solidFill>
+                          <a:latin typeface="Calibri"/>
+                        </a:rPr>
+                        <a:t>+18%</a:t>
+                      </a:r>
+                    </a:p>
+                  </a:txBody>
+                  <a:tcPr marL="91440" marR="91440" marT="36576" marB="36576" anchor="ctr">
+                    <a:lnB w="25400" cap="flat" cmpd="sng" algn="ctr">
+                      <a:solidFill>
+                        <a:srgbClr val="15505E"/>
+                      </a:solidFill>
+                    </a:lnB>
+                    <a:lnT w="25400" cap="flat" cmpd="sng" algn="ctr">
+                      <a:solidFill>
+                        <a:srgbClr val="15505E"/>
+                      </a:solidFill>
+                    </a:lnT>
+                    <a:lnR w="25400" cap="flat" cmpd="sng" algn="ctr">
+                      <a:solidFill>
+                        <a:srgbClr val="15505E"/>
+                      </a:solidFill>
+                    </a:lnR>
+                    <a:lnL w="25400" cap="flat" cmpd="sng" algn="ctr">
+                      <a:solidFill>
+                        <a:srgbClr val="15505E"/>
+                      </a:solidFill>
+                    </a:lnL>
+                    <a:solidFill>
+                      <a:srgbClr val="F4EFE4"/>
+                    </a:solidFill>
+                  </a:tcPr>
+                </a:tc>
+                <a:tc>
+                  <a:txBody>
+                    <a:bodyPr wrap="square"/>
+                    <a:lstStyle/>
+                    <a:p>
+                      <a:pPr algn="ctr">
+                        <a:lnSpc>
+                          <a:spcPct val="102000"/>
+                        </a:lnSpc>
+                        <a:spcAft>
+                          <a:spcPts val="0"/>
+                        </a:spcAft>
+                      </a:pPr>
+                      <a:r>
+                        <a:rPr sz="850" b="0">
+                          <a:solidFill>
+                            <a:srgbClr val="15505E"/>
+                          </a:solidFill>
+                          <a:latin typeface="Calibri"/>
+                        </a:rPr>
+                        <a:t>-6,3 pp</a:t>
+                      </a:r>
+                    </a:p>
+                  </a:txBody>
+                  <a:tcPr marL="91440" marR="91440" marT="36576" marB="36576" anchor="ctr">
+                    <a:lnB w="25400" cap="flat" cmpd="sng" algn="ctr">
+                      <a:solidFill>
+                        <a:srgbClr val="15505E"/>
+                      </a:solidFill>
+                    </a:lnB>
+                    <a:lnT w="25400" cap="flat" cmpd="sng" algn="ctr">
+                      <a:solidFill>
+                        <a:srgbClr val="15505E"/>
+                      </a:solidFill>
+                    </a:lnT>
+                    <a:lnR w="25400" cap="flat" cmpd="sng" algn="ctr">
+                      <a:solidFill>
+                        <a:srgbClr val="15505E"/>
+                      </a:solidFill>
+                    </a:lnR>
+                    <a:lnL w="25400" cap="flat" cmpd="sng" algn="ctr">
+                      <a:solidFill>
+                        <a:srgbClr val="15505E"/>
+                      </a:solidFill>
+                    </a:lnL>
+                    <a:solidFill>
+                      <a:srgbClr val="F4EFE4"/>
+                    </a:solidFill>
+                  </a:tcPr>
+                </a:tc>
+              </a:tr>
+              <a:tr h="237744">
+                <a:tc>
+                  <a:txBody>
+                    <a:bodyPr wrap="square"/>
+                    <a:lstStyle/>
+                    <a:p>
+                      <a:pPr algn="ctr">
+                        <a:lnSpc>
+                          <a:spcPct val="102000"/>
+                        </a:lnSpc>
+                        <a:spcAft>
+                          <a:spcPts val="0"/>
+                        </a:spcAft>
+                      </a:pPr>
+                      <a:r>
+                        <a:rPr sz="850" b="0">
+                          <a:solidFill>
+                            <a:srgbClr val="15505E"/>
+                          </a:solidFill>
+                          <a:latin typeface="Calibri"/>
+                        </a:rPr>
+                        <a:t>13 (Núñez, Belgrano, Colegiales)</a:t>
+                      </a:r>
+                    </a:p>
+                  </a:txBody>
+                  <a:tcPr marL="91440" marR="91440" marT="36576" marB="36576" anchor="ctr">
+                    <a:lnB w="25400" cap="flat" cmpd="sng" algn="ctr">
+                      <a:solidFill>
+                        <a:srgbClr val="15505E"/>
+                      </a:solidFill>
+                    </a:lnB>
+                    <a:lnT w="25400" cap="flat" cmpd="sng" algn="ctr">
+                      <a:solidFill>
+                        <a:srgbClr val="15505E"/>
+                      </a:solidFill>
+                    </a:lnT>
+                    <a:lnR w="25400" cap="flat" cmpd="sng" algn="ctr">
+                      <a:solidFill>
+                        <a:srgbClr val="15505E"/>
+                      </a:solidFill>
+                    </a:lnR>
+                    <a:lnL w="25400" cap="flat" cmpd="sng" algn="ctr">
+                      <a:solidFill>
+                        <a:srgbClr val="15505E"/>
+                      </a:solidFill>
+                    </a:lnL>
+                    <a:solidFill>
+                      <a:srgbClr val="F4EFE4"/>
+                    </a:solidFill>
+                  </a:tcPr>
+                </a:tc>
+                <a:tc>
+                  <a:txBody>
+                    <a:bodyPr wrap="square"/>
+                    <a:lstStyle/>
+                    <a:p>
+                      <a:pPr algn="ctr">
+                        <a:lnSpc>
+                          <a:spcPct val="102000"/>
+                        </a:lnSpc>
+                        <a:spcAft>
+                          <a:spcPts val="0"/>
+                        </a:spcAft>
+                      </a:pPr>
+                      <a:r>
+                        <a:rPr sz="850" b="0">
+                          <a:solidFill>
+                            <a:srgbClr val="15505E"/>
+                          </a:solidFill>
+                          <a:latin typeface="Calibri"/>
+                        </a:rPr>
+                        <a:t>Norte</a:t>
+                      </a:r>
+                    </a:p>
+                  </a:txBody>
+                  <a:tcPr marL="91440" marR="91440" marT="36576" marB="36576" anchor="ctr">
+                    <a:lnB w="25400" cap="flat" cmpd="sng" algn="ctr">
+                      <a:solidFill>
+                        <a:srgbClr val="15505E"/>
+                      </a:solidFill>
+                    </a:lnB>
+                    <a:lnT w="25400" cap="flat" cmpd="sng" algn="ctr">
+                      <a:solidFill>
+                        <a:srgbClr val="15505E"/>
+                      </a:solidFill>
+                    </a:lnT>
+                    <a:lnR w="25400" cap="flat" cmpd="sng" algn="ctr">
+                      <a:solidFill>
+                        <a:srgbClr val="15505E"/>
+                      </a:solidFill>
+                    </a:lnR>
+                    <a:lnL w="25400" cap="flat" cmpd="sng" algn="ctr">
+                      <a:solidFill>
+                        <a:srgbClr val="15505E"/>
+                      </a:solidFill>
+                    </a:lnL>
+                    <a:solidFill>
+                      <a:srgbClr val="F4EFE4"/>
+                    </a:solidFill>
+                  </a:tcPr>
+                </a:tc>
+                <a:tc>
+                  <a:txBody>
+                    <a:bodyPr wrap="square"/>
+                    <a:lstStyle/>
+                    <a:p>
+                      <a:pPr algn="ctr">
+                        <a:lnSpc>
+                          <a:spcPct val="102000"/>
+                        </a:lnSpc>
+                        <a:spcAft>
+                          <a:spcPts val="0"/>
+                        </a:spcAft>
+                      </a:pPr>
+                      <a:r>
+                        <a:rPr sz="850" b="0">
+                          <a:solidFill>
+                            <a:srgbClr val="15505E"/>
+                          </a:solidFill>
+                          <a:latin typeface="Calibri"/>
+                        </a:rPr>
+                        <a:t>20.741 – $ 622.236</a:t>
+                      </a:r>
+                    </a:p>
+                  </a:txBody>
+                  <a:tcPr marL="91440" marR="91440" marT="36576" marB="36576" anchor="ctr">
+                    <a:lnB w="25400" cap="flat" cmpd="sng" algn="ctr">
+                      <a:solidFill>
+                        <a:srgbClr val="15505E"/>
+                      </a:solidFill>
+                    </a:lnB>
+                    <a:lnT w="25400" cap="flat" cmpd="sng" algn="ctr">
+                      <a:solidFill>
+                        <a:srgbClr val="15505E"/>
+                      </a:solidFill>
+                    </a:lnT>
+                    <a:lnR w="25400" cap="flat" cmpd="sng" algn="ctr">
+                      <a:solidFill>
+                        <a:srgbClr val="15505E"/>
+                      </a:solidFill>
+                    </a:lnR>
+                    <a:lnL w="25400" cap="flat" cmpd="sng" algn="ctr">
+                      <a:solidFill>
+                        <a:srgbClr val="15505E"/>
+                      </a:solidFill>
+                    </a:lnL>
+                    <a:solidFill>
+                      <a:srgbClr val="F4EFE4"/>
+                    </a:solidFill>
+                  </a:tcPr>
+                </a:tc>
+                <a:tc>
+                  <a:txBody>
+                    <a:bodyPr wrap="square"/>
+                    <a:lstStyle/>
+                    <a:p>
+                      <a:pPr algn="ctr">
+                        <a:lnSpc>
+                          <a:spcPct val="102000"/>
+                        </a:lnSpc>
+                        <a:spcAft>
+                          <a:spcPts val="0"/>
+                        </a:spcAft>
+                      </a:pPr>
+                      <a:r>
+                        <a:rPr sz="850" b="0">
+                          <a:solidFill>
+                            <a:srgbClr val="15505E"/>
+                          </a:solidFill>
+                          <a:latin typeface="Calibri"/>
+                        </a:rPr>
+                        <a:t>19.748 – $ 849.155</a:t>
+                      </a:r>
+                    </a:p>
+                  </a:txBody>
+                  <a:tcPr marL="91440" marR="91440" marT="36576" marB="36576" anchor="ctr">
+                    <a:lnB w="25400" cap="flat" cmpd="sng" algn="ctr">
+                      <a:solidFill>
+                        <a:srgbClr val="15505E"/>
+                      </a:solidFill>
+                    </a:lnB>
+                    <a:lnT w="25400" cap="flat" cmpd="sng" algn="ctr">
+                      <a:solidFill>
+                        <a:srgbClr val="15505E"/>
+                      </a:solidFill>
+                    </a:lnT>
+                    <a:lnR w="25400" cap="flat" cmpd="sng" algn="ctr">
+                      <a:solidFill>
+                        <a:srgbClr val="15505E"/>
+                      </a:solidFill>
+                    </a:lnR>
+                    <a:lnL w="25400" cap="flat" cmpd="sng" algn="ctr">
+                      <a:solidFill>
+                        <a:srgbClr val="15505E"/>
+                      </a:solidFill>
+                    </a:lnL>
+                    <a:solidFill>
+                      <a:srgbClr val="F4EFE4"/>
+                    </a:solidFill>
+                  </a:tcPr>
+                </a:tc>
+                <a:tc>
+                  <a:txBody>
+                    <a:bodyPr wrap="square"/>
+                    <a:lstStyle/>
+                    <a:p>
+                      <a:pPr algn="ctr">
+                        <a:lnSpc>
+                          <a:spcPct val="102000"/>
+                        </a:lnSpc>
+                        <a:spcAft>
+                          <a:spcPts val="0"/>
+                        </a:spcAft>
+                      </a:pPr>
+                      <a:r>
+                        <a:rPr sz="850" b="0">
+                          <a:solidFill>
+                            <a:srgbClr val="15505E"/>
+                          </a:solidFill>
+                          <a:latin typeface="Calibri"/>
+                        </a:rPr>
+                        <a:t>18.917 – $ 1.324.176</a:t>
+                      </a:r>
+                    </a:p>
+                  </a:txBody>
+                  <a:tcPr marL="91440" marR="91440" marT="36576" marB="36576" anchor="ctr">
+                    <a:lnB w="25400" cap="flat" cmpd="sng" algn="ctr">
+                      <a:solidFill>
+                        <a:srgbClr val="15505E"/>
+                      </a:solidFill>
+                    </a:lnB>
+                    <a:lnT w="25400" cap="flat" cmpd="sng" algn="ctr">
+                      <a:solidFill>
+                        <a:srgbClr val="15505E"/>
+                      </a:solidFill>
+                    </a:lnT>
+                    <a:lnR w="25400" cap="flat" cmpd="sng" algn="ctr">
+                      <a:solidFill>
+                        <a:srgbClr val="15505E"/>
+                      </a:solidFill>
+                    </a:lnR>
+                    <a:lnL w="25400" cap="flat" cmpd="sng" algn="ctr">
+                      <a:solidFill>
+                        <a:srgbClr val="15505E"/>
+                      </a:solidFill>
+                    </a:lnL>
+                    <a:solidFill>
+                      <a:srgbClr val="F4EFE4"/>
+                    </a:solidFill>
+                  </a:tcPr>
+                </a:tc>
+                <a:tc>
+                  <a:txBody>
+                    <a:bodyPr wrap="square"/>
+                    <a:lstStyle/>
+                    <a:p>
+                      <a:pPr algn="ctr">
+                        <a:lnSpc>
+                          <a:spcPct val="102000"/>
+                        </a:lnSpc>
+                        <a:spcAft>
+                          <a:spcPts val="0"/>
+                        </a:spcAft>
+                      </a:pPr>
+                      <a:r>
+                        <a:rPr sz="850" b="0">
+                          <a:solidFill>
+                            <a:srgbClr val="15505E"/>
+                          </a:solidFill>
+                          <a:latin typeface="Calibri"/>
+                        </a:rPr>
+                        <a:t>+10%</a:t>
+                      </a:r>
+                    </a:p>
+                  </a:txBody>
+                  <a:tcPr marL="91440" marR="91440" marT="36576" marB="36576" anchor="ctr">
+                    <a:lnB w="25400" cap="flat" cmpd="sng" algn="ctr">
+                      <a:solidFill>
+                        <a:srgbClr val="15505E"/>
+                      </a:solidFill>
+                    </a:lnB>
+                    <a:lnT w="25400" cap="flat" cmpd="sng" algn="ctr">
+                      <a:solidFill>
+                        <a:srgbClr val="15505E"/>
+                      </a:solidFill>
+                    </a:lnT>
+                    <a:lnR w="25400" cap="flat" cmpd="sng" algn="ctr">
+                      <a:solidFill>
+                        <a:srgbClr val="15505E"/>
+                      </a:solidFill>
+                    </a:lnR>
+                    <a:lnL w="25400" cap="flat" cmpd="sng" algn="ctr">
+                      <a:solidFill>
+                        <a:srgbClr val="15505E"/>
+                      </a:solidFill>
+                    </a:lnL>
+                    <a:solidFill>
+                      <a:srgbClr val="F4EFE4"/>
+                    </a:solidFill>
+                  </a:tcPr>
+                </a:tc>
+                <a:tc>
+                  <a:txBody>
+                    <a:bodyPr wrap="square"/>
+                    <a:lstStyle/>
+                    <a:p>
+                      <a:pPr algn="ctr">
+                        <a:lnSpc>
+                          <a:spcPct val="102000"/>
+                        </a:lnSpc>
+                        <a:spcAft>
+                          <a:spcPts val="0"/>
+                        </a:spcAft>
+                      </a:pPr>
+                      <a:r>
+                        <a:rPr sz="850" b="0">
+                          <a:solidFill>
+                            <a:srgbClr val="15505E"/>
+                          </a:solidFill>
+                          <a:latin typeface="Calibri"/>
+                        </a:rPr>
+                        <a:t>+13%</a:t>
+                      </a:r>
+                    </a:p>
+                  </a:txBody>
+                  <a:tcPr marL="91440" marR="91440" marT="36576" marB="36576" anchor="ctr">
+                    <a:lnB w="25400" cap="flat" cmpd="sng" algn="ctr">
+                      <a:solidFill>
+                        <a:srgbClr val="15505E"/>
+                      </a:solidFill>
+                    </a:lnB>
+                    <a:lnT w="25400" cap="flat" cmpd="sng" algn="ctr">
+                      <a:solidFill>
+                        <a:srgbClr val="15505E"/>
+                      </a:solidFill>
+                    </a:lnT>
+                    <a:lnR w="25400" cap="flat" cmpd="sng" algn="ctr">
+                      <a:solidFill>
+                        <a:srgbClr val="15505E"/>
+                      </a:solidFill>
+                    </a:lnR>
+                    <a:lnL w="25400" cap="flat" cmpd="sng" algn="ctr">
+                      <a:solidFill>
+                        <a:srgbClr val="15505E"/>
+                      </a:solidFill>
+                    </a:lnL>
+                    <a:solidFill>
+                      <a:srgbClr val="F4EFE4"/>
+                    </a:solidFill>
+                  </a:tcPr>
+                </a:tc>
+                <a:tc>
+                  <a:txBody>
+                    <a:bodyPr wrap="square"/>
+                    <a:lstStyle/>
+                    <a:p>
+                      <a:pPr algn="ctr">
+                        <a:lnSpc>
+                          <a:spcPct val="102000"/>
+                        </a:lnSpc>
+                        <a:spcAft>
+                          <a:spcPts val="0"/>
+                        </a:spcAft>
+                      </a:pPr>
+                      <a:r>
+                        <a:rPr sz="850" b="0">
+                          <a:solidFill>
+                            <a:srgbClr val="15505E"/>
+                          </a:solidFill>
+                          <a:latin typeface="Calibri"/>
+                        </a:rPr>
+                        <a:t>-3,1 pp</a:t>
+                      </a:r>
+                    </a:p>
+                  </a:txBody>
+                  <a:tcPr marL="91440" marR="91440" marT="36576" marB="36576" anchor="ctr">
+                    <a:lnB w="25400" cap="flat" cmpd="sng" algn="ctr">
+                      <a:solidFill>
+                        <a:srgbClr val="15505E"/>
+                      </a:solidFill>
+                    </a:lnB>
+                    <a:lnT w="25400" cap="flat" cmpd="sng" algn="ctr">
+                      <a:solidFill>
+                        <a:srgbClr val="15505E"/>
+                      </a:solidFill>
+                    </a:lnT>
+                    <a:lnR w="25400" cap="flat" cmpd="sng" algn="ctr">
+                      <a:solidFill>
+                        <a:srgbClr val="15505E"/>
+                      </a:solidFill>
+                    </a:lnR>
+                    <a:lnL w="25400" cap="flat" cmpd="sng" algn="ctr">
+                      <a:solidFill>
+                        <a:srgbClr val="15505E"/>
+                      </a:solidFill>
+                    </a:lnL>
+                    <a:solidFill>
+                      <a:srgbClr val="F4EFE4"/>
+                    </a:solidFill>
+                  </a:tcPr>
+                </a:tc>
+              </a:tr>
+              <a:tr h="237744">
+                <a:tc>
+                  <a:txBody>
+                    <a:bodyPr wrap="square"/>
+                    <a:lstStyle/>
+                    <a:p>
+                      <a:pPr algn="ctr">
+                        <a:lnSpc>
+                          <a:spcPct val="102000"/>
+                        </a:lnSpc>
+                        <a:spcAft>
+                          <a:spcPts val="0"/>
+                        </a:spcAft>
+                      </a:pPr>
+                      <a:r>
+                        <a:rPr sz="850" b="0">
+                          <a:solidFill>
+                            <a:srgbClr val="15505E"/>
+                          </a:solidFill>
+                          <a:latin typeface="Calibri"/>
+                        </a:rPr>
+                        <a:t>14 (Palermo)</a:t>
+                      </a:r>
+                    </a:p>
+                  </a:txBody>
+                  <a:tcPr marL="91440" marR="91440" marT="36576" marB="36576" anchor="ctr">
+                    <a:lnB w="25400" cap="flat" cmpd="sng" algn="ctr">
+                      <a:solidFill>
+                        <a:srgbClr val="15505E"/>
+                      </a:solidFill>
+                    </a:lnB>
+                    <a:lnT w="25400" cap="flat" cmpd="sng" algn="ctr">
+                      <a:solidFill>
+                        <a:srgbClr val="15505E"/>
+                      </a:solidFill>
+                    </a:lnT>
+                    <a:lnR w="25400" cap="flat" cmpd="sng" algn="ctr">
+                      <a:solidFill>
+                        <a:srgbClr val="15505E"/>
+                      </a:solidFill>
+                    </a:lnR>
+                    <a:lnL w="25400" cap="flat" cmpd="sng" algn="ctr">
+                      <a:solidFill>
+                        <a:srgbClr val="15505E"/>
+                      </a:solidFill>
+                    </a:lnL>
+                    <a:solidFill>
+                      <a:srgbClr val="F4EFE4"/>
+                    </a:solidFill>
+                  </a:tcPr>
+                </a:tc>
+                <a:tc>
+                  <a:txBody>
+                    <a:bodyPr wrap="square"/>
+                    <a:lstStyle/>
+                    <a:p>
+                      <a:pPr algn="ctr">
+                        <a:lnSpc>
+                          <a:spcPct val="102000"/>
+                        </a:lnSpc>
+                        <a:spcAft>
+                          <a:spcPts val="0"/>
+                        </a:spcAft>
+                      </a:pPr>
+                      <a:r>
+                        <a:rPr sz="850" b="0">
+                          <a:solidFill>
+                            <a:srgbClr val="15505E"/>
+                          </a:solidFill>
+                          <a:latin typeface="Calibri"/>
+                        </a:rPr>
+                        <a:t>Norte</a:t>
+                      </a:r>
+                    </a:p>
+                  </a:txBody>
+                  <a:tcPr marL="91440" marR="91440" marT="36576" marB="36576" anchor="ctr">
+                    <a:lnB w="25400" cap="flat" cmpd="sng" algn="ctr">
+                      <a:solidFill>
+                        <a:srgbClr val="15505E"/>
+                      </a:solidFill>
+                    </a:lnB>
+                    <a:lnT w="25400" cap="flat" cmpd="sng" algn="ctr">
+                      <a:solidFill>
+                        <a:srgbClr val="15505E"/>
+                      </a:solidFill>
+                    </a:lnT>
+                    <a:lnR w="25400" cap="flat" cmpd="sng" algn="ctr">
+                      <a:solidFill>
+                        <a:srgbClr val="15505E"/>
+                      </a:solidFill>
+                    </a:lnR>
+                    <a:lnL w="25400" cap="flat" cmpd="sng" algn="ctr">
+                      <a:solidFill>
+                        <a:srgbClr val="15505E"/>
+                      </a:solidFill>
+                    </a:lnL>
+                    <a:solidFill>
+                      <a:srgbClr val="F4EFE4"/>
+                    </a:solidFill>
+                  </a:tcPr>
+                </a:tc>
+                <a:tc>
+                  <a:txBody>
+                    <a:bodyPr wrap="square"/>
+                    <a:lstStyle/>
+                    <a:p>
+                      <a:pPr algn="ctr">
+                        <a:lnSpc>
+                          <a:spcPct val="102000"/>
+                        </a:lnSpc>
+                        <a:spcAft>
+                          <a:spcPts val="0"/>
+                        </a:spcAft>
+                      </a:pPr>
+                      <a:r>
+                        <a:rPr sz="850" b="0">
+                          <a:solidFill>
+                            <a:srgbClr val="15505E"/>
+                          </a:solidFill>
+                          <a:latin typeface="Calibri"/>
+                        </a:rPr>
+                        <a:t>20.693 – $ 620.799</a:t>
+                      </a:r>
+                    </a:p>
+                  </a:txBody>
+                  <a:tcPr marL="91440" marR="91440" marT="36576" marB="36576" anchor="ctr">
+                    <a:lnB w="25400" cap="flat" cmpd="sng" algn="ctr">
+                      <a:solidFill>
+                        <a:srgbClr val="15505E"/>
+                      </a:solidFill>
+                    </a:lnB>
+                    <a:lnT w="25400" cap="flat" cmpd="sng" algn="ctr">
+                      <a:solidFill>
+                        <a:srgbClr val="15505E"/>
+                      </a:solidFill>
+                    </a:lnT>
+                    <a:lnR w="25400" cap="flat" cmpd="sng" algn="ctr">
+                      <a:solidFill>
+                        <a:srgbClr val="15505E"/>
+                      </a:solidFill>
+                    </a:lnR>
+                    <a:lnL w="25400" cap="flat" cmpd="sng" algn="ctr">
+                      <a:solidFill>
+                        <a:srgbClr val="15505E"/>
+                      </a:solidFill>
+                    </a:lnL>
+                    <a:solidFill>
+                      <a:srgbClr val="F4EFE4"/>
+                    </a:solidFill>
+                  </a:tcPr>
+                </a:tc>
+                <a:tc>
+                  <a:txBody>
+                    <a:bodyPr wrap="square"/>
+                    <a:lstStyle/>
+                    <a:p>
+                      <a:pPr algn="ctr">
+                        <a:lnSpc>
+                          <a:spcPct val="102000"/>
+                        </a:lnSpc>
+                        <a:spcAft>
+                          <a:spcPts val="0"/>
+                        </a:spcAft>
+                      </a:pPr>
+                      <a:r>
+                        <a:rPr sz="850" b="0">
+                          <a:solidFill>
+                            <a:srgbClr val="15505E"/>
+                          </a:solidFill>
+                          <a:latin typeface="Calibri"/>
+                        </a:rPr>
+                        <a:t>19.841 – $ 853.180</a:t>
+                      </a:r>
+                    </a:p>
+                  </a:txBody>
+                  <a:tcPr marL="91440" marR="91440" marT="36576" marB="36576" anchor="ctr">
+                    <a:lnB w="25400" cap="flat" cmpd="sng" algn="ctr">
+                      <a:solidFill>
+                        <a:srgbClr val="15505E"/>
+                      </a:solidFill>
+                    </a:lnB>
+                    <a:lnT w="25400" cap="flat" cmpd="sng" algn="ctr">
+                      <a:solidFill>
+                        <a:srgbClr val="15505E"/>
+                      </a:solidFill>
+                    </a:lnT>
+                    <a:lnR w="25400" cap="flat" cmpd="sng" algn="ctr">
+                      <a:solidFill>
+                        <a:srgbClr val="15505E"/>
+                      </a:solidFill>
+                    </a:lnR>
+                    <a:lnL w="25400" cap="flat" cmpd="sng" algn="ctr">
+                      <a:solidFill>
+                        <a:srgbClr val="15505E"/>
+                      </a:solidFill>
+                    </a:lnL>
+                    <a:solidFill>
+                      <a:srgbClr val="F4EFE4"/>
+                    </a:solidFill>
+                  </a:tcPr>
+                </a:tc>
+                <a:tc>
+                  <a:txBody>
+                    <a:bodyPr wrap="square"/>
+                    <a:lstStyle/>
+                    <a:p>
+                      <a:pPr algn="ctr">
+                        <a:lnSpc>
+                          <a:spcPct val="102000"/>
+                        </a:lnSpc>
+                        <a:spcAft>
+                          <a:spcPts val="0"/>
+                        </a:spcAft>
+                      </a:pPr>
+                      <a:r>
+                        <a:rPr sz="850" b="0">
+                          <a:solidFill>
+                            <a:srgbClr val="15505E"/>
+                          </a:solidFill>
+                          <a:latin typeface="Calibri"/>
+                        </a:rPr>
+                        <a:t>19.058 – $ 1.334.095</a:t>
+                      </a:r>
+                    </a:p>
+                  </a:txBody>
+                  <a:tcPr marL="91440" marR="91440" marT="36576" marB="36576" anchor="ctr">
+                    <a:lnB w="25400" cap="flat" cmpd="sng" algn="ctr">
+                      <a:solidFill>
+                        <a:srgbClr val="15505E"/>
+                      </a:solidFill>
+                    </a:lnB>
+                    <a:lnT w="25400" cap="flat" cmpd="sng" algn="ctr">
+                      <a:solidFill>
+                        <a:srgbClr val="15505E"/>
+                      </a:solidFill>
+                    </a:lnT>
+                    <a:lnR w="25400" cap="flat" cmpd="sng" algn="ctr">
+                      <a:solidFill>
+                        <a:srgbClr val="15505E"/>
+                      </a:solidFill>
+                    </a:lnR>
+                    <a:lnL w="25400" cap="flat" cmpd="sng" algn="ctr">
+                      <a:solidFill>
+                        <a:srgbClr val="15505E"/>
+                      </a:solidFill>
+                    </a:lnL>
+                    <a:solidFill>
+                      <a:srgbClr val="F4EFE4"/>
+                    </a:solidFill>
+                  </a:tcPr>
+                </a:tc>
+                <a:tc>
+                  <a:txBody>
+                    <a:bodyPr wrap="square"/>
+                    <a:lstStyle/>
+                    <a:p>
+                      <a:pPr algn="ctr">
+                        <a:lnSpc>
+                          <a:spcPct val="102000"/>
+                        </a:lnSpc>
+                        <a:spcAft>
+                          <a:spcPts val="0"/>
+                        </a:spcAft>
+                      </a:pPr>
+                      <a:r>
+                        <a:rPr sz="850" b="0">
+                          <a:solidFill>
+                            <a:srgbClr val="15505E"/>
+                          </a:solidFill>
+                          <a:latin typeface="Calibri"/>
+                        </a:rPr>
+                        <a:t>+9%</a:t>
+                      </a:r>
+                    </a:p>
+                  </a:txBody>
+                  <a:tcPr marL="91440" marR="91440" marT="36576" marB="36576" anchor="ctr">
+                    <a:lnB w="25400" cap="flat" cmpd="sng" algn="ctr">
+                      <a:solidFill>
+                        <a:srgbClr val="15505E"/>
+                      </a:solidFill>
+                    </a:lnB>
+                    <a:lnT w="25400" cap="flat" cmpd="sng" algn="ctr">
+                      <a:solidFill>
+                        <a:srgbClr val="15505E"/>
+                      </a:solidFill>
+                    </a:lnT>
+                    <a:lnR w="25400" cap="flat" cmpd="sng" algn="ctr">
+                      <a:solidFill>
+                        <a:srgbClr val="15505E"/>
+                      </a:solidFill>
+                    </a:lnR>
+                    <a:lnL w="25400" cap="flat" cmpd="sng" algn="ctr">
+                      <a:solidFill>
+                        <a:srgbClr val="15505E"/>
+                      </a:solidFill>
+                    </a:lnL>
+                    <a:solidFill>
+                      <a:srgbClr val="F4EFE4"/>
+                    </a:solidFill>
+                  </a:tcPr>
+                </a:tc>
+                <a:tc>
+                  <a:txBody>
+                    <a:bodyPr wrap="square"/>
+                    <a:lstStyle/>
+                    <a:p>
+                      <a:pPr algn="ctr">
+                        <a:lnSpc>
+                          <a:spcPct val="102000"/>
+                        </a:lnSpc>
+                        <a:spcAft>
+                          <a:spcPts val="0"/>
+                        </a:spcAft>
+                      </a:pPr>
+                      <a:r>
+                        <a:rPr sz="850" b="0">
+                          <a:solidFill>
+                            <a:srgbClr val="15505E"/>
+                          </a:solidFill>
+                          <a:latin typeface="Calibri"/>
+                        </a:rPr>
+                        <a:t>+19%</a:t>
+                      </a:r>
+                    </a:p>
+                  </a:txBody>
+                  <a:tcPr marL="91440" marR="91440" marT="36576" marB="36576" anchor="ctr">
+                    <a:lnB w="25400" cap="flat" cmpd="sng" algn="ctr">
+                      <a:solidFill>
+                        <a:srgbClr val="15505E"/>
+                      </a:solidFill>
+                    </a:lnB>
+                    <a:lnT w="25400" cap="flat" cmpd="sng" algn="ctr">
+                      <a:solidFill>
+                        <a:srgbClr val="15505E"/>
+                      </a:solidFill>
+                    </a:lnT>
+                    <a:lnR w="25400" cap="flat" cmpd="sng" algn="ctr">
+                      <a:solidFill>
+                        <a:srgbClr val="15505E"/>
+                      </a:solidFill>
+                    </a:lnR>
+                    <a:lnL w="25400" cap="flat" cmpd="sng" algn="ctr">
+                      <a:solidFill>
+                        <a:srgbClr val="15505E"/>
+                      </a:solidFill>
+                    </a:lnL>
+                    <a:solidFill>
+                      <a:srgbClr val="F4EFE4"/>
+                    </a:solidFill>
+                  </a:tcPr>
+                </a:tc>
+                <a:tc>
+                  <a:txBody>
+                    <a:bodyPr wrap="square"/>
+                    <a:lstStyle/>
+                    <a:p>
+                      <a:pPr algn="ctr">
+                        <a:lnSpc>
+                          <a:spcPct val="102000"/>
+                        </a:lnSpc>
+                        <a:spcAft>
+                          <a:spcPts val="0"/>
+                        </a:spcAft>
+                      </a:pPr>
+                      <a:r>
+                        <a:rPr sz="850" b="0">
+                          <a:solidFill>
+                            <a:srgbClr val="15505E"/>
+                          </a:solidFill>
+                          <a:latin typeface="Calibri"/>
+                        </a:rPr>
+                        <a:t>-10,5 pp</a:t>
+                      </a:r>
+                    </a:p>
+                  </a:txBody>
+                  <a:tcPr marL="91440" marR="91440" marT="36576" marB="36576" anchor="ctr">
+                    <a:lnB w="25400" cap="flat" cmpd="sng" algn="ctr">
+                      <a:solidFill>
+                        <a:srgbClr val="15505E"/>
+                      </a:solidFill>
+                    </a:lnB>
+                    <a:lnT w="25400" cap="flat" cmpd="sng" algn="ctr">
+                      <a:solidFill>
+                        <a:srgbClr val="15505E"/>
+                      </a:solidFill>
+                    </a:lnT>
+                    <a:lnR w="25400" cap="flat" cmpd="sng" algn="ctr">
+                      <a:solidFill>
+                        <a:srgbClr val="15505E"/>
+                      </a:solidFill>
+                    </a:lnR>
+                    <a:lnL w="25400" cap="flat" cmpd="sng" algn="ctr">
+                      <a:solidFill>
+                        <a:srgbClr val="15505E"/>
+                      </a:solidFill>
+                    </a:lnL>
+                    <a:solidFill>
+                      <a:srgbClr val="F4EFE4"/>
+                    </a:solidFill>
+                  </a:tcPr>
+                </a:tc>
+              </a:tr>
+              <a:tr h="237744">
+                <a:tc>
+                  <a:txBody>
+                    <a:bodyPr wrap="square"/>
+                    <a:lstStyle/>
+                    <a:p>
+                      <a:pPr algn="ctr">
+                        <a:lnSpc>
+                          <a:spcPct val="102000"/>
+                        </a:lnSpc>
+                        <a:spcAft>
+                          <a:spcPts val="0"/>
+                        </a:spcAft>
+                      </a:pPr>
+                      <a:r>
+                        <a:rPr sz="850" b="0">
+                          <a:solidFill>
+                            <a:srgbClr val="15505E"/>
+                          </a:solidFill>
+                          <a:latin typeface="Calibri"/>
+                        </a:rPr>
+                        <a:t>9 (Liniers, Mataderos, Parque Avellaneda)</a:t>
+                      </a:r>
+                    </a:p>
+                  </a:txBody>
+                  <a:tcPr marL="91440" marR="91440" marT="36576" marB="36576" anchor="ctr">
+                    <a:lnB w="25400" cap="flat" cmpd="sng" algn="ctr">
+                      <a:solidFill>
+                        <a:srgbClr val="15505E"/>
+                      </a:solidFill>
+                    </a:lnB>
+                    <a:lnT w="25400" cap="flat" cmpd="sng" algn="ctr">
+                      <a:solidFill>
+                        <a:srgbClr val="15505E"/>
+                      </a:solidFill>
+                    </a:lnT>
+                    <a:lnR w="25400" cap="flat" cmpd="sng" algn="ctr">
+                      <a:solidFill>
+                        <a:srgbClr val="15505E"/>
+                      </a:solidFill>
+                    </a:lnR>
+                    <a:lnL w="25400" cap="flat" cmpd="sng" algn="ctr">
+                      <a:solidFill>
+                        <a:srgbClr val="15505E"/>
+                      </a:solidFill>
+                    </a:lnL>
+                    <a:solidFill>
+                      <a:srgbClr val="F4EFE4"/>
+                    </a:solidFill>
+                  </a:tcPr>
+                </a:tc>
+                <a:tc>
+                  <a:txBody>
+                    <a:bodyPr wrap="square"/>
+                    <a:lstStyle/>
+                    <a:p>
+                      <a:pPr algn="ctr">
+                        <a:lnSpc>
+                          <a:spcPct val="102000"/>
+                        </a:lnSpc>
+                        <a:spcAft>
+                          <a:spcPts val="0"/>
+                        </a:spcAft>
+                      </a:pPr>
+                      <a:r>
+                        <a:rPr sz="850" b="0">
+                          <a:solidFill>
+                            <a:srgbClr val="15505E"/>
+                          </a:solidFill>
+                          <a:latin typeface="Calibri"/>
+                        </a:rPr>
+                        <a:t>Sur</a:t>
+                      </a:r>
+                    </a:p>
+                  </a:txBody>
+                  <a:tcPr marL="91440" marR="91440" marT="36576" marB="36576" anchor="ctr">
+                    <a:lnB w="25400" cap="flat" cmpd="sng" algn="ctr">
+                      <a:solidFill>
+                        <a:srgbClr val="15505E"/>
+                      </a:solidFill>
+                    </a:lnB>
+                    <a:lnT w="25400" cap="flat" cmpd="sng" algn="ctr">
+                      <a:solidFill>
+                        <a:srgbClr val="15505E"/>
+                      </a:solidFill>
+                    </a:lnT>
+                    <a:lnR w="25400" cap="flat" cmpd="sng" algn="ctr">
+                      <a:solidFill>
+                        <a:srgbClr val="15505E"/>
+                      </a:solidFill>
+                    </a:lnR>
+                    <a:lnL w="25400" cap="flat" cmpd="sng" algn="ctr">
+                      <a:solidFill>
+                        <a:srgbClr val="15505E"/>
+                      </a:solidFill>
+                    </a:lnL>
+                    <a:solidFill>
+                      <a:srgbClr val="F4EFE4"/>
+                    </a:solidFill>
+                  </a:tcPr>
+                </a:tc>
+                <a:tc>
+                  <a:txBody>
+                    <a:bodyPr wrap="square"/>
+                    <a:lstStyle/>
+                    <a:p>
+                      <a:pPr algn="ctr">
+                        <a:lnSpc>
+                          <a:spcPct val="102000"/>
+                        </a:lnSpc>
+                        <a:spcAft>
+                          <a:spcPts val="0"/>
+                        </a:spcAft>
+                      </a:pPr>
+                      <a:r>
+                        <a:rPr sz="850" b="0">
+                          <a:solidFill>
+                            <a:srgbClr val="15505E"/>
+                          </a:solidFill>
+                          <a:latin typeface="Calibri"/>
+                        </a:rPr>
+                        <a:t>16.953 – $ 508.578</a:t>
+                      </a:r>
+                    </a:p>
+                  </a:txBody>
+                  <a:tcPr marL="91440" marR="91440" marT="36576" marB="36576" anchor="ctr">
+                    <a:lnB w="25400" cap="flat" cmpd="sng" algn="ctr">
+                      <a:solidFill>
+                        <a:srgbClr val="15505E"/>
+                      </a:solidFill>
+                    </a:lnB>
+                    <a:lnT w="25400" cap="flat" cmpd="sng" algn="ctr">
+                      <a:solidFill>
+                        <a:srgbClr val="15505E"/>
+                      </a:solidFill>
+                    </a:lnT>
+                    <a:lnR w="25400" cap="flat" cmpd="sng" algn="ctr">
+                      <a:solidFill>
+                        <a:srgbClr val="15505E"/>
+                      </a:solidFill>
+                    </a:lnR>
+                    <a:lnL w="25400" cap="flat" cmpd="sng" algn="ctr">
+                      <a:solidFill>
+                        <a:srgbClr val="15505E"/>
+                      </a:solidFill>
+                    </a:lnL>
+                    <a:solidFill>
+                      <a:srgbClr val="F4EFE4"/>
+                    </a:solidFill>
+                  </a:tcPr>
+                </a:tc>
+                <a:tc>
+                  <a:txBody>
+                    <a:bodyPr wrap="square"/>
+                    <a:lstStyle/>
+                    <a:p>
+                      <a:pPr algn="ctr">
+                        <a:lnSpc>
+                          <a:spcPct val="102000"/>
+                        </a:lnSpc>
+                        <a:spcAft>
+                          <a:spcPts val="0"/>
+                        </a:spcAft>
+                      </a:pPr>
+                      <a:r>
+                        <a:rPr sz="850" b="0">
+                          <a:solidFill>
+                            <a:srgbClr val="15505E"/>
+                          </a:solidFill>
+                          <a:latin typeface="Calibri"/>
+                        </a:rPr>
+                        <a:t>16.334 – $ 702.362</a:t>
+                      </a:r>
+                    </a:p>
+                  </a:txBody>
+                  <a:tcPr marL="91440" marR="91440" marT="36576" marB="36576" anchor="ctr">
+                    <a:lnB w="25400" cap="flat" cmpd="sng" algn="ctr">
+                      <a:solidFill>
+                        <a:srgbClr val="15505E"/>
+                      </a:solidFill>
+                    </a:lnB>
+                    <a:lnT w="25400" cap="flat" cmpd="sng" algn="ctr">
+                      <a:solidFill>
+                        <a:srgbClr val="15505E"/>
+                      </a:solidFill>
+                    </a:lnT>
+                    <a:lnR w="25400" cap="flat" cmpd="sng" algn="ctr">
+                      <a:solidFill>
+                        <a:srgbClr val="15505E"/>
+                      </a:solidFill>
+                    </a:lnR>
+                    <a:lnL w="25400" cap="flat" cmpd="sng" algn="ctr">
+                      <a:solidFill>
+                        <a:srgbClr val="15505E"/>
+                      </a:solidFill>
+                    </a:lnL>
+                    <a:solidFill>
+                      <a:srgbClr val="F4EFE4"/>
+                    </a:solidFill>
+                  </a:tcPr>
+                </a:tc>
+                <a:tc>
+                  <a:txBody>
+                    <a:bodyPr wrap="square"/>
+                    <a:lstStyle/>
+                    <a:p>
+                      <a:pPr algn="ctr">
+                        <a:lnSpc>
+                          <a:spcPct val="102000"/>
+                        </a:lnSpc>
+                        <a:spcAft>
+                          <a:spcPts val="0"/>
+                        </a:spcAft>
+                      </a:pPr>
+                      <a:r>
+                        <a:rPr sz="850" b="0">
+                          <a:solidFill>
+                            <a:srgbClr val="15505E"/>
+                          </a:solidFill>
+                          <a:latin typeface="Calibri"/>
+                        </a:rPr>
+                        <a:t>15.628 – $ 1.093.946</a:t>
+                      </a:r>
+                    </a:p>
+                  </a:txBody>
+                  <a:tcPr marL="91440" marR="91440" marT="36576" marB="36576" anchor="ctr">
+                    <a:lnB w="25400" cap="flat" cmpd="sng" algn="ctr">
+                      <a:solidFill>
+                        <a:srgbClr val="15505E"/>
+                      </a:solidFill>
+                    </a:lnB>
+                    <a:lnT w="25400" cap="flat" cmpd="sng" algn="ctr">
+                      <a:solidFill>
+                        <a:srgbClr val="15505E"/>
+                      </a:solidFill>
+                    </a:lnT>
+                    <a:lnR w="25400" cap="flat" cmpd="sng" algn="ctr">
+                      <a:solidFill>
+                        <a:srgbClr val="15505E"/>
+                      </a:solidFill>
+                    </a:lnR>
+                    <a:lnL w="25400" cap="flat" cmpd="sng" algn="ctr">
+                      <a:solidFill>
+                        <a:srgbClr val="15505E"/>
+                      </a:solidFill>
+                    </a:lnL>
+                    <a:solidFill>
+                      <a:srgbClr val="F4EFE4"/>
+                    </a:solidFill>
+                  </a:tcPr>
+                </a:tc>
+                <a:tc>
+                  <a:txBody>
+                    <a:bodyPr wrap="square"/>
+                    <a:lstStyle/>
+                    <a:p>
+                      <a:pPr algn="ctr">
+                        <a:lnSpc>
+                          <a:spcPct val="102000"/>
+                        </a:lnSpc>
+                        <a:spcAft>
+                          <a:spcPts val="0"/>
+                        </a:spcAft>
+                      </a:pPr>
+                      <a:r>
+                        <a:rPr sz="850" b="0">
+                          <a:solidFill>
+                            <a:srgbClr val="15505E"/>
+                          </a:solidFill>
+                          <a:latin typeface="Calibri"/>
+                        </a:rPr>
+                        <a:t>+8%</a:t>
+                      </a:r>
+                    </a:p>
+                  </a:txBody>
+                  <a:tcPr marL="91440" marR="91440" marT="36576" marB="36576" anchor="ctr">
+                    <a:lnB w="25400" cap="flat" cmpd="sng" algn="ctr">
+                      <a:solidFill>
+                        <a:srgbClr val="15505E"/>
+                      </a:solidFill>
+                    </a:lnB>
+                    <a:lnT w="25400" cap="flat" cmpd="sng" algn="ctr">
+                      <a:solidFill>
+                        <a:srgbClr val="15505E"/>
+                      </a:solidFill>
+                    </a:lnT>
+                    <a:lnR w="25400" cap="flat" cmpd="sng" algn="ctr">
+                      <a:solidFill>
+                        <a:srgbClr val="15505E"/>
+                      </a:solidFill>
+                    </a:lnR>
+                    <a:lnL w="25400" cap="flat" cmpd="sng" algn="ctr">
+                      <a:solidFill>
+                        <a:srgbClr val="15505E"/>
+                      </a:solidFill>
+                    </a:lnL>
+                    <a:solidFill>
+                      <a:srgbClr val="F4EFE4"/>
+                    </a:solidFill>
+                  </a:tcPr>
+                </a:tc>
+                <a:tc>
+                  <a:txBody>
+                    <a:bodyPr wrap="square"/>
+                    <a:lstStyle/>
+                    <a:p>
+                      <a:pPr algn="ctr">
+                        <a:lnSpc>
+                          <a:spcPct val="102000"/>
+                        </a:lnSpc>
+                        <a:spcAft>
+                          <a:spcPts val="0"/>
+                        </a:spcAft>
+                      </a:pPr>
+                      <a:r>
+                        <a:rPr sz="850" b="0">
+                          <a:solidFill>
+                            <a:srgbClr val="15505E"/>
+                          </a:solidFill>
+                          <a:latin typeface="Calibri"/>
+                        </a:rPr>
+                        <a:t>s/d</a:t>
+                      </a:r>
+                    </a:p>
+                  </a:txBody>
+                  <a:tcPr marL="91440" marR="91440" marT="36576" marB="36576" anchor="ctr">
+                    <a:lnB w="25400" cap="flat" cmpd="sng" algn="ctr">
+                      <a:solidFill>
+                        <a:srgbClr val="15505E"/>
+                      </a:solidFill>
+                    </a:lnB>
+                    <a:lnT w="25400" cap="flat" cmpd="sng" algn="ctr">
+                      <a:solidFill>
+                        <a:srgbClr val="15505E"/>
+                      </a:solidFill>
+                    </a:lnT>
+                    <a:lnR w="25400" cap="flat" cmpd="sng" algn="ctr">
+                      <a:solidFill>
+                        <a:srgbClr val="15505E"/>
+                      </a:solidFill>
+                    </a:lnR>
+                    <a:lnL w="25400" cap="flat" cmpd="sng" algn="ctr">
+                      <a:solidFill>
+                        <a:srgbClr val="15505E"/>
+                      </a:solidFill>
+                    </a:lnL>
+                    <a:solidFill>
+                      <a:srgbClr val="F4EFE4"/>
+                    </a:solidFill>
+                  </a:tcPr>
+                </a:tc>
+                <a:tc>
+                  <a:txBody>
+                    <a:bodyPr wrap="square"/>
+                    <a:lstStyle/>
+                    <a:p>
+                      <a:pPr algn="ctr">
+                        <a:lnSpc>
+                          <a:spcPct val="102000"/>
+                        </a:lnSpc>
+                        <a:spcAft>
+                          <a:spcPts val="0"/>
+                        </a:spcAft>
+                      </a:pPr>
+                      <a:r>
+                        <a:rPr sz="850" b="0">
+                          <a:solidFill>
+                            <a:srgbClr val="15505E"/>
+                          </a:solidFill>
+                          <a:latin typeface="Calibri"/>
+                        </a:rPr>
+                        <a:t>s/d</a:t>
+                      </a:r>
+                    </a:p>
+                  </a:txBody>
+                  <a:tcPr marL="91440" marR="91440" marT="36576" marB="36576" anchor="ctr">
+                    <a:lnB w="25400" cap="flat" cmpd="sng" algn="ctr">
+                      <a:solidFill>
+                        <a:srgbClr val="15505E"/>
+                      </a:solidFill>
+                    </a:lnB>
+                    <a:lnT w="25400" cap="flat" cmpd="sng" algn="ctr">
+                      <a:solidFill>
+                        <a:srgbClr val="15505E"/>
+                      </a:solidFill>
+                    </a:lnT>
+                    <a:lnR w="25400" cap="flat" cmpd="sng" algn="ctr">
+                      <a:solidFill>
+                        <a:srgbClr val="15505E"/>
+                      </a:solidFill>
+                    </a:lnR>
+                    <a:lnL w="25400" cap="flat" cmpd="sng" algn="ctr">
+                      <a:solidFill>
+                        <a:srgbClr val="15505E"/>
+                      </a:solidFill>
+                    </a:lnL>
+                    <a:solidFill>
+                      <a:srgbClr val="F4EFE4"/>
+                    </a:solidFill>
+                  </a:tcPr>
+                </a:tc>
+              </a:tr>
+              <a:tr h="237744">
+                <a:tc>
+                  <a:txBody>
+                    <a:bodyPr wrap="square"/>
+                    <a:lstStyle/>
+                    <a:p>
+                      <a:pPr algn="ctr">
+                        <a:lnSpc>
+                          <a:spcPct val="102000"/>
+                        </a:lnSpc>
+                        <a:spcAft>
+                          <a:spcPts val="0"/>
+                        </a:spcAft>
+                      </a:pPr>
+                      <a:r>
+                        <a:rPr sz="850" b="0">
+                          <a:solidFill>
+                            <a:srgbClr val="15505E"/>
+                          </a:solidFill>
+                          <a:latin typeface="Calibri"/>
+                        </a:rPr>
+                        <a:t>11 (Villa General Mitre, Villa Devoto, Villa del Parque, Villa Santa Rita)</a:t>
+                      </a:r>
+                    </a:p>
+                  </a:txBody>
+                  <a:tcPr marL="91440" marR="91440" marT="36576" marB="36576" anchor="ctr">
+                    <a:lnB w="25400" cap="flat" cmpd="sng" algn="ctr">
+                      <a:solidFill>
+                        <a:srgbClr val="15505E"/>
+                      </a:solidFill>
+                    </a:lnB>
+                    <a:lnT w="25400" cap="flat" cmpd="sng" algn="ctr">
+                      <a:solidFill>
+                        <a:srgbClr val="15505E"/>
+                      </a:solidFill>
+                    </a:lnT>
+                    <a:lnR w="25400" cap="flat" cmpd="sng" algn="ctr">
+                      <a:solidFill>
+                        <a:srgbClr val="15505E"/>
+                      </a:solidFill>
+                    </a:lnR>
+                    <a:lnL w="25400" cap="flat" cmpd="sng" algn="ctr">
+                      <a:solidFill>
+                        <a:srgbClr val="15505E"/>
+                      </a:solidFill>
+                    </a:lnL>
+                    <a:solidFill>
+                      <a:srgbClr val="F4EFE4"/>
+                    </a:solidFill>
+                  </a:tcPr>
+                </a:tc>
+                <a:tc>
+                  <a:txBody>
+                    <a:bodyPr wrap="square"/>
+                    <a:lstStyle/>
+                    <a:p>
+                      <a:pPr algn="ctr">
+                        <a:lnSpc>
+                          <a:spcPct val="102000"/>
+                        </a:lnSpc>
+                        <a:spcAft>
+                          <a:spcPts val="0"/>
+                        </a:spcAft>
+                      </a:pPr>
+                      <a:r>
+                        <a:rPr sz="850" b="0">
+                          <a:solidFill>
+                            <a:srgbClr val="15505E"/>
+                          </a:solidFill>
+                          <a:latin typeface="Calibri"/>
+                        </a:rPr>
+                        <a:t>Oeste</a:t>
+                      </a:r>
+                    </a:p>
+                  </a:txBody>
+                  <a:tcPr marL="91440" marR="91440" marT="36576" marB="36576" anchor="ctr">
+                    <a:lnB w="25400" cap="flat" cmpd="sng" algn="ctr">
+                      <a:solidFill>
+                        <a:srgbClr val="15505E"/>
+                      </a:solidFill>
+                    </a:lnB>
+                    <a:lnT w="25400" cap="flat" cmpd="sng" algn="ctr">
+                      <a:solidFill>
+                        <a:srgbClr val="15505E"/>
+                      </a:solidFill>
+                    </a:lnT>
+                    <a:lnR w="25400" cap="flat" cmpd="sng" algn="ctr">
+                      <a:solidFill>
+                        <a:srgbClr val="15505E"/>
+                      </a:solidFill>
+                    </a:lnR>
+                    <a:lnL w="25400" cap="flat" cmpd="sng" algn="ctr">
+                      <a:solidFill>
+                        <a:srgbClr val="15505E"/>
+                      </a:solidFill>
+                    </a:lnL>
+                    <a:solidFill>
+                      <a:srgbClr val="F4EFE4"/>
+                    </a:solidFill>
+                  </a:tcPr>
+                </a:tc>
+                <a:tc>
+                  <a:txBody>
+                    <a:bodyPr wrap="square"/>
+                    <a:lstStyle/>
+                    <a:p>
+                      <a:pPr algn="ctr">
+                        <a:lnSpc>
+                          <a:spcPct val="102000"/>
+                        </a:lnSpc>
+                        <a:spcAft>
+                          <a:spcPts val="0"/>
+                        </a:spcAft>
+                      </a:pPr>
+                      <a:r>
+                        <a:rPr sz="850" b="0">
+                          <a:solidFill>
+                            <a:srgbClr val="15505E"/>
+                          </a:solidFill>
+                          <a:latin typeface="Calibri"/>
+                        </a:rPr>
+                        <a:t>18.365 – $ 550.962</a:t>
+                      </a:r>
+                    </a:p>
+                  </a:txBody>
+                  <a:tcPr marL="91440" marR="91440" marT="36576" marB="36576" anchor="ctr">
+                    <a:lnB w="25400" cap="flat" cmpd="sng" algn="ctr">
+                      <a:solidFill>
+                        <a:srgbClr val="15505E"/>
+                      </a:solidFill>
+                    </a:lnB>
+                    <a:lnT w="25400" cap="flat" cmpd="sng" algn="ctr">
+                      <a:solidFill>
+                        <a:srgbClr val="15505E"/>
+                      </a:solidFill>
+                    </a:lnT>
+                    <a:lnR w="25400" cap="flat" cmpd="sng" algn="ctr">
+                      <a:solidFill>
+                        <a:srgbClr val="15505E"/>
+                      </a:solidFill>
+                    </a:lnR>
+                    <a:lnL w="25400" cap="flat" cmpd="sng" algn="ctr">
+                      <a:solidFill>
+                        <a:srgbClr val="15505E"/>
+                      </a:solidFill>
+                    </a:lnL>
+                    <a:solidFill>
+                      <a:srgbClr val="F4EFE4"/>
+                    </a:solidFill>
+                  </a:tcPr>
+                </a:tc>
+                <a:tc>
+                  <a:txBody>
+                    <a:bodyPr wrap="square"/>
+                    <a:lstStyle/>
+                    <a:p>
+                      <a:pPr algn="ctr">
+                        <a:lnSpc>
+                          <a:spcPct val="102000"/>
+                        </a:lnSpc>
+                        <a:spcAft>
+                          <a:spcPts val="0"/>
+                        </a:spcAft>
+                      </a:pPr>
+                      <a:r>
+                        <a:rPr sz="850" b="0">
+                          <a:solidFill>
+                            <a:srgbClr val="15505E"/>
+                          </a:solidFill>
+                          <a:latin typeface="Calibri"/>
+                        </a:rPr>
+                        <a:t>17.031 – $ 732.346</a:t>
+                      </a:r>
+                    </a:p>
+                  </a:txBody>
+                  <a:tcPr marL="91440" marR="91440" marT="36576" marB="36576" anchor="ctr">
+                    <a:lnB w="25400" cap="flat" cmpd="sng" algn="ctr">
+                      <a:solidFill>
+                        <a:srgbClr val="15505E"/>
+                      </a:solidFill>
+                    </a:lnB>
+                    <a:lnT w="25400" cap="flat" cmpd="sng" algn="ctr">
+                      <a:solidFill>
+                        <a:srgbClr val="15505E"/>
+                      </a:solidFill>
+                    </a:lnT>
+                    <a:lnR w="25400" cap="flat" cmpd="sng" algn="ctr">
+                      <a:solidFill>
+                        <a:srgbClr val="15505E"/>
+                      </a:solidFill>
+                    </a:lnR>
+                    <a:lnL w="25400" cap="flat" cmpd="sng" algn="ctr">
+                      <a:solidFill>
+                        <a:srgbClr val="15505E"/>
+                      </a:solidFill>
+                    </a:lnL>
+                    <a:solidFill>
+                      <a:srgbClr val="F4EFE4"/>
+                    </a:solidFill>
+                  </a:tcPr>
+                </a:tc>
+                <a:tc>
+                  <a:txBody>
+                    <a:bodyPr wrap="square"/>
+                    <a:lstStyle/>
+                    <a:p>
+                      <a:pPr algn="ctr">
+                        <a:lnSpc>
+                          <a:spcPct val="102000"/>
+                        </a:lnSpc>
+                        <a:spcAft>
+                          <a:spcPts val="0"/>
+                        </a:spcAft>
+                      </a:pPr>
+                      <a:r>
+                        <a:rPr sz="850" b="0">
+                          <a:solidFill>
+                            <a:srgbClr val="15505E"/>
+                          </a:solidFill>
+                          <a:latin typeface="Calibri"/>
+                        </a:rPr>
+                        <a:t>17.368 – $ 1.215.781</a:t>
+                      </a:r>
+                    </a:p>
+                  </a:txBody>
+                  <a:tcPr marL="91440" marR="91440" marT="36576" marB="36576" anchor="ctr">
+                    <a:lnB w="25400" cap="flat" cmpd="sng" algn="ctr">
+                      <a:solidFill>
+                        <a:srgbClr val="15505E"/>
+                      </a:solidFill>
+                    </a:lnB>
+                    <a:lnT w="25400" cap="flat" cmpd="sng" algn="ctr">
+                      <a:solidFill>
+                        <a:srgbClr val="15505E"/>
+                      </a:solidFill>
+                    </a:lnT>
+                    <a:lnR w="25400" cap="flat" cmpd="sng" algn="ctr">
+                      <a:solidFill>
+                        <a:srgbClr val="15505E"/>
+                      </a:solidFill>
+                    </a:lnR>
+                    <a:lnL w="25400" cap="flat" cmpd="sng" algn="ctr">
+                      <a:solidFill>
+                        <a:srgbClr val="15505E"/>
+                      </a:solidFill>
+                    </a:lnL>
+                    <a:solidFill>
+                      <a:srgbClr val="F4EFE4"/>
+                    </a:solidFill>
+                  </a:tcPr>
+                </a:tc>
+                <a:tc>
+                  <a:txBody>
+                    <a:bodyPr wrap="square"/>
+                    <a:lstStyle/>
+                    <a:p>
+                      <a:pPr algn="ctr">
+                        <a:lnSpc>
+                          <a:spcPct val="102000"/>
+                        </a:lnSpc>
+                        <a:spcAft>
+                          <a:spcPts val="0"/>
+                        </a:spcAft>
+                      </a:pPr>
+                      <a:r>
+                        <a:rPr sz="850" b="0">
+                          <a:solidFill>
+                            <a:srgbClr val="15505E"/>
+                          </a:solidFill>
+                          <a:latin typeface="Calibri"/>
+                        </a:rPr>
+                        <a:t>+6%</a:t>
+                      </a:r>
+                    </a:p>
+                  </a:txBody>
+                  <a:tcPr marL="91440" marR="91440" marT="36576" marB="36576" anchor="ctr">
+                    <a:lnB w="25400" cap="flat" cmpd="sng" algn="ctr">
+                      <a:solidFill>
+                        <a:srgbClr val="15505E"/>
+                      </a:solidFill>
+                    </a:lnB>
+                    <a:lnT w="25400" cap="flat" cmpd="sng" algn="ctr">
+                      <a:solidFill>
+                        <a:srgbClr val="15505E"/>
+                      </a:solidFill>
+                    </a:lnT>
+                    <a:lnR w="25400" cap="flat" cmpd="sng" algn="ctr">
+                      <a:solidFill>
+                        <a:srgbClr val="15505E"/>
+                      </a:solidFill>
+                    </a:lnR>
+                    <a:lnL w="25400" cap="flat" cmpd="sng" algn="ctr">
+                      <a:solidFill>
+                        <a:srgbClr val="15505E"/>
+                      </a:solidFill>
+                    </a:lnL>
+                    <a:solidFill>
+                      <a:srgbClr val="F4EFE4"/>
+                    </a:solidFill>
+                  </a:tcPr>
+                </a:tc>
+                <a:tc>
+                  <a:txBody>
+                    <a:bodyPr wrap="square"/>
+                    <a:lstStyle/>
+                    <a:p>
+                      <a:pPr algn="ctr">
+                        <a:lnSpc>
+                          <a:spcPct val="102000"/>
+                        </a:lnSpc>
+                        <a:spcAft>
+                          <a:spcPts val="0"/>
+                        </a:spcAft>
+                      </a:pPr>
+                      <a:r>
+                        <a:rPr sz="850" b="0">
+                          <a:solidFill>
+                            <a:srgbClr val="15505E"/>
+                          </a:solidFill>
+                          <a:latin typeface="Calibri"/>
+                        </a:rPr>
+                        <a:t>+11%</a:t>
+                      </a:r>
+                    </a:p>
+                  </a:txBody>
+                  <a:tcPr marL="91440" marR="91440" marT="36576" marB="36576" anchor="ctr">
+                    <a:lnB w="25400" cap="flat" cmpd="sng" algn="ctr">
+                      <a:solidFill>
+                        <a:srgbClr val="15505E"/>
+                      </a:solidFill>
+                    </a:lnB>
+                    <a:lnT w="25400" cap="flat" cmpd="sng" algn="ctr">
+                      <a:solidFill>
+                        <a:srgbClr val="15505E"/>
+                      </a:solidFill>
+                    </a:lnT>
+                    <a:lnR w="25400" cap="flat" cmpd="sng" algn="ctr">
+                      <a:solidFill>
+                        <a:srgbClr val="15505E"/>
+                      </a:solidFill>
+                    </a:lnR>
+                    <a:lnL w="25400" cap="flat" cmpd="sng" algn="ctr">
+                      <a:solidFill>
+                        <a:srgbClr val="15505E"/>
+                      </a:solidFill>
+                    </a:lnL>
+                    <a:solidFill>
+                      <a:srgbClr val="F4EFE4"/>
+                    </a:solidFill>
+                  </a:tcPr>
+                </a:tc>
+                <a:tc>
+                  <a:txBody>
+                    <a:bodyPr wrap="square"/>
+                    <a:lstStyle/>
+                    <a:p>
+                      <a:pPr algn="ctr">
+                        <a:lnSpc>
+                          <a:spcPct val="102000"/>
+                        </a:lnSpc>
+                        <a:spcAft>
+                          <a:spcPts val="0"/>
+                        </a:spcAft>
+                      </a:pPr>
+                      <a:r>
+                        <a:rPr sz="850" b="0">
+                          <a:solidFill>
+                            <a:srgbClr val="15505E"/>
+                          </a:solidFill>
+                          <a:latin typeface="Calibri"/>
+                        </a:rPr>
+                        <a:t>-5,1 pp</a:t>
+                      </a:r>
+                    </a:p>
+                  </a:txBody>
+                  <a:tcPr marL="91440" marR="91440" marT="36576" marB="36576" anchor="ctr">
+                    <a:lnB w="25400" cap="flat" cmpd="sng" algn="ctr">
+                      <a:solidFill>
+                        <a:srgbClr val="15505E"/>
+                      </a:solidFill>
+                    </a:lnB>
+                    <a:lnT w="25400" cap="flat" cmpd="sng" algn="ctr">
+                      <a:solidFill>
+                        <a:srgbClr val="15505E"/>
+                      </a:solidFill>
+                    </a:lnT>
+                    <a:lnR w="25400" cap="flat" cmpd="sng" algn="ctr">
+                      <a:solidFill>
+                        <a:srgbClr val="15505E"/>
+                      </a:solidFill>
+                    </a:lnR>
+                    <a:lnL w="25400" cap="flat" cmpd="sng" algn="ctr">
+                      <a:solidFill>
+                        <a:srgbClr val="15505E"/>
+                      </a:solidFill>
+                    </a:lnL>
+                    <a:solidFill>
+                      <a:srgbClr val="F4EFE4"/>
+                    </a:solidFill>
+                  </a:tcPr>
+                </a:tc>
+              </a:tr>
+              <a:tr h="237744">
+                <a:tc>
+                  <a:txBody>
+                    <a:bodyPr wrap="square"/>
+                    <a:lstStyle/>
+                    <a:p>
+                      <a:pPr algn="ctr">
+                        <a:lnSpc>
+                          <a:spcPct val="102000"/>
+                        </a:lnSpc>
+                        <a:spcAft>
+                          <a:spcPts val="0"/>
+                        </a:spcAft>
+                      </a:pPr>
+                      <a:r>
+                        <a:rPr sz="850" b="0">
+                          <a:solidFill>
+                            <a:srgbClr val="15505E"/>
+                          </a:solidFill>
+                          <a:latin typeface="Calibri"/>
+                        </a:rPr>
+                        <a:t>12 (Coghlan, Saavedra, Villa Urquiza, Villa Pueyrredón)</a:t>
+                      </a:r>
+                    </a:p>
+                  </a:txBody>
+                  <a:tcPr marL="91440" marR="91440" marT="36576" marB="36576" anchor="ctr">
+                    <a:lnB w="25400" cap="flat" cmpd="sng" algn="ctr">
+                      <a:solidFill>
+                        <a:srgbClr val="15505E"/>
+                      </a:solidFill>
+                    </a:lnB>
+                    <a:lnT w="25400" cap="flat" cmpd="sng" algn="ctr">
+                      <a:solidFill>
+                        <a:srgbClr val="15505E"/>
+                      </a:solidFill>
+                    </a:lnT>
+                    <a:lnR w="25400" cap="flat" cmpd="sng" algn="ctr">
+                      <a:solidFill>
+                        <a:srgbClr val="15505E"/>
+                      </a:solidFill>
+                    </a:lnR>
+                    <a:lnL w="25400" cap="flat" cmpd="sng" algn="ctr">
+                      <a:solidFill>
+                        <a:srgbClr val="15505E"/>
+                      </a:solidFill>
+                    </a:lnL>
+                    <a:solidFill>
+                      <a:srgbClr val="F4EFE4"/>
+                    </a:solidFill>
+                  </a:tcPr>
+                </a:tc>
+                <a:tc>
+                  <a:txBody>
+                    <a:bodyPr wrap="square"/>
+                    <a:lstStyle/>
+                    <a:p>
+                      <a:pPr algn="ctr">
+                        <a:lnSpc>
+                          <a:spcPct val="102000"/>
+                        </a:lnSpc>
+                        <a:spcAft>
+                          <a:spcPts val="0"/>
+                        </a:spcAft>
+                      </a:pPr>
+                      <a:r>
+                        <a:rPr sz="850" b="0">
+                          <a:solidFill>
+                            <a:srgbClr val="15505E"/>
+                          </a:solidFill>
+                          <a:latin typeface="Calibri"/>
+                        </a:rPr>
+                        <a:t>Oeste</a:t>
+                      </a:r>
+                    </a:p>
+                  </a:txBody>
+                  <a:tcPr marL="91440" marR="91440" marT="36576" marB="36576" anchor="ctr">
+                    <a:lnB w="25400" cap="flat" cmpd="sng" algn="ctr">
+                      <a:solidFill>
+                        <a:srgbClr val="15505E"/>
+                      </a:solidFill>
+                    </a:lnB>
+                    <a:lnT w="25400" cap="flat" cmpd="sng" algn="ctr">
+                      <a:solidFill>
+                        <a:srgbClr val="15505E"/>
+                      </a:solidFill>
+                    </a:lnT>
+                    <a:lnR w="25400" cap="flat" cmpd="sng" algn="ctr">
+                      <a:solidFill>
+                        <a:srgbClr val="15505E"/>
+                      </a:solidFill>
+                    </a:lnR>
+                    <a:lnL w="25400" cap="flat" cmpd="sng" algn="ctr">
+                      <a:solidFill>
+                        <a:srgbClr val="15505E"/>
+                      </a:solidFill>
+                    </a:lnL>
+                    <a:solidFill>
+                      <a:srgbClr val="F4EFE4"/>
+                    </a:solidFill>
+                  </a:tcPr>
+                </a:tc>
+                <a:tc>
+                  <a:txBody>
+                    <a:bodyPr wrap="square"/>
+                    <a:lstStyle/>
+                    <a:p>
+                      <a:pPr algn="ctr">
+                        <a:lnSpc>
+                          <a:spcPct val="102000"/>
+                        </a:lnSpc>
+                        <a:spcAft>
+                          <a:spcPts val="0"/>
+                        </a:spcAft>
+                      </a:pPr>
+                      <a:r>
+                        <a:rPr sz="850" b="0">
+                          <a:solidFill>
+                            <a:srgbClr val="15505E"/>
+                          </a:solidFill>
+                          <a:latin typeface="Calibri"/>
+                        </a:rPr>
+                        <a:t>19.130 – $ 573.900</a:t>
+                      </a:r>
+                    </a:p>
+                  </a:txBody>
+                  <a:tcPr marL="91440" marR="91440" marT="36576" marB="36576" anchor="ctr">
+                    <a:lnB w="25400" cap="flat" cmpd="sng" algn="ctr">
+                      <a:solidFill>
+                        <a:srgbClr val="15505E"/>
+                      </a:solidFill>
+                    </a:lnB>
+                    <a:lnT w="25400" cap="flat" cmpd="sng" algn="ctr">
+                      <a:solidFill>
+                        <a:srgbClr val="15505E"/>
+                      </a:solidFill>
+                    </a:lnT>
+                    <a:lnR w="25400" cap="flat" cmpd="sng" algn="ctr">
+                      <a:solidFill>
+                        <a:srgbClr val="15505E"/>
+                      </a:solidFill>
+                    </a:lnR>
+                    <a:lnL w="25400" cap="flat" cmpd="sng" algn="ctr">
+                      <a:solidFill>
+                        <a:srgbClr val="15505E"/>
+                      </a:solidFill>
+                    </a:lnL>
+                    <a:solidFill>
+                      <a:srgbClr val="F4EFE4"/>
+                    </a:solidFill>
+                  </a:tcPr>
+                </a:tc>
+                <a:tc>
+                  <a:txBody>
+                    <a:bodyPr wrap="square"/>
+                    <a:lstStyle/>
+                    <a:p>
+                      <a:pPr algn="ctr">
+                        <a:lnSpc>
+                          <a:spcPct val="102000"/>
+                        </a:lnSpc>
+                        <a:spcAft>
+                          <a:spcPts val="0"/>
+                        </a:spcAft>
+                      </a:pPr>
+                      <a:r>
+                        <a:rPr sz="850" b="0">
+                          <a:solidFill>
+                            <a:srgbClr val="15505E"/>
+                          </a:solidFill>
+                          <a:latin typeface="Calibri"/>
+                        </a:rPr>
+                        <a:t>19.116 – $ 821.971</a:t>
+                      </a:r>
+                    </a:p>
+                  </a:txBody>
+                  <a:tcPr marL="91440" marR="91440" marT="36576" marB="36576" anchor="ctr">
+                    <a:lnB w="25400" cap="flat" cmpd="sng" algn="ctr">
+                      <a:solidFill>
+                        <a:srgbClr val="15505E"/>
+                      </a:solidFill>
+                    </a:lnB>
+                    <a:lnT w="25400" cap="flat" cmpd="sng" algn="ctr">
+                      <a:solidFill>
+                        <a:srgbClr val="15505E"/>
+                      </a:solidFill>
+                    </a:lnT>
+                    <a:lnR w="25400" cap="flat" cmpd="sng" algn="ctr">
+                      <a:solidFill>
+                        <a:srgbClr val="15505E"/>
+                      </a:solidFill>
+                    </a:lnR>
+                    <a:lnL w="25400" cap="flat" cmpd="sng" algn="ctr">
+                      <a:solidFill>
+                        <a:srgbClr val="15505E"/>
+                      </a:solidFill>
+                    </a:lnL>
+                    <a:solidFill>
+                      <a:srgbClr val="F4EFE4"/>
+                    </a:solidFill>
+                  </a:tcPr>
+                </a:tc>
+                <a:tc>
+                  <a:txBody>
+                    <a:bodyPr wrap="square"/>
+                    <a:lstStyle/>
+                    <a:p>
+                      <a:pPr algn="ctr">
+                        <a:lnSpc>
+                          <a:spcPct val="102000"/>
+                        </a:lnSpc>
+                        <a:spcAft>
+                          <a:spcPts val="0"/>
+                        </a:spcAft>
+                      </a:pPr>
+                      <a:r>
+                        <a:rPr sz="850" b="0">
+                          <a:solidFill>
+                            <a:srgbClr val="15505E"/>
+                          </a:solidFill>
+                          <a:latin typeface="Calibri"/>
+                        </a:rPr>
+                        <a:t>19.098 – $ 1.336.860</a:t>
+                      </a:r>
+                    </a:p>
+                  </a:txBody>
+                  <a:tcPr marL="91440" marR="91440" marT="36576" marB="36576" anchor="ctr">
+                    <a:lnB w="25400" cap="flat" cmpd="sng" algn="ctr">
+                      <a:solidFill>
+                        <a:srgbClr val="15505E"/>
+                      </a:solidFill>
+                    </a:lnB>
+                    <a:lnT w="25400" cap="flat" cmpd="sng" algn="ctr">
+                      <a:solidFill>
+                        <a:srgbClr val="15505E"/>
+                      </a:solidFill>
+                    </a:lnT>
+                    <a:lnR w="25400" cap="flat" cmpd="sng" algn="ctr">
+                      <a:solidFill>
+                        <a:srgbClr val="15505E"/>
+                      </a:solidFill>
+                    </a:lnR>
+                    <a:lnL w="25400" cap="flat" cmpd="sng" algn="ctr">
+                      <a:solidFill>
+                        <a:srgbClr val="15505E"/>
+                      </a:solidFill>
+                    </a:lnL>
+                    <a:solidFill>
+                      <a:srgbClr val="F4EFE4"/>
+                    </a:solidFill>
+                  </a:tcPr>
+                </a:tc>
+                <a:tc>
+                  <a:txBody>
+                    <a:bodyPr wrap="square"/>
+                    <a:lstStyle/>
+                    <a:p>
+                      <a:pPr algn="ctr">
+                        <a:lnSpc>
+                          <a:spcPct val="102000"/>
+                        </a:lnSpc>
+                        <a:spcAft>
+                          <a:spcPts val="0"/>
+                        </a:spcAft>
+                      </a:pPr>
+                      <a:r>
+                        <a:rPr sz="850" b="0">
+                          <a:solidFill>
+                            <a:srgbClr val="15505E"/>
+                          </a:solidFill>
+                          <a:latin typeface="Calibri"/>
+                        </a:rPr>
+                        <a:t>+0%</a:t>
+                      </a:r>
+                    </a:p>
+                  </a:txBody>
+                  <a:tcPr marL="91440" marR="91440" marT="36576" marB="36576" anchor="ctr">
+                    <a:lnB w="25400" cap="flat" cmpd="sng" algn="ctr">
+                      <a:solidFill>
+                        <a:srgbClr val="15505E"/>
+                      </a:solidFill>
+                    </a:lnB>
+                    <a:lnT w="25400" cap="flat" cmpd="sng" algn="ctr">
+                      <a:solidFill>
+                        <a:srgbClr val="15505E"/>
+                      </a:solidFill>
+                    </a:lnT>
+                    <a:lnR w="25400" cap="flat" cmpd="sng" algn="ctr">
+                      <a:solidFill>
+                        <a:srgbClr val="15505E"/>
+                      </a:solidFill>
+                    </a:lnR>
+                    <a:lnL w="25400" cap="flat" cmpd="sng" algn="ctr">
+                      <a:solidFill>
+                        <a:srgbClr val="15505E"/>
+                      </a:solidFill>
+                    </a:lnL>
+                    <a:solidFill>
+                      <a:srgbClr val="F4EFE4"/>
+                    </a:solidFill>
+                  </a:tcPr>
+                </a:tc>
+                <a:tc>
+                  <a:txBody>
+                    <a:bodyPr wrap="square"/>
+                    <a:lstStyle/>
+                    <a:p>
+                      <a:pPr algn="ctr">
+                        <a:lnSpc>
+                          <a:spcPct val="102000"/>
+                        </a:lnSpc>
+                        <a:spcAft>
+                          <a:spcPts val="0"/>
+                        </a:spcAft>
+                      </a:pPr>
+                      <a:r>
+                        <a:rPr sz="850" b="0">
+                          <a:solidFill>
+                            <a:srgbClr val="15505E"/>
+                          </a:solidFill>
+                          <a:latin typeface="Calibri"/>
+                        </a:rPr>
+                        <a:t>+4%</a:t>
+                      </a:r>
+                    </a:p>
+                  </a:txBody>
+                  <a:tcPr marL="91440" marR="91440" marT="36576" marB="36576" anchor="ctr">
+                    <a:lnB w="25400" cap="flat" cmpd="sng" algn="ctr">
+                      <a:solidFill>
+                        <a:srgbClr val="15505E"/>
+                      </a:solidFill>
+                    </a:lnB>
+                    <a:lnT w="25400" cap="flat" cmpd="sng" algn="ctr">
+                      <a:solidFill>
+                        <a:srgbClr val="15505E"/>
+                      </a:solidFill>
+                    </a:lnT>
+                    <a:lnR w="25400" cap="flat" cmpd="sng" algn="ctr">
+                      <a:solidFill>
+                        <a:srgbClr val="15505E"/>
+                      </a:solidFill>
+                    </a:lnR>
+                    <a:lnL w="25400" cap="flat" cmpd="sng" algn="ctr">
+                      <a:solidFill>
+                        <a:srgbClr val="15505E"/>
+                      </a:solidFill>
+                    </a:lnL>
+                    <a:solidFill>
+                      <a:srgbClr val="F4EFE4"/>
+                    </a:solidFill>
+                  </a:tcPr>
+                </a:tc>
+                <a:tc>
+                  <a:txBody>
+                    <a:bodyPr wrap="square"/>
+                    <a:lstStyle/>
+                    <a:p>
+                      <a:pPr algn="ctr">
+                        <a:lnSpc>
+                          <a:spcPct val="102000"/>
+                        </a:lnSpc>
+                        <a:spcAft>
+                          <a:spcPts val="0"/>
+                        </a:spcAft>
+                      </a:pPr>
+                      <a:r>
+                        <a:rPr sz="850" b="0">
+                          <a:solidFill>
+                            <a:srgbClr val="15505E"/>
+                          </a:solidFill>
+                          <a:latin typeface="Calibri"/>
+                        </a:rPr>
+                        <a:t>-3,5 pp</a:t>
+                      </a:r>
+                    </a:p>
+                  </a:txBody>
+                  <a:tcPr marL="91440" marR="91440" marT="36576" marB="36576" anchor="ctr">
+                    <a:lnB w="25400" cap="flat" cmpd="sng" algn="ctr">
+                      <a:solidFill>
+                        <a:srgbClr val="15505E"/>
+                      </a:solidFill>
+                    </a:lnB>
+                    <a:lnT w="25400" cap="flat" cmpd="sng" algn="ctr">
+                      <a:solidFill>
+                        <a:srgbClr val="15505E"/>
+                      </a:solidFill>
+                    </a:lnT>
+                    <a:lnR w="25400" cap="flat" cmpd="sng" algn="ctr">
+                      <a:solidFill>
+                        <a:srgbClr val="15505E"/>
+                      </a:solidFill>
+                    </a:lnR>
+                    <a:lnL w="25400" cap="flat" cmpd="sng" algn="ctr">
+                      <a:solidFill>
+                        <a:srgbClr val="15505E"/>
+                      </a:solidFill>
+                    </a:lnL>
+                    <a:solidFill>
+                      <a:srgbClr val="F4EFE4"/>
+                    </a:solidFill>
+                  </a:tcPr>
+                </a:tc>
+              </a:tr>
+              <a:tr h="237744">
+                <a:tc>
+                  <a:txBody>
+                    <a:bodyPr wrap="square"/>
+                    <a:lstStyle/>
+                    <a:p>
+                      <a:pPr algn="ctr">
+                        <a:lnSpc>
+                          <a:spcPct val="102000"/>
+                        </a:lnSpc>
+                        <a:spcAft>
+                          <a:spcPts val="0"/>
+                        </a:spcAft>
+                      </a:pPr>
+                      <a:r>
+                        <a:rPr sz="850" b="0">
+                          <a:solidFill>
+                            <a:srgbClr val="15505E"/>
+                          </a:solidFill>
+                          <a:latin typeface="Calibri"/>
+                        </a:rPr>
+                        <a:t>8 (Villa Soldati, Villa Riachuelo, Villa Lugano)</a:t>
+                      </a:r>
+                    </a:p>
+                  </a:txBody>
+                  <a:tcPr marL="91440" marR="91440" marT="36576" marB="36576" anchor="ctr">
+                    <a:lnB w="25400" cap="flat" cmpd="sng" algn="ctr">
+                      <a:solidFill>
+                        <a:srgbClr val="15505E"/>
+                      </a:solidFill>
+                    </a:lnB>
+                    <a:lnT w="25400" cap="flat" cmpd="sng" algn="ctr">
+                      <a:solidFill>
+                        <a:srgbClr val="15505E"/>
+                      </a:solidFill>
+                    </a:lnT>
+                    <a:lnR w="25400" cap="flat" cmpd="sng" algn="ctr">
+                      <a:solidFill>
+                        <a:srgbClr val="15505E"/>
+                      </a:solidFill>
+                    </a:lnR>
+                    <a:lnL w="25400" cap="flat" cmpd="sng" algn="ctr">
+                      <a:solidFill>
+                        <a:srgbClr val="15505E"/>
+                      </a:solidFill>
+                    </a:lnL>
+                    <a:solidFill>
+                      <a:srgbClr val="F4EFE4"/>
+                    </a:solidFill>
+                  </a:tcPr>
+                </a:tc>
+                <a:tc>
+                  <a:txBody>
+                    <a:bodyPr wrap="square"/>
+                    <a:lstStyle/>
+                    <a:p>
+                      <a:pPr algn="ctr">
+                        <a:lnSpc>
+                          <a:spcPct val="102000"/>
+                        </a:lnSpc>
+                        <a:spcAft>
+                          <a:spcPts val="0"/>
+                        </a:spcAft>
+                      </a:pPr>
+                      <a:r>
+                        <a:rPr sz="850" b="0">
+                          <a:solidFill>
+                            <a:srgbClr val="15505E"/>
+                          </a:solidFill>
+                          <a:latin typeface="Calibri"/>
+                        </a:rPr>
+                        <a:t>Sur</a:t>
+                      </a:r>
+                    </a:p>
+                  </a:txBody>
+                  <a:tcPr marL="91440" marR="91440" marT="36576" marB="36576" anchor="ctr">
+                    <a:lnB w="25400" cap="flat" cmpd="sng" algn="ctr">
+                      <a:solidFill>
+                        <a:srgbClr val="15505E"/>
+                      </a:solidFill>
+                    </a:lnB>
+                    <a:lnT w="25400" cap="flat" cmpd="sng" algn="ctr">
+                      <a:solidFill>
+                        <a:srgbClr val="15505E"/>
+                      </a:solidFill>
+                    </a:lnT>
+                    <a:lnR w="25400" cap="flat" cmpd="sng" algn="ctr">
+                      <a:solidFill>
+                        <a:srgbClr val="15505E"/>
+                      </a:solidFill>
+                    </a:lnR>
+                    <a:lnL w="25400" cap="flat" cmpd="sng" algn="ctr">
+                      <a:solidFill>
+                        <a:srgbClr val="15505E"/>
+                      </a:solidFill>
+                    </a:lnL>
+                    <a:solidFill>
+                      <a:srgbClr val="F4EFE4"/>
+                    </a:solidFill>
+                  </a:tcPr>
+                </a:tc>
+                <a:tc>
+                  <a:txBody>
+                    <a:bodyPr wrap="square"/>
+                    <a:lstStyle/>
+                    <a:p>
+                      <a:pPr algn="ctr">
+                        <a:lnSpc>
+                          <a:spcPct val="102000"/>
+                        </a:lnSpc>
+                        <a:spcAft>
+                          <a:spcPts val="0"/>
+                        </a:spcAft>
+                      </a:pPr>
+                      <a:r>
+                        <a:rPr sz="850" b="0">
+                          <a:solidFill>
+                            <a:srgbClr val="15505E"/>
+                          </a:solidFill>
+                          <a:latin typeface="Calibri"/>
+                        </a:rPr>
+                        <a:t>s/d</a:t>
+                      </a:r>
+                    </a:p>
+                  </a:txBody>
+                  <a:tcPr marL="91440" marR="91440" marT="36576" marB="36576" anchor="ctr">
+                    <a:lnB w="25400" cap="flat" cmpd="sng" algn="ctr">
+                      <a:solidFill>
+                        <a:srgbClr val="15505E"/>
+                      </a:solidFill>
+                    </a:lnB>
+                    <a:lnT w="25400" cap="flat" cmpd="sng" algn="ctr">
+                      <a:solidFill>
+                        <a:srgbClr val="15505E"/>
+                      </a:solidFill>
+                    </a:lnT>
+                    <a:lnR w="25400" cap="flat" cmpd="sng" algn="ctr">
+                      <a:solidFill>
+                        <a:srgbClr val="15505E"/>
+                      </a:solidFill>
+                    </a:lnR>
+                    <a:lnL w="25400" cap="flat" cmpd="sng" algn="ctr">
+                      <a:solidFill>
+                        <a:srgbClr val="15505E"/>
+                      </a:solidFill>
+                    </a:lnL>
+                    <a:solidFill>
+                      <a:srgbClr val="F4EFE4"/>
+                    </a:solidFill>
+                  </a:tcPr>
+                </a:tc>
+                <a:tc>
+                  <a:txBody>
+                    <a:bodyPr wrap="square"/>
+                    <a:lstStyle/>
+                    <a:p>
+                      <a:pPr algn="ctr">
+                        <a:lnSpc>
+                          <a:spcPct val="102000"/>
+                        </a:lnSpc>
+                        <a:spcAft>
+                          <a:spcPts val="0"/>
+                        </a:spcAft>
+                      </a:pPr>
+                      <a:r>
+                        <a:rPr sz="850" b="0">
+                          <a:solidFill>
+                            <a:srgbClr val="15505E"/>
+                          </a:solidFill>
+                          <a:latin typeface="Calibri"/>
+                        </a:rPr>
+                        <a:t>s/d</a:t>
+                      </a:r>
+                    </a:p>
+                  </a:txBody>
+                  <a:tcPr marL="91440" marR="91440" marT="36576" marB="36576" anchor="ctr">
+                    <a:lnB w="25400" cap="flat" cmpd="sng" algn="ctr">
+                      <a:solidFill>
+                        <a:srgbClr val="15505E"/>
+                      </a:solidFill>
+                    </a:lnB>
+                    <a:lnT w="25400" cap="flat" cmpd="sng" algn="ctr">
+                      <a:solidFill>
+                        <a:srgbClr val="15505E"/>
+                      </a:solidFill>
+                    </a:lnT>
+                    <a:lnR w="25400" cap="flat" cmpd="sng" algn="ctr">
+                      <a:solidFill>
+                        <a:srgbClr val="15505E"/>
+                      </a:solidFill>
+                    </a:lnR>
+                    <a:lnL w="25400" cap="flat" cmpd="sng" algn="ctr">
+                      <a:solidFill>
+                        <a:srgbClr val="15505E"/>
+                      </a:solidFill>
+                    </a:lnL>
+                    <a:solidFill>
+                      <a:srgbClr val="F4EFE4"/>
+                    </a:solidFill>
+                  </a:tcPr>
+                </a:tc>
+                <a:tc>
+                  <a:txBody>
+                    <a:bodyPr wrap="square"/>
+                    <a:lstStyle/>
+                    <a:p>
+                      <a:pPr algn="ctr">
+                        <a:lnSpc>
+                          <a:spcPct val="102000"/>
+                        </a:lnSpc>
+                        <a:spcAft>
+                          <a:spcPts val="0"/>
+                        </a:spcAft>
+                      </a:pPr>
+                      <a:r>
+                        <a:rPr sz="850" b="0">
+                          <a:solidFill>
+                            <a:srgbClr val="15505E"/>
+                          </a:solidFill>
+                          <a:latin typeface="Calibri"/>
+                        </a:rPr>
+                        <a:t>13.263 – $ 928.417</a:t>
+                      </a:r>
+                    </a:p>
+                  </a:txBody>
+                  <a:tcPr marL="91440" marR="91440" marT="36576" marB="36576" anchor="ctr">
+                    <a:lnB w="25400" cap="flat" cmpd="sng" algn="ctr">
+                      <a:solidFill>
+                        <a:srgbClr val="15505E"/>
+                      </a:solidFill>
+                    </a:lnB>
+                    <a:lnT w="25400" cap="flat" cmpd="sng" algn="ctr">
+                      <a:solidFill>
+                        <a:srgbClr val="15505E"/>
+                      </a:solidFill>
+                    </a:lnT>
+                    <a:lnR w="25400" cap="flat" cmpd="sng" algn="ctr">
+                      <a:solidFill>
+                        <a:srgbClr val="15505E"/>
+                      </a:solidFill>
+                    </a:lnR>
+                    <a:lnL w="25400" cap="flat" cmpd="sng" algn="ctr">
+                      <a:solidFill>
+                        <a:srgbClr val="15505E"/>
+                      </a:solidFill>
+                    </a:lnL>
+                    <a:solidFill>
+                      <a:srgbClr val="F4EFE4"/>
+                    </a:solidFill>
+                  </a:tcPr>
+                </a:tc>
+                <a:tc>
+                  <a:txBody>
+                    <a:bodyPr wrap="square"/>
+                    <a:lstStyle/>
+                    <a:p>
+                      <a:pPr algn="ctr">
+                        <a:lnSpc>
+                          <a:spcPct val="102000"/>
+                        </a:lnSpc>
+                        <a:spcAft>
+                          <a:spcPts val="0"/>
+                        </a:spcAft>
+                      </a:pPr>
+                      <a:r>
+                        <a:rPr sz="850" b="0">
+                          <a:solidFill>
+                            <a:srgbClr val="15505E"/>
+                          </a:solidFill>
+                          <a:latin typeface="Calibri"/>
+                        </a:rPr>
+                        <a:t>s/d</a:t>
+                      </a:r>
+                    </a:p>
+                  </a:txBody>
+                  <a:tcPr marL="91440" marR="91440" marT="36576" marB="36576" anchor="ctr">
+                    <a:lnB w="25400" cap="flat" cmpd="sng" algn="ctr">
+                      <a:solidFill>
+                        <a:srgbClr val="15505E"/>
+                      </a:solidFill>
+                    </a:lnB>
+                    <a:lnT w="25400" cap="flat" cmpd="sng" algn="ctr">
+                      <a:solidFill>
+                        <a:srgbClr val="15505E"/>
+                      </a:solidFill>
+                    </a:lnT>
+                    <a:lnR w="25400" cap="flat" cmpd="sng" algn="ctr">
+                      <a:solidFill>
+                        <a:srgbClr val="15505E"/>
+                      </a:solidFill>
+                    </a:lnR>
+                    <a:lnL w="25400" cap="flat" cmpd="sng" algn="ctr">
+                      <a:solidFill>
+                        <a:srgbClr val="15505E"/>
+                      </a:solidFill>
+                    </a:lnL>
+                    <a:solidFill>
+                      <a:srgbClr val="F4EFE4"/>
+                    </a:solidFill>
+                  </a:tcPr>
+                </a:tc>
+                <a:tc>
+                  <a:txBody>
+                    <a:bodyPr wrap="square"/>
+                    <a:lstStyle/>
+                    <a:p>
+                      <a:pPr algn="ctr">
+                        <a:lnSpc>
+                          <a:spcPct val="102000"/>
+                        </a:lnSpc>
+                        <a:spcAft>
+                          <a:spcPts val="0"/>
+                        </a:spcAft>
+                      </a:pPr>
+                      <a:r>
+                        <a:rPr sz="850" b="0">
+                          <a:solidFill>
+                            <a:srgbClr val="15505E"/>
+                          </a:solidFill>
+                          <a:latin typeface="Calibri"/>
+                        </a:rPr>
+                        <a:t>s/d</a:t>
+                      </a:r>
+                    </a:p>
+                  </a:txBody>
+                  <a:tcPr marL="91440" marR="91440" marT="36576" marB="36576" anchor="ctr">
+                    <a:lnB w="25400" cap="flat" cmpd="sng" algn="ctr">
+                      <a:solidFill>
+                        <a:srgbClr val="15505E"/>
+                      </a:solidFill>
+                    </a:lnB>
+                    <a:lnT w="25400" cap="flat" cmpd="sng" algn="ctr">
+                      <a:solidFill>
+                        <a:srgbClr val="15505E"/>
+                      </a:solidFill>
+                    </a:lnT>
+                    <a:lnR w="25400" cap="flat" cmpd="sng" algn="ctr">
+                      <a:solidFill>
+                        <a:srgbClr val="15505E"/>
+                      </a:solidFill>
+                    </a:lnR>
+                    <a:lnL w="25400" cap="flat" cmpd="sng" algn="ctr">
+                      <a:solidFill>
+                        <a:srgbClr val="15505E"/>
+                      </a:solidFill>
+                    </a:lnL>
+                    <a:solidFill>
+                      <a:srgbClr val="F4EFE4"/>
+                    </a:solidFill>
+                  </a:tcPr>
+                </a:tc>
+                <a:tc>
+                  <a:txBody>
+                    <a:bodyPr wrap="square"/>
+                    <a:lstStyle/>
+                    <a:p>
+                      <a:pPr algn="ctr">
+                        <a:lnSpc>
+                          <a:spcPct val="102000"/>
+                        </a:lnSpc>
+                        <a:spcAft>
+                          <a:spcPts val="0"/>
+                        </a:spcAft>
+                      </a:pPr>
+                      <a:r>
+                        <a:rPr sz="850" b="0">
+                          <a:solidFill>
+                            <a:srgbClr val="15505E"/>
+                          </a:solidFill>
+                          <a:latin typeface="Calibri"/>
+                        </a:rPr>
+                        <a:t>s/d</a:t>
+                      </a:r>
+                    </a:p>
+                  </a:txBody>
+                  <a:tcPr marL="91440" marR="91440" marT="36576" marB="36576" anchor="ctr">
+                    <a:lnB w="25400" cap="flat" cmpd="sng" algn="ctr">
+                      <a:solidFill>
+                        <a:srgbClr val="15505E"/>
+                      </a:solidFill>
+                    </a:lnB>
+                    <a:lnT w="25400" cap="flat" cmpd="sng" algn="ctr">
+                      <a:solidFill>
+                        <a:srgbClr val="15505E"/>
+                      </a:solidFill>
+                    </a:lnT>
+                    <a:lnR w="25400" cap="flat" cmpd="sng" algn="ctr">
+                      <a:solidFill>
+                        <a:srgbClr val="15505E"/>
+                      </a:solidFill>
+                    </a:lnR>
+                    <a:lnL w="25400" cap="flat" cmpd="sng" algn="ctr">
+                      <a:solidFill>
+                        <a:srgbClr val="15505E"/>
+                      </a:solidFill>
+                    </a:lnL>
+                    <a:solidFill>
+                      <a:srgbClr val="F4EFE4"/>
+                    </a:solidFill>
+                  </a:tcPr>
+                </a:tc>
+              </a:tr>
+            </a:tbl>
+          </a:graphicData>
+        </a:graphic>
+      </p:graphicFrame>
+      <p:sp>
+        <p:nvSpPr>
+          <p:cNvPr id="7" name="TextBox 6"/>
+          <p:cNvSpPr txBox="1"/>
+          <p:nvPr/>
+        </p:nvSpPr>
+        <p:spPr>
+          <a:xfrm>
+            <a:off x="822960" y="6053328"/>
+            <a:ext cx="10515600" cy="457200"/>
+          </a:xfrm>
+          <a:prstGeom prst="rect">
+            <a:avLst/>
+          </a:prstGeom>
+          <a:noFill/>
+        </p:spPr>
+        <p:txBody>
+          <a:bodyPr wrap="square" lIns="0" rIns="0" tIns="0" bIns="0" anchor="t">
+            <a:spAutoFit/>
+          </a:bodyPr>
+          <a:lstStyle/>
           <a:p>
-            <a:pPr>
+            <a:pPr algn="l">
               <a:lnSpc>
-                <a:spcPct val="110000"/>
+                <a:spcPct val="116000"/>
               </a:lnSpc>
               <a:spcAft>
-                <a:spcPts val="500"/>
+                <a:spcPts val="1300"/>
               </a:spcAft>
             </a:pPr>
             <a:r>
-              <a:rPr sz="1650" b="1">
+              <a:rPr sz="1000" b="0">
                 <a:solidFill>
                   <a:srgbClr val="15505E"/>
                 </a:solidFill>
                 <a:latin typeface="Calibri"/>
               </a:rPr>
-              <a:t>2) La diferencia no se movió igual en todos lados.</a:t>
-            </a:r>
-          </a:p>
-          <a:p>
-            <a:pPr>
-              <a:lnSpc>
-                <a:spcPct val="116000"/>
-              </a:lnSpc>
-              <a:spcAft>
-                <a:spcPts val="1400"/>
-              </a:spcAft>
-            </a:pPr>
-            <a:r>
-              <a:rPr sz="1550" b="0">
-                <a:solidFill>
-                  <a:srgbClr val="15505E"/>
-                </a:solidFill>
-                <a:latin typeface="Calibri"/>
-              </a:rPr>
-              <a:t>En la Comuna 1 la prima creció 14 puntos: ahí los departamentos grandes se abarataron mucho más que los chicos. En Palermo pasó al revés, se achicó 10 puntos.</a:t>
+              <a:t>Prima = cuánto más caro es el m² del monoambiente que el del 3 ambientes. Comunas 4, 8 y 9 sin dato de 1 ambiente en 2018. Ordenado por prima de hoy.</a:t>
             </a:r>
           </a:p>
         </p:txBody>
@@ -10345,40 +16785,16 @@
           </a:p>
         </p:txBody>
       </p:sp>
-      <p:pic>
-        <p:nvPicPr>
-          <p:cNvPr id="4" name="Picture 3" descr="i2_g08_evolucion_zona.png"/>
-          <p:cNvPicPr>
-            <a:picLocks noChangeAspect="1"/>
-          </p:cNvPicPr>
-          <p:nvPr/>
-        </p:nvPicPr>
-        <p:blipFill>
-          <a:blip r:embed="rId3"/>
-          <a:stretch>
-            <a:fillRect/>
-          </a:stretch>
-        </p:blipFill>
-        <p:spPr>
-          <a:xfrm>
-            <a:off x="777240" y="1463040"/>
-            <a:ext cx="6675120" cy="3738067"/>
-          </a:xfrm>
-          <a:prstGeom prst="rect">
-            <a:avLst/>
-          </a:prstGeom>
-        </p:spPr>
-      </p:pic>
       <p:sp>
         <p:nvSpPr>
-          <p:cNvPr id="5" name="TextBox 4"/>
+          <p:cNvPr id="4" name="TextBox 3"/>
           <p:cNvSpPr txBox="1"/>
           <p:nvPr/>
         </p:nvSpPr>
         <p:spPr>
           <a:xfrm>
-            <a:off x="7772400" y="914400"/>
-            <a:ext cx="3657600" cy="1463040"/>
+            <a:off x="822960" y="658368"/>
+            <a:ext cx="10545775" cy="1463040"/>
           </a:xfrm>
           <a:prstGeom prst="rect">
             <a:avLst/>
@@ -10400,27 +16816,27 @@
               </a:spcAft>
             </a:pPr>
             <a:r>
-              <a:rPr sz="2600" b="1">
+              <a:rPr sz="3200" b="1">
                 <a:solidFill>
                   <a:srgbClr val="F4EFE4"/>
                 </a:solidFill>
                 <a:latin typeface="Bookman Old Style"/>
               </a:rPr>
-              <a:t>¿EVOLUCIONARON IGUAL LAS ZONAS?</a:t>
+              <a:t>¿TODAS LAS ZONAS EVOLUCIONARON IGUAL?</a:t>
             </a:r>
           </a:p>
         </p:txBody>
       </p:sp>
       <p:sp>
         <p:nvSpPr>
-          <p:cNvPr id="6" name="TextBox 5"/>
+          <p:cNvPr id="5" name="TextBox 4"/>
           <p:cNvSpPr txBox="1"/>
           <p:nvPr/>
         </p:nvSpPr>
         <p:spPr>
           <a:xfrm>
-            <a:off x="7772400" y="2834640"/>
-            <a:ext cx="3657600" cy="3108960"/>
+            <a:off x="822960" y="1847088"/>
+            <a:ext cx="10515600" cy="713232"/>
           </a:xfrm>
           <a:prstGeom prst="rect">
             <a:avLst/>
@@ -10435,10 +16851,10 @@
           <a:p>
             <a:pPr algn="l">
               <a:lnSpc>
-                <a:spcPct val="110000"/>
+                <a:spcPct val="116000"/>
               </a:lnSpc>
               <a:spcAft>
-                <a:spcPts val="500"/>
+                <a:spcPts val="1300"/>
               </a:spcAft>
             </a:pPr>
             <a:r>
@@ -10448,18 +16864,1109 @@
                 </a:solidFill>
                 <a:latin typeface="Calibri"/>
               </a:rPr>
-              <a:t>3) Sí, y sin rezagos.</a:t>
+              <a:t>También agregamos esta tabla. </a:t>
+            </a:r>
+            <a:r>
+              <a:rPr sz="1600" b="0">
+                <a:solidFill>
+                  <a:srgbClr val="F4EFE4"/>
+                </a:solidFill>
+                <a:latin typeface="Calibri"/>
+              </a:rPr>
+              <a:t>Alquiler real por zona, variación entre el promedio de 2018 y el último año, y trimestre del pico.</a:t>
             </a:r>
           </a:p>
+        </p:txBody>
+      </p:sp>
+      <p:graphicFrame>
+        <p:nvGraphicFramePr>
+          <p:cNvPr id="6" name="Table 5"/>
+          <p:cNvGraphicFramePr>
+            <a:graphicFrameLocks noGrp="1"/>
+          </p:cNvGraphicFramePr>
+          <p:nvPr/>
+        </p:nvGraphicFramePr>
+        <p:xfrm>
+          <a:off x="822960" y="2487168"/>
+          <a:ext cx="10515600" cy="2706624"/>
+        </p:xfrm>
+        <a:graphic>
+          <a:graphicData uri="http://schemas.openxmlformats.org/drawingml/2006/table">
+            <a:tbl>
+              <a:tblPr>
+                <a:tableStyleId>{5C22544A-7EE6-4342-B048-85BDC9FD1C3A}</a:tableStyleId>
+              </a:tblPr>
+              <a:tblGrid>
+                <a:gridCol w="2377440"/>
+                <a:gridCol w="2697480"/>
+                <a:gridCol w="2697480"/>
+                <a:gridCol w="2743200"/>
+              </a:tblGrid>
+              <a:tr h="512064">
+                <a:tc>
+                  <a:txBody>
+                    <a:bodyPr wrap="square"/>
+                    <a:lstStyle/>
+                    <a:p>
+                      <a:pPr algn="ctr">
+                        <a:lnSpc>
+                          <a:spcPct val="102000"/>
+                        </a:lnSpc>
+                        <a:spcAft>
+                          <a:spcPts val="0"/>
+                        </a:spcAft>
+                      </a:pPr>
+                      <a:r>
+                        <a:rPr sz="1500" b="1">
+                          <a:solidFill>
+                            <a:srgbClr val="F4EFE4"/>
+                          </a:solidFill>
+                          <a:latin typeface="Calibri"/>
+                        </a:rPr>
+                        <a:t>Zona</a:t>
+                      </a:r>
+                    </a:p>
+                  </a:txBody>
+                  <a:tcPr marL="91440" marR="91440" marT="36576" marB="36576" anchor="ctr">
+                    <a:lnB w="25400" cap="flat" cmpd="sng" algn="ctr">
+                      <a:solidFill>
+                        <a:srgbClr val="15505E"/>
+                      </a:solidFill>
+                    </a:lnB>
+                    <a:lnT w="25400" cap="flat" cmpd="sng" algn="ctr">
+                      <a:solidFill>
+                        <a:srgbClr val="15505E"/>
+                      </a:solidFill>
+                    </a:lnT>
+                    <a:lnR w="25400" cap="flat" cmpd="sng" algn="ctr">
+                      <a:solidFill>
+                        <a:srgbClr val="15505E"/>
+                      </a:solidFill>
+                    </a:lnR>
+                    <a:lnL w="25400" cap="flat" cmpd="sng" algn="ctr">
+                      <a:solidFill>
+                        <a:srgbClr val="15505E"/>
+                      </a:solidFill>
+                    </a:lnL>
+                    <a:solidFill>
+                      <a:srgbClr val="15505E"/>
+                    </a:solidFill>
+                  </a:tcPr>
+                </a:tc>
+                <a:tc>
+                  <a:txBody>
+                    <a:bodyPr wrap="square"/>
+                    <a:lstStyle/>
+                    <a:p>
+                      <a:pPr algn="ctr">
+                        <a:lnSpc>
+                          <a:spcPct val="102000"/>
+                        </a:lnSpc>
+                        <a:spcAft>
+                          <a:spcPts val="0"/>
+                        </a:spcAft>
+                      </a:pPr>
+                      <a:r>
+                        <a:rPr sz="1500" b="1">
+                          <a:solidFill>
+                            <a:srgbClr val="F4EFE4"/>
+                          </a:solidFill>
+                          <a:latin typeface="Calibri"/>
+                        </a:rPr>
+                        <a:t>1 amb.</a:t>
+                      </a:r>
+                    </a:p>
+                  </a:txBody>
+                  <a:tcPr marL="91440" marR="91440" marT="36576" marB="36576" anchor="ctr">
+                    <a:lnB w="25400" cap="flat" cmpd="sng" algn="ctr">
+                      <a:solidFill>
+                        <a:srgbClr val="15505E"/>
+                      </a:solidFill>
+                    </a:lnB>
+                    <a:lnT w="25400" cap="flat" cmpd="sng" algn="ctr">
+                      <a:solidFill>
+                        <a:srgbClr val="15505E"/>
+                      </a:solidFill>
+                    </a:lnT>
+                    <a:lnR w="25400" cap="flat" cmpd="sng" algn="ctr">
+                      <a:solidFill>
+                        <a:srgbClr val="15505E"/>
+                      </a:solidFill>
+                    </a:lnR>
+                    <a:lnL w="25400" cap="flat" cmpd="sng" algn="ctr">
+                      <a:solidFill>
+                        <a:srgbClr val="15505E"/>
+                      </a:solidFill>
+                    </a:lnL>
+                    <a:solidFill>
+                      <a:srgbClr val="15505E"/>
+                    </a:solidFill>
+                  </a:tcPr>
+                </a:tc>
+                <a:tc>
+                  <a:txBody>
+                    <a:bodyPr wrap="square"/>
+                    <a:lstStyle/>
+                    <a:p>
+                      <a:pPr algn="ctr">
+                        <a:lnSpc>
+                          <a:spcPct val="102000"/>
+                        </a:lnSpc>
+                        <a:spcAft>
+                          <a:spcPts val="0"/>
+                        </a:spcAft>
+                      </a:pPr>
+                      <a:r>
+                        <a:rPr sz="1500" b="1">
+                          <a:solidFill>
+                            <a:srgbClr val="F4EFE4"/>
+                          </a:solidFill>
+                          <a:latin typeface="Calibri"/>
+                        </a:rPr>
+                        <a:t>2 amb.</a:t>
+                      </a:r>
+                    </a:p>
+                  </a:txBody>
+                  <a:tcPr marL="91440" marR="91440" marT="36576" marB="36576" anchor="ctr">
+                    <a:lnB w="25400" cap="flat" cmpd="sng" algn="ctr">
+                      <a:solidFill>
+                        <a:srgbClr val="15505E"/>
+                      </a:solidFill>
+                    </a:lnB>
+                    <a:lnT w="25400" cap="flat" cmpd="sng" algn="ctr">
+                      <a:solidFill>
+                        <a:srgbClr val="15505E"/>
+                      </a:solidFill>
+                    </a:lnT>
+                    <a:lnR w="25400" cap="flat" cmpd="sng" algn="ctr">
+                      <a:solidFill>
+                        <a:srgbClr val="15505E"/>
+                      </a:solidFill>
+                    </a:lnR>
+                    <a:lnL w="25400" cap="flat" cmpd="sng" algn="ctr">
+                      <a:solidFill>
+                        <a:srgbClr val="15505E"/>
+                      </a:solidFill>
+                    </a:lnL>
+                    <a:solidFill>
+                      <a:srgbClr val="15505E"/>
+                    </a:solidFill>
+                  </a:tcPr>
+                </a:tc>
+                <a:tc>
+                  <a:txBody>
+                    <a:bodyPr wrap="square"/>
+                    <a:lstStyle/>
+                    <a:p>
+                      <a:pPr algn="ctr">
+                        <a:lnSpc>
+                          <a:spcPct val="102000"/>
+                        </a:lnSpc>
+                        <a:spcAft>
+                          <a:spcPts val="0"/>
+                        </a:spcAft>
+                      </a:pPr>
+                      <a:r>
+                        <a:rPr sz="1500" b="1">
+                          <a:solidFill>
+                            <a:srgbClr val="F4EFE4"/>
+                          </a:solidFill>
+                          <a:latin typeface="Calibri"/>
+                        </a:rPr>
+                        <a:t>3 amb.</a:t>
+                      </a:r>
+                    </a:p>
+                  </a:txBody>
+                  <a:tcPr marL="91440" marR="91440" marT="36576" marB="36576" anchor="ctr">
+                    <a:lnB w="25400" cap="flat" cmpd="sng" algn="ctr">
+                      <a:solidFill>
+                        <a:srgbClr val="15505E"/>
+                      </a:solidFill>
+                    </a:lnB>
+                    <a:lnT w="25400" cap="flat" cmpd="sng" algn="ctr">
+                      <a:solidFill>
+                        <a:srgbClr val="15505E"/>
+                      </a:solidFill>
+                    </a:lnT>
+                    <a:lnR w="25400" cap="flat" cmpd="sng" algn="ctr">
+                      <a:solidFill>
+                        <a:srgbClr val="15505E"/>
+                      </a:solidFill>
+                    </a:lnR>
+                    <a:lnL w="25400" cap="flat" cmpd="sng" algn="ctr">
+                      <a:solidFill>
+                        <a:srgbClr val="15505E"/>
+                      </a:solidFill>
+                    </a:lnL>
+                    <a:solidFill>
+                      <a:srgbClr val="15505E"/>
+                    </a:solidFill>
+                  </a:tcPr>
+                </a:tc>
+              </a:tr>
+              <a:tr h="548640">
+                <a:tc>
+                  <a:txBody>
+                    <a:bodyPr wrap="square"/>
+                    <a:lstStyle/>
+                    <a:p>
+                      <a:pPr algn="ctr">
+                        <a:lnSpc>
+                          <a:spcPct val="102000"/>
+                        </a:lnSpc>
+                        <a:spcAft>
+                          <a:spcPts val="0"/>
+                        </a:spcAft>
+                      </a:pPr>
+                      <a:r>
+                        <a:rPr sz="1500" b="0">
+                          <a:solidFill>
+                            <a:srgbClr val="15505E"/>
+                          </a:solidFill>
+                          <a:latin typeface="Calibri"/>
+                        </a:rPr>
+                        <a:t>Norte</a:t>
+                      </a:r>
+                    </a:p>
+                  </a:txBody>
+                  <a:tcPr marL="91440" marR="91440" marT="36576" marB="36576" anchor="ctr">
+                    <a:lnB w="25400" cap="flat" cmpd="sng" algn="ctr">
+                      <a:solidFill>
+                        <a:srgbClr val="15505E"/>
+                      </a:solidFill>
+                    </a:lnB>
+                    <a:lnT w="25400" cap="flat" cmpd="sng" algn="ctr">
+                      <a:solidFill>
+                        <a:srgbClr val="15505E"/>
+                      </a:solidFill>
+                    </a:lnT>
+                    <a:lnR w="25400" cap="flat" cmpd="sng" algn="ctr">
+                      <a:solidFill>
+                        <a:srgbClr val="15505E"/>
+                      </a:solidFill>
+                    </a:lnR>
+                    <a:lnL w="25400" cap="flat" cmpd="sng" algn="ctr">
+                      <a:solidFill>
+                        <a:srgbClr val="15505E"/>
+                      </a:solidFill>
+                    </a:lnL>
+                    <a:solidFill>
+                      <a:srgbClr val="F4EFE4"/>
+                    </a:solidFill>
+                  </a:tcPr>
+                </a:tc>
+                <a:tc>
+                  <a:txBody>
+                    <a:bodyPr wrap="square"/>
+                    <a:lstStyle/>
+                    <a:p>
+                      <a:pPr algn="ctr">
+                        <a:lnSpc>
+                          <a:spcPct val="102000"/>
+                        </a:lnSpc>
+                        <a:spcAft>
+                          <a:spcPts val="0"/>
+                        </a:spcAft>
+                      </a:pPr>
+                      <a:r>
+                        <a:rPr sz="1500" b="0">
+                          <a:solidFill>
+                            <a:srgbClr val="15505E"/>
+                          </a:solidFill>
+                          <a:latin typeface="Calibri"/>
+                        </a:rPr>
+                        <a:t>-15%
+pico 2023-T4</a:t>
+                      </a:r>
+                    </a:p>
+                  </a:txBody>
+                  <a:tcPr marL="91440" marR="91440" marT="36576" marB="36576" anchor="ctr">
+                    <a:lnB w="25400" cap="flat" cmpd="sng" algn="ctr">
+                      <a:solidFill>
+                        <a:srgbClr val="15505E"/>
+                      </a:solidFill>
+                    </a:lnB>
+                    <a:lnT w="25400" cap="flat" cmpd="sng" algn="ctr">
+                      <a:solidFill>
+                        <a:srgbClr val="15505E"/>
+                      </a:solidFill>
+                    </a:lnT>
+                    <a:lnR w="25400" cap="flat" cmpd="sng" algn="ctr">
+                      <a:solidFill>
+                        <a:srgbClr val="15505E"/>
+                      </a:solidFill>
+                    </a:lnR>
+                    <a:lnL w="25400" cap="flat" cmpd="sng" algn="ctr">
+                      <a:solidFill>
+                        <a:srgbClr val="15505E"/>
+                      </a:solidFill>
+                    </a:lnL>
+                    <a:solidFill>
+                      <a:srgbClr val="F4EFE4"/>
+                    </a:solidFill>
+                  </a:tcPr>
+                </a:tc>
+                <a:tc>
+                  <a:txBody>
+                    <a:bodyPr wrap="square"/>
+                    <a:lstStyle/>
+                    <a:p>
+                      <a:pPr algn="ctr">
+                        <a:lnSpc>
+                          <a:spcPct val="102000"/>
+                        </a:lnSpc>
+                        <a:spcAft>
+                          <a:spcPts val="0"/>
+                        </a:spcAft>
+                      </a:pPr>
+                      <a:r>
+                        <a:rPr sz="1500" b="0">
+                          <a:solidFill>
+                            <a:srgbClr val="15505E"/>
+                          </a:solidFill>
+                          <a:latin typeface="Calibri"/>
+                        </a:rPr>
+                        <a:t>-15%
+pico 2023-T4</a:t>
+                      </a:r>
+                    </a:p>
+                  </a:txBody>
+                  <a:tcPr marL="91440" marR="91440" marT="36576" marB="36576" anchor="ctr">
+                    <a:lnB w="25400" cap="flat" cmpd="sng" algn="ctr">
+                      <a:solidFill>
+                        <a:srgbClr val="15505E"/>
+                      </a:solidFill>
+                    </a:lnB>
+                    <a:lnT w="25400" cap="flat" cmpd="sng" algn="ctr">
+                      <a:solidFill>
+                        <a:srgbClr val="15505E"/>
+                      </a:solidFill>
+                    </a:lnT>
+                    <a:lnR w="25400" cap="flat" cmpd="sng" algn="ctr">
+                      <a:solidFill>
+                        <a:srgbClr val="15505E"/>
+                      </a:solidFill>
+                    </a:lnR>
+                    <a:lnL w="25400" cap="flat" cmpd="sng" algn="ctr">
+                      <a:solidFill>
+                        <a:srgbClr val="15505E"/>
+                      </a:solidFill>
+                    </a:lnL>
+                    <a:solidFill>
+                      <a:srgbClr val="F4EFE4"/>
+                    </a:solidFill>
+                  </a:tcPr>
+                </a:tc>
+                <a:tc>
+                  <a:txBody>
+                    <a:bodyPr wrap="square"/>
+                    <a:lstStyle/>
+                    <a:p>
+                      <a:pPr algn="ctr">
+                        <a:lnSpc>
+                          <a:spcPct val="102000"/>
+                        </a:lnSpc>
+                        <a:spcAft>
+                          <a:spcPts val="0"/>
+                        </a:spcAft>
+                      </a:pPr>
+                      <a:r>
+                        <a:rPr sz="1500" b="0">
+                          <a:solidFill>
+                            <a:srgbClr val="15505E"/>
+                          </a:solidFill>
+                          <a:latin typeface="Calibri"/>
+                        </a:rPr>
+                        <a:t>-11%
+pico 2023-T4</a:t>
+                      </a:r>
+                    </a:p>
+                  </a:txBody>
+                  <a:tcPr marL="91440" marR="91440" marT="36576" marB="36576" anchor="ctr">
+                    <a:lnB w="25400" cap="flat" cmpd="sng" algn="ctr">
+                      <a:solidFill>
+                        <a:srgbClr val="15505E"/>
+                      </a:solidFill>
+                    </a:lnB>
+                    <a:lnT w="25400" cap="flat" cmpd="sng" algn="ctr">
+                      <a:solidFill>
+                        <a:srgbClr val="15505E"/>
+                      </a:solidFill>
+                    </a:lnT>
+                    <a:lnR w="25400" cap="flat" cmpd="sng" algn="ctr">
+                      <a:solidFill>
+                        <a:srgbClr val="15505E"/>
+                      </a:solidFill>
+                    </a:lnR>
+                    <a:lnL w="25400" cap="flat" cmpd="sng" algn="ctr">
+                      <a:solidFill>
+                        <a:srgbClr val="15505E"/>
+                      </a:solidFill>
+                    </a:lnL>
+                    <a:solidFill>
+                      <a:srgbClr val="F4EFE4"/>
+                    </a:solidFill>
+                  </a:tcPr>
+                </a:tc>
+              </a:tr>
+              <a:tr h="548640">
+                <a:tc>
+                  <a:txBody>
+                    <a:bodyPr wrap="square"/>
+                    <a:lstStyle/>
+                    <a:p>
+                      <a:pPr algn="ctr">
+                        <a:lnSpc>
+                          <a:spcPct val="102000"/>
+                        </a:lnSpc>
+                        <a:spcAft>
+                          <a:spcPts val="0"/>
+                        </a:spcAft>
+                      </a:pPr>
+                      <a:r>
+                        <a:rPr sz="1500" b="0">
+                          <a:solidFill>
+                            <a:srgbClr val="15505E"/>
+                          </a:solidFill>
+                          <a:latin typeface="Calibri"/>
+                        </a:rPr>
+                        <a:t>Centro</a:t>
+                      </a:r>
+                    </a:p>
+                  </a:txBody>
+                  <a:tcPr marL="91440" marR="91440" marT="36576" marB="36576" anchor="ctr">
+                    <a:lnB w="25400" cap="flat" cmpd="sng" algn="ctr">
+                      <a:solidFill>
+                        <a:srgbClr val="15505E"/>
+                      </a:solidFill>
+                    </a:lnB>
+                    <a:lnT w="25400" cap="flat" cmpd="sng" algn="ctr">
+                      <a:solidFill>
+                        <a:srgbClr val="15505E"/>
+                      </a:solidFill>
+                    </a:lnT>
+                    <a:lnR w="25400" cap="flat" cmpd="sng" algn="ctr">
+                      <a:solidFill>
+                        <a:srgbClr val="15505E"/>
+                      </a:solidFill>
+                    </a:lnR>
+                    <a:lnL w="25400" cap="flat" cmpd="sng" algn="ctr">
+                      <a:solidFill>
+                        <a:srgbClr val="15505E"/>
+                      </a:solidFill>
+                    </a:lnL>
+                    <a:solidFill>
+                      <a:srgbClr val="F4EFE4"/>
+                    </a:solidFill>
+                  </a:tcPr>
+                </a:tc>
+                <a:tc>
+                  <a:txBody>
+                    <a:bodyPr wrap="square"/>
+                    <a:lstStyle/>
+                    <a:p>
+                      <a:pPr algn="ctr">
+                        <a:lnSpc>
+                          <a:spcPct val="102000"/>
+                        </a:lnSpc>
+                        <a:spcAft>
+                          <a:spcPts val="0"/>
+                        </a:spcAft>
+                      </a:pPr>
+                      <a:r>
+                        <a:rPr sz="1500" b="0">
+                          <a:solidFill>
+                            <a:srgbClr val="15505E"/>
+                          </a:solidFill>
+                          <a:latin typeface="Calibri"/>
+                        </a:rPr>
+                        <a:t>-13%
+pico 2023-T3</a:t>
+                      </a:r>
+                    </a:p>
+                  </a:txBody>
+                  <a:tcPr marL="91440" marR="91440" marT="36576" marB="36576" anchor="ctr">
+                    <a:lnB w="25400" cap="flat" cmpd="sng" algn="ctr">
+                      <a:solidFill>
+                        <a:srgbClr val="15505E"/>
+                      </a:solidFill>
+                    </a:lnB>
+                    <a:lnT w="25400" cap="flat" cmpd="sng" algn="ctr">
+                      <a:solidFill>
+                        <a:srgbClr val="15505E"/>
+                      </a:solidFill>
+                    </a:lnT>
+                    <a:lnR w="25400" cap="flat" cmpd="sng" algn="ctr">
+                      <a:solidFill>
+                        <a:srgbClr val="15505E"/>
+                      </a:solidFill>
+                    </a:lnR>
+                    <a:lnL w="25400" cap="flat" cmpd="sng" algn="ctr">
+                      <a:solidFill>
+                        <a:srgbClr val="15505E"/>
+                      </a:solidFill>
+                    </a:lnL>
+                    <a:solidFill>
+                      <a:srgbClr val="F4EFE4"/>
+                    </a:solidFill>
+                  </a:tcPr>
+                </a:tc>
+                <a:tc>
+                  <a:txBody>
+                    <a:bodyPr wrap="square"/>
+                    <a:lstStyle/>
+                    <a:p>
+                      <a:pPr algn="ctr">
+                        <a:lnSpc>
+                          <a:spcPct val="102000"/>
+                        </a:lnSpc>
+                        <a:spcAft>
+                          <a:spcPts val="0"/>
+                        </a:spcAft>
+                      </a:pPr>
+                      <a:r>
+                        <a:rPr sz="1500" b="0">
+                          <a:solidFill>
+                            <a:srgbClr val="15505E"/>
+                          </a:solidFill>
+                          <a:latin typeface="Calibri"/>
+                        </a:rPr>
+                        <a:t>-13%
+pico 2023-T4</a:t>
+                      </a:r>
+                    </a:p>
+                  </a:txBody>
+                  <a:tcPr marL="91440" marR="91440" marT="36576" marB="36576" anchor="ctr">
+                    <a:lnB w="25400" cap="flat" cmpd="sng" algn="ctr">
+                      <a:solidFill>
+                        <a:srgbClr val="15505E"/>
+                      </a:solidFill>
+                    </a:lnB>
+                    <a:lnT w="25400" cap="flat" cmpd="sng" algn="ctr">
+                      <a:solidFill>
+                        <a:srgbClr val="15505E"/>
+                      </a:solidFill>
+                    </a:lnT>
+                    <a:lnR w="25400" cap="flat" cmpd="sng" algn="ctr">
+                      <a:solidFill>
+                        <a:srgbClr val="15505E"/>
+                      </a:solidFill>
+                    </a:lnR>
+                    <a:lnL w="25400" cap="flat" cmpd="sng" algn="ctr">
+                      <a:solidFill>
+                        <a:srgbClr val="15505E"/>
+                      </a:solidFill>
+                    </a:lnL>
+                    <a:solidFill>
+                      <a:srgbClr val="F4EFE4"/>
+                    </a:solidFill>
+                  </a:tcPr>
+                </a:tc>
+                <a:tc>
+                  <a:txBody>
+                    <a:bodyPr wrap="square"/>
+                    <a:lstStyle/>
+                    <a:p>
+                      <a:pPr algn="ctr">
+                        <a:lnSpc>
+                          <a:spcPct val="102000"/>
+                        </a:lnSpc>
+                        <a:spcAft>
+                          <a:spcPts val="0"/>
+                        </a:spcAft>
+                      </a:pPr>
+                      <a:r>
+                        <a:rPr sz="1500" b="0">
+                          <a:solidFill>
+                            <a:srgbClr val="15505E"/>
+                          </a:solidFill>
+                          <a:latin typeface="Calibri"/>
+                        </a:rPr>
+                        <a:t>-14%
+pico 2023-T4</a:t>
+                      </a:r>
+                    </a:p>
+                  </a:txBody>
+                  <a:tcPr marL="91440" marR="91440" marT="36576" marB="36576" anchor="ctr">
+                    <a:lnB w="25400" cap="flat" cmpd="sng" algn="ctr">
+                      <a:solidFill>
+                        <a:srgbClr val="15505E"/>
+                      </a:solidFill>
+                    </a:lnB>
+                    <a:lnT w="25400" cap="flat" cmpd="sng" algn="ctr">
+                      <a:solidFill>
+                        <a:srgbClr val="15505E"/>
+                      </a:solidFill>
+                    </a:lnT>
+                    <a:lnR w="25400" cap="flat" cmpd="sng" algn="ctr">
+                      <a:solidFill>
+                        <a:srgbClr val="15505E"/>
+                      </a:solidFill>
+                    </a:lnR>
+                    <a:lnL w="25400" cap="flat" cmpd="sng" algn="ctr">
+                      <a:solidFill>
+                        <a:srgbClr val="15505E"/>
+                      </a:solidFill>
+                    </a:lnL>
+                    <a:solidFill>
+                      <a:srgbClr val="F4EFE4"/>
+                    </a:solidFill>
+                  </a:tcPr>
+                </a:tc>
+              </a:tr>
+              <a:tr h="548640">
+                <a:tc>
+                  <a:txBody>
+                    <a:bodyPr wrap="square"/>
+                    <a:lstStyle/>
+                    <a:p>
+                      <a:pPr algn="ctr">
+                        <a:lnSpc>
+                          <a:spcPct val="102000"/>
+                        </a:lnSpc>
+                        <a:spcAft>
+                          <a:spcPts val="0"/>
+                        </a:spcAft>
+                      </a:pPr>
+                      <a:r>
+                        <a:rPr sz="1500" b="0">
+                          <a:solidFill>
+                            <a:srgbClr val="15505E"/>
+                          </a:solidFill>
+                          <a:latin typeface="Calibri"/>
+                        </a:rPr>
+                        <a:t>Oeste</a:t>
+                      </a:r>
+                    </a:p>
+                  </a:txBody>
+                  <a:tcPr marL="91440" marR="91440" marT="36576" marB="36576" anchor="ctr">
+                    <a:lnB w="25400" cap="flat" cmpd="sng" algn="ctr">
+                      <a:solidFill>
+                        <a:srgbClr val="15505E"/>
+                      </a:solidFill>
+                    </a:lnB>
+                    <a:lnT w="25400" cap="flat" cmpd="sng" algn="ctr">
+                      <a:solidFill>
+                        <a:srgbClr val="15505E"/>
+                      </a:solidFill>
+                    </a:lnT>
+                    <a:lnR w="25400" cap="flat" cmpd="sng" algn="ctr">
+                      <a:solidFill>
+                        <a:srgbClr val="15505E"/>
+                      </a:solidFill>
+                    </a:lnR>
+                    <a:lnL w="25400" cap="flat" cmpd="sng" algn="ctr">
+                      <a:solidFill>
+                        <a:srgbClr val="15505E"/>
+                      </a:solidFill>
+                    </a:lnL>
+                    <a:solidFill>
+                      <a:srgbClr val="F4EFE4"/>
+                    </a:solidFill>
+                  </a:tcPr>
+                </a:tc>
+                <a:tc>
+                  <a:txBody>
+                    <a:bodyPr wrap="square"/>
+                    <a:lstStyle/>
+                    <a:p>
+                      <a:pPr algn="ctr">
+                        <a:lnSpc>
+                          <a:spcPct val="102000"/>
+                        </a:lnSpc>
+                        <a:spcAft>
+                          <a:spcPts val="0"/>
+                        </a:spcAft>
+                      </a:pPr>
+                      <a:r>
+                        <a:rPr sz="1500" b="0">
+                          <a:solidFill>
+                            <a:srgbClr val="15505E"/>
+                          </a:solidFill>
+                          <a:latin typeface="Calibri"/>
+                        </a:rPr>
+                        <a:t>-8%
+pico 2023-T4</a:t>
+                      </a:r>
+                    </a:p>
+                  </a:txBody>
+                  <a:tcPr marL="91440" marR="91440" marT="36576" marB="36576" anchor="ctr">
+                    <a:lnB w="25400" cap="flat" cmpd="sng" algn="ctr">
+                      <a:solidFill>
+                        <a:srgbClr val="15505E"/>
+                      </a:solidFill>
+                    </a:lnB>
+                    <a:lnT w="25400" cap="flat" cmpd="sng" algn="ctr">
+                      <a:solidFill>
+                        <a:srgbClr val="15505E"/>
+                      </a:solidFill>
+                    </a:lnT>
+                    <a:lnR w="25400" cap="flat" cmpd="sng" algn="ctr">
+                      <a:solidFill>
+                        <a:srgbClr val="15505E"/>
+                      </a:solidFill>
+                    </a:lnR>
+                    <a:lnL w="25400" cap="flat" cmpd="sng" algn="ctr">
+                      <a:solidFill>
+                        <a:srgbClr val="15505E"/>
+                      </a:solidFill>
+                    </a:lnL>
+                    <a:solidFill>
+                      <a:srgbClr val="F4EFE4"/>
+                    </a:solidFill>
+                  </a:tcPr>
+                </a:tc>
+                <a:tc>
+                  <a:txBody>
+                    <a:bodyPr wrap="square"/>
+                    <a:lstStyle/>
+                    <a:p>
+                      <a:pPr algn="ctr">
+                        <a:lnSpc>
+                          <a:spcPct val="102000"/>
+                        </a:lnSpc>
+                        <a:spcAft>
+                          <a:spcPts val="0"/>
+                        </a:spcAft>
+                      </a:pPr>
+                      <a:r>
+                        <a:rPr sz="1500" b="0">
+                          <a:solidFill>
+                            <a:srgbClr val="15505E"/>
+                          </a:solidFill>
+                          <a:latin typeface="Calibri"/>
+                        </a:rPr>
+                        <a:t>-6%
+pico 2023-T4</a:t>
+                      </a:r>
+                    </a:p>
+                  </a:txBody>
+                  <a:tcPr marL="91440" marR="91440" marT="36576" marB="36576" anchor="ctr">
+                    <a:lnB w="25400" cap="flat" cmpd="sng" algn="ctr">
+                      <a:solidFill>
+                        <a:srgbClr val="15505E"/>
+                      </a:solidFill>
+                    </a:lnB>
+                    <a:lnT w="25400" cap="flat" cmpd="sng" algn="ctr">
+                      <a:solidFill>
+                        <a:srgbClr val="15505E"/>
+                      </a:solidFill>
+                    </a:lnT>
+                    <a:lnR w="25400" cap="flat" cmpd="sng" algn="ctr">
+                      <a:solidFill>
+                        <a:srgbClr val="15505E"/>
+                      </a:solidFill>
+                    </a:lnR>
+                    <a:lnL w="25400" cap="flat" cmpd="sng" algn="ctr">
+                      <a:solidFill>
+                        <a:srgbClr val="15505E"/>
+                      </a:solidFill>
+                    </a:lnL>
+                    <a:solidFill>
+                      <a:srgbClr val="F4EFE4"/>
+                    </a:solidFill>
+                  </a:tcPr>
+                </a:tc>
+                <a:tc>
+                  <a:txBody>
+                    <a:bodyPr wrap="square"/>
+                    <a:lstStyle/>
+                    <a:p>
+                      <a:pPr algn="ctr">
+                        <a:lnSpc>
+                          <a:spcPct val="102000"/>
+                        </a:lnSpc>
+                        <a:spcAft>
+                          <a:spcPts val="0"/>
+                        </a:spcAft>
+                      </a:pPr>
+                      <a:r>
+                        <a:rPr sz="1500" b="0">
+                          <a:solidFill>
+                            <a:srgbClr val="15505E"/>
+                          </a:solidFill>
+                          <a:latin typeface="Calibri"/>
+                        </a:rPr>
+                        <a:t>-5%
+pico 2023-T4</a:t>
+                      </a:r>
+                    </a:p>
+                  </a:txBody>
+                  <a:tcPr marL="91440" marR="91440" marT="36576" marB="36576" anchor="ctr">
+                    <a:lnB w="25400" cap="flat" cmpd="sng" algn="ctr">
+                      <a:solidFill>
+                        <a:srgbClr val="15505E"/>
+                      </a:solidFill>
+                    </a:lnB>
+                    <a:lnT w="25400" cap="flat" cmpd="sng" algn="ctr">
+                      <a:solidFill>
+                        <a:srgbClr val="15505E"/>
+                      </a:solidFill>
+                    </a:lnT>
+                    <a:lnR w="25400" cap="flat" cmpd="sng" algn="ctr">
+                      <a:solidFill>
+                        <a:srgbClr val="15505E"/>
+                      </a:solidFill>
+                    </a:lnR>
+                    <a:lnL w="25400" cap="flat" cmpd="sng" algn="ctr">
+                      <a:solidFill>
+                        <a:srgbClr val="15505E"/>
+                      </a:solidFill>
+                    </a:lnL>
+                    <a:solidFill>
+                      <a:srgbClr val="F4EFE4"/>
+                    </a:solidFill>
+                  </a:tcPr>
+                </a:tc>
+              </a:tr>
+              <a:tr h="548640">
+                <a:tc>
+                  <a:txBody>
+                    <a:bodyPr wrap="square"/>
+                    <a:lstStyle/>
+                    <a:p>
+                      <a:pPr algn="ctr">
+                        <a:lnSpc>
+                          <a:spcPct val="102000"/>
+                        </a:lnSpc>
+                        <a:spcAft>
+                          <a:spcPts val="0"/>
+                        </a:spcAft>
+                      </a:pPr>
+                      <a:r>
+                        <a:rPr sz="1500" b="0">
+                          <a:solidFill>
+                            <a:srgbClr val="15505E"/>
+                          </a:solidFill>
+                          <a:latin typeface="Calibri"/>
+                        </a:rPr>
+                        <a:t>Sur</a:t>
+                      </a:r>
+                    </a:p>
+                  </a:txBody>
+                  <a:tcPr marL="91440" marR="91440" marT="36576" marB="36576" anchor="ctr">
+                    <a:lnB w="25400" cap="flat" cmpd="sng" algn="ctr">
+                      <a:solidFill>
+                        <a:srgbClr val="15505E"/>
+                      </a:solidFill>
+                    </a:lnB>
+                    <a:lnT w="25400" cap="flat" cmpd="sng" algn="ctr">
+                      <a:solidFill>
+                        <a:srgbClr val="15505E"/>
+                      </a:solidFill>
+                    </a:lnT>
+                    <a:lnR w="25400" cap="flat" cmpd="sng" algn="ctr">
+                      <a:solidFill>
+                        <a:srgbClr val="15505E"/>
+                      </a:solidFill>
+                    </a:lnR>
+                    <a:lnL w="25400" cap="flat" cmpd="sng" algn="ctr">
+                      <a:solidFill>
+                        <a:srgbClr val="15505E"/>
+                      </a:solidFill>
+                    </a:lnL>
+                    <a:solidFill>
+                      <a:srgbClr val="F4EFE4"/>
+                    </a:solidFill>
+                  </a:tcPr>
+                </a:tc>
+                <a:tc>
+                  <a:txBody>
+                    <a:bodyPr wrap="square"/>
+                    <a:lstStyle/>
+                    <a:p>
+                      <a:pPr algn="ctr">
+                        <a:lnSpc>
+                          <a:spcPct val="102000"/>
+                        </a:lnSpc>
+                        <a:spcAft>
+                          <a:spcPts val="0"/>
+                        </a:spcAft>
+                      </a:pPr>
+                      <a:r>
+                        <a:rPr sz="1500" b="0">
+                          <a:solidFill>
+                            <a:srgbClr val="15505E"/>
+                          </a:solidFill>
+                          <a:latin typeface="Calibri"/>
+                        </a:rPr>
+                        <a:t>-8%
+pico 2023-T4</a:t>
+                      </a:r>
+                    </a:p>
+                  </a:txBody>
+                  <a:tcPr marL="91440" marR="91440" marT="36576" marB="36576" anchor="ctr">
+                    <a:lnB w="25400" cap="flat" cmpd="sng" algn="ctr">
+                      <a:solidFill>
+                        <a:srgbClr val="15505E"/>
+                      </a:solidFill>
+                    </a:lnB>
+                    <a:lnT w="25400" cap="flat" cmpd="sng" algn="ctr">
+                      <a:solidFill>
+                        <a:srgbClr val="15505E"/>
+                      </a:solidFill>
+                    </a:lnT>
+                    <a:lnR w="25400" cap="flat" cmpd="sng" algn="ctr">
+                      <a:solidFill>
+                        <a:srgbClr val="15505E"/>
+                      </a:solidFill>
+                    </a:lnR>
+                    <a:lnL w="25400" cap="flat" cmpd="sng" algn="ctr">
+                      <a:solidFill>
+                        <a:srgbClr val="15505E"/>
+                      </a:solidFill>
+                    </a:lnL>
+                    <a:solidFill>
+                      <a:srgbClr val="F4EFE4"/>
+                    </a:solidFill>
+                  </a:tcPr>
+                </a:tc>
+                <a:tc>
+                  <a:txBody>
+                    <a:bodyPr wrap="square"/>
+                    <a:lstStyle/>
+                    <a:p>
+                      <a:pPr algn="ctr">
+                        <a:lnSpc>
+                          <a:spcPct val="102000"/>
+                        </a:lnSpc>
+                        <a:spcAft>
+                          <a:spcPts val="0"/>
+                        </a:spcAft>
+                      </a:pPr>
+                      <a:r>
+                        <a:rPr sz="1500" b="0">
+                          <a:solidFill>
+                            <a:srgbClr val="15505E"/>
+                          </a:solidFill>
+                          <a:latin typeface="Calibri"/>
+                        </a:rPr>
+                        <a:t>-6%
+pico 2023-T3</a:t>
+                      </a:r>
+                    </a:p>
+                  </a:txBody>
+                  <a:tcPr marL="91440" marR="91440" marT="36576" marB="36576" anchor="ctr">
+                    <a:lnB w="25400" cap="flat" cmpd="sng" algn="ctr">
+                      <a:solidFill>
+                        <a:srgbClr val="15505E"/>
+                      </a:solidFill>
+                    </a:lnB>
+                    <a:lnT w="25400" cap="flat" cmpd="sng" algn="ctr">
+                      <a:solidFill>
+                        <a:srgbClr val="15505E"/>
+                      </a:solidFill>
+                    </a:lnT>
+                    <a:lnR w="25400" cap="flat" cmpd="sng" algn="ctr">
+                      <a:solidFill>
+                        <a:srgbClr val="15505E"/>
+                      </a:solidFill>
+                    </a:lnR>
+                    <a:lnL w="25400" cap="flat" cmpd="sng" algn="ctr">
+                      <a:solidFill>
+                        <a:srgbClr val="15505E"/>
+                      </a:solidFill>
+                    </a:lnL>
+                    <a:solidFill>
+                      <a:srgbClr val="F4EFE4"/>
+                    </a:solidFill>
+                  </a:tcPr>
+                </a:tc>
+                <a:tc>
+                  <a:txBody>
+                    <a:bodyPr wrap="square"/>
+                    <a:lstStyle/>
+                    <a:p>
+                      <a:pPr algn="ctr">
+                        <a:lnSpc>
+                          <a:spcPct val="102000"/>
+                        </a:lnSpc>
+                        <a:spcAft>
+                          <a:spcPts val="0"/>
+                        </a:spcAft>
+                      </a:pPr>
+                      <a:r>
+                        <a:rPr sz="1500" b="0">
+                          <a:solidFill>
+                            <a:srgbClr val="15505E"/>
+                          </a:solidFill>
+                          <a:latin typeface="Calibri"/>
+                        </a:rPr>
+                        <a:t>-7%
+pico 2023-T4</a:t>
+                      </a:r>
+                    </a:p>
+                  </a:txBody>
+                  <a:tcPr marL="91440" marR="91440" marT="36576" marB="36576" anchor="ctr">
+                    <a:lnB w="25400" cap="flat" cmpd="sng" algn="ctr">
+                      <a:solidFill>
+                        <a:srgbClr val="15505E"/>
+                      </a:solidFill>
+                    </a:lnB>
+                    <a:lnT w="25400" cap="flat" cmpd="sng" algn="ctr">
+                      <a:solidFill>
+                        <a:srgbClr val="15505E"/>
+                      </a:solidFill>
+                    </a:lnT>
+                    <a:lnR w="25400" cap="flat" cmpd="sng" algn="ctr">
+                      <a:solidFill>
+                        <a:srgbClr val="15505E"/>
+                      </a:solidFill>
+                    </a:lnR>
+                    <a:lnL w="25400" cap="flat" cmpd="sng" algn="ctr">
+                      <a:solidFill>
+                        <a:srgbClr val="15505E"/>
+                      </a:solidFill>
+                    </a:lnL>
+                    <a:solidFill>
+                      <a:srgbClr val="F4EFE4"/>
+                    </a:solidFill>
+                  </a:tcPr>
+                </a:tc>
+              </a:tr>
+            </a:tbl>
+          </a:graphicData>
+        </a:graphic>
+      </p:graphicFrame>
+      <p:sp>
+        <p:nvSpPr>
+          <p:cNvPr id="7" name="TextBox 6"/>
+          <p:cNvSpPr txBox="1"/>
+          <p:nvPr/>
+        </p:nvSpPr>
+        <p:spPr>
+          <a:xfrm>
+            <a:off x="822960" y="5440680"/>
+            <a:ext cx="10515600" cy="914400"/>
+          </a:xfrm>
+          <a:prstGeom prst="rect">
+            <a:avLst/>
+          </a:prstGeom>
+          <a:noFill/>
+        </p:spPr>
+        <p:txBody>
+          <a:bodyPr wrap="square" lIns="0" rIns="0" tIns="0" bIns="0" anchor="t">
+            <a:spAutoFit/>
+          </a:bodyPr>
+          <a:lstStyle/>
           <a:p>
-            <a:pPr>
+            <a:pPr algn="l">
               <a:lnSpc>
                 <a:spcPct val="116000"/>
               </a:lnSpc>
               <a:spcAft>
-                <a:spcPts val="1400"/>
+                <a:spcPts val="1300"/>
               </a:spcAft>
             </a:pPr>
+            <a:r>
+              <a:rPr sz="1500" b="1">
+                <a:solidFill>
+                  <a:srgbClr val="F4EFE4"/>
+                </a:solidFill>
+                <a:latin typeface="Calibri"/>
+              </a:rPr>
+              <a:t>Conclusión. </a:t>
+            </a:r>
             <a:r>
               <a:rPr sz="1500" b="0">
                 <a:solidFill>
@@ -10467,45 +17974,7 @@
                 </a:solidFill>
                 <a:latin typeface="Calibri"/>
               </a:rPr>
-              <a:t>Las cuatro zonas tocaron el pico en el mismo trimestre, entre el tercero y el cuarto de 2023. Ninguna se movió antes que las otras.</a:t>
-            </a:r>
-          </a:p>
-          <a:p>
-            <a:pPr>
-              <a:lnSpc>
-                <a:spcPct val="110000"/>
-              </a:lnSpc>
-              <a:spcAft>
-                <a:spcPts val="500"/>
-              </a:spcAft>
-            </a:pPr>
-            <a:r>
-              <a:rPr sz="1600" b="1">
-                <a:solidFill>
-                  <a:srgbClr val="F4EFE4"/>
-                </a:solidFill>
-                <a:latin typeface="Calibri"/>
-              </a:rPr>
-              <a:t>Lo que cambia es cuánto perdieron.</a:t>
-            </a:r>
-          </a:p>
-          <a:p>
-            <a:pPr>
-              <a:lnSpc>
-                <a:spcPct val="116000"/>
-              </a:lnSpc>
-              <a:spcAft>
-                <a:spcPts val="1400"/>
-              </a:spcAft>
-            </a:pPr>
-            <a:r>
-              <a:rPr sz="1500" b="0">
-                <a:solidFill>
-                  <a:srgbClr val="F4EFE4"/>
-                </a:solidFill>
-                <a:latin typeface="Calibri"/>
-              </a:rPr>
-              <a:t>Norte y Centro quedaron 13-15% abajo de 2018; Oeste y Sur, 5-6%.</a:t>
+              <a:t>Las cuatro zonas siguieron el mismo ciclo y tocaron el pico casi al mismo tiempo, entre el tercer y el cuarto trimestre de 2023: no hubo rezagos. Las diferencias están en el ritmo. Oeste y Sur perdieron menos en términos reales (5-8%) que Norte y Centro (11-15%), así que la brecha entre zonas se achicó.</a:t>
             </a:r>
           </a:p>
         </p:txBody>

--- a/TP_instancia2_alquileres_CABA.pptx
+++ b/TP_instancia2_alquileres_CABA.pptx
@@ -3442,6 +3442,48 @@
         </p:nvSpPr>
         <p:spPr>
           <a:xfrm>
+            <a:off x="841248" y="402336"/>
+            <a:ext cx="10515600" cy="274320"/>
+          </a:xfrm>
+          <a:prstGeom prst="rect">
+            <a:avLst/>
+          </a:prstGeom>
+          <a:noFill/>
+        </p:spPr>
+        <p:txBody>
+          <a:bodyPr wrap="square" lIns="0" rIns="0" tIns="0" bIns="0" anchor="t">
+            <a:spAutoFit/>
+          </a:bodyPr>
+          <a:lstStyle/>
+          <a:p>
+            <a:pPr algn="l">
+              <a:lnSpc>
+                <a:spcPct val="100000"/>
+              </a:lnSpc>
+              <a:spcAft>
+                <a:spcPts val="0"/>
+              </a:spcAft>
+            </a:pPr>
+            <a:r>
+              <a:rPr sz="1050" b="1">
+                <a:solidFill>
+                  <a:srgbClr val="15505E"/>
+                </a:solidFill>
+                <a:latin typeface="Calibri"/>
+              </a:rPr>
+              <a:t>¿QUÉ ENCONTRAMOS?</a:t>
+            </a:r>
+          </a:p>
+        </p:txBody>
+      </p:sp>
+      <p:sp>
+        <p:nvSpPr>
+          <p:cNvPr id="5" name="TextBox 4"/>
+          <p:cNvSpPr txBox="1"/>
+          <p:nvPr/>
+        </p:nvSpPr>
+        <p:spPr>
+          <a:xfrm>
             <a:off x="822960" y="658368"/>
             <a:ext cx="10545775" cy="1463040"/>
           </a:xfrm>
@@ -3478,7 +3520,7 @@
       </p:sp>
       <p:sp>
         <p:nvSpPr>
-          <p:cNvPr id="5" name="TextBox 4"/>
+          <p:cNvPr id="6" name="TextBox 5"/>
           <p:cNvSpPr txBox="1"/>
           <p:nvPr/>
         </p:nvSpPr>
@@ -3520,7 +3562,7 @@
       </p:sp>
       <p:graphicFrame>
         <p:nvGraphicFramePr>
-          <p:cNvPr id="6" name="Table 5"/>
+          <p:cNvPr id="7" name="Table 6"/>
           <p:cNvGraphicFramePr>
             <a:graphicFrameLocks noGrp="1"/>
           </p:cNvGraphicFramePr>
@@ -4809,7 +4851,7 @@
       </p:graphicFrame>
       <p:sp>
         <p:nvSpPr>
-          <p:cNvPr id="7" name="TextBox 6"/>
+          <p:cNvPr id="8" name="TextBox 7"/>
           <p:cNvSpPr txBox="1"/>
           <p:nvPr/>
         </p:nvSpPr>
@@ -4851,7 +4893,7 @@
       </p:sp>
       <p:sp>
         <p:nvSpPr>
-          <p:cNvPr id="8" name="TextBox 7"/>
+          <p:cNvPr id="9" name="TextBox 8"/>
           <p:cNvSpPr txBox="1"/>
           <p:nvPr/>
         </p:nvSpPr>
@@ -4893,7 +4935,7 @@
       </p:sp>
       <p:graphicFrame>
         <p:nvGraphicFramePr>
-          <p:cNvPr id="9" name="Table 8"/>
+          <p:cNvPr id="10" name="Table 9"/>
           <p:cNvGraphicFramePr>
             <a:graphicFrameLocks noGrp="1"/>
           </p:cNvGraphicFramePr>
@@ -4901,7 +4943,7 @@
         </p:nvGraphicFramePr>
         <p:xfrm>
           <a:off x="6400800" y="2331720"/>
-          <a:ext cx="4937760" cy="1938528"/>
+          <a:ext cx="4937760" cy="1975104"/>
         </p:xfrm>
         <a:graphic>
           <a:graphicData uri="http://schemas.openxmlformats.org/drawingml/2006/table">
@@ -4910,27 +4952,28 @@
                 <a:tableStyleId>{5C22544A-7EE6-4342-B048-85BDC9FD1C3A}</a:tableStyleId>
               </a:tblPr>
               <a:tblGrid>
-                <a:gridCol w="1371600"/>
                 <a:gridCol w="1188720"/>
-                <a:gridCol w="1188720"/>
-                <a:gridCol w="1188720"/>
+                <a:gridCol w="914400"/>
+                <a:gridCol w="960120"/>
+                <a:gridCol w="914400"/>
+                <a:gridCol w="960120"/>
               </a:tblGrid>
-              <a:tr h="512064">
-                <a:tc>
-                  <a:txBody>
-                    <a:bodyPr wrap="square"/>
-                    <a:lstStyle/>
-                    <a:p>
-                      <a:pPr algn="ctr">
-                        <a:lnSpc>
-                          <a:spcPct val="102000"/>
-                        </a:lnSpc>
-                        <a:spcAft>
-                          <a:spcPts val="0"/>
-                        </a:spcAft>
-                      </a:pPr>
-                      <a:r>
-                        <a:rPr sz="1350" b="1">
+              <a:tr h="548640">
+                <a:tc>
+                  <a:txBody>
+                    <a:bodyPr wrap="square"/>
+                    <a:lstStyle/>
+                    <a:p>
+                      <a:pPr algn="ctr">
+                        <a:lnSpc>
+                          <a:spcPct val="102000"/>
+                        </a:lnSpc>
+                        <a:spcAft>
+                          <a:spcPts val="0"/>
+                        </a:spcAft>
+                      </a:pPr>
+                      <a:r>
+                        <a:rPr sz="1150" b="1">
                           <a:solidFill>
                             <a:srgbClr val="F4EFE4"/>
                           </a:solidFill>
@@ -4980,7 +5023,7 @@
                         </a:spcAft>
                       </a:pPr>
                       <a:r>
-                        <a:rPr sz="1350" b="1">
+                        <a:rPr sz="1150" b="1">
                           <a:solidFill>
                             <a:srgbClr val="F4EFE4"/>
                           </a:solidFill>
@@ -5030,7 +5073,7 @@
                         </a:spcAft>
                       </a:pPr>
                       <a:r>
-                        <a:rPr sz="1350" b="1">
+                        <a:rPr sz="1150" b="1">
                           <a:solidFill>
                             <a:srgbClr val="F4EFE4"/>
                           </a:solidFill>
@@ -5080,13 +5123,64 @@
                         </a:spcAft>
                       </a:pPr>
                       <a:r>
-                        <a:rPr sz="1350" b="1">
+                        <a:rPr sz="1150" b="1">
                           <a:solidFill>
                             <a:srgbClr val="F4EFE4"/>
                           </a:solidFill>
                           <a:latin typeface="Calibri"/>
                         </a:rPr>
                         <a:t>Theil</a:t>
+                      </a:r>
+                    </a:p>
+                  </a:txBody>
+                  <a:tcPr marL="91440" marR="91440" marT="36576" marB="36576" anchor="ctr">
+                    <a:lnB w="25400" cap="flat" cmpd="sng" algn="ctr">
+                      <a:solidFill>
+                        <a:srgbClr val="15505E"/>
+                      </a:solidFill>
+                    </a:lnB>
+                    <a:lnT w="25400" cap="flat" cmpd="sng" algn="ctr">
+                      <a:solidFill>
+                        <a:srgbClr val="15505E"/>
+                      </a:solidFill>
+                    </a:lnT>
+                    <a:lnR w="25400" cap="flat" cmpd="sng" algn="ctr">
+                      <a:solidFill>
+                        <a:srgbClr val="15505E"/>
+                      </a:solidFill>
+                    </a:lnR>
+                    <a:lnL w="25400" cap="flat" cmpd="sng" algn="ctr">
+                      <a:solidFill>
+                        <a:srgbClr val="15505E"/>
+                      </a:solidFill>
+                    </a:lnL>
+                    <a:solidFill>
+                      <a:srgbClr val="15505E"/>
+                    </a:solidFill>
+                  </a:tcPr>
+                </a:tc>
+                <a:tc>
+                  <a:txBody>
+                    <a:bodyPr wrap="square"/>
+                    <a:lstStyle/>
+                    <a:p>
+                      <a:pPr algn="ctr">
+                        <a:lnSpc>
+                          <a:spcPct val="102000"/>
+                        </a:lnSpc>
+                        <a:spcAft>
+                          <a:spcPts val="0"/>
+                        </a:spcAft>
+                      </a:pPr>
+                      <a:r>
+                        <a:rPr sz="1150" b="1">
+                          <a:solidFill>
+                            <a:srgbClr val="F4EFE4"/>
+                          </a:solidFill>
+                          <a:latin typeface="Calibri"/>
+                        </a:rPr>
+                        <a:t>% entre
+zonas</a:t>
                       </a:r>
                     </a:p>
                   </a:txBody>
@@ -5132,7 +5226,7 @@
                         </a:spcAft>
                       </a:pPr>
                       <a:r>
-                        <a:rPr sz="1400" b="0">
+                        <a:rPr sz="1250" b="0">
                           <a:solidFill>
                             <a:srgbClr val="15505E"/>
                           </a:solidFill>
@@ -5182,7 +5276,7 @@
                         </a:spcAft>
                       </a:pPr>
                       <a:r>
-                        <a:rPr sz="1400" b="0">
+                        <a:rPr sz="1250" b="0">
                           <a:solidFill>
                             <a:srgbClr val="15505E"/>
                           </a:solidFill>
@@ -5232,7 +5326,7 @@
                         </a:spcAft>
                       </a:pPr>
                       <a:r>
-                        <a:rPr sz="1400" b="0">
+                        <a:rPr sz="1250" b="0">
                           <a:solidFill>
                             <a:srgbClr val="15505E"/>
                           </a:solidFill>
@@ -5282,13 +5376,63 @@
                         </a:spcAft>
                       </a:pPr>
                       <a:r>
-                        <a:rPr sz="1400" b="0">
+                        <a:rPr sz="1250" b="0">
                           <a:solidFill>
                             <a:srgbClr val="15505E"/>
                           </a:solidFill>
                           <a:latin typeface="Calibri"/>
                         </a:rPr>
                         <a:t>5,98</a:t>
+                      </a:r>
+                    </a:p>
+                  </a:txBody>
+                  <a:tcPr marL="91440" marR="91440" marT="36576" marB="36576" anchor="ctr">
+                    <a:lnB w="25400" cap="flat" cmpd="sng" algn="ctr">
+                      <a:solidFill>
+                        <a:srgbClr val="15505E"/>
+                      </a:solidFill>
+                    </a:lnB>
+                    <a:lnT w="25400" cap="flat" cmpd="sng" algn="ctr">
+                      <a:solidFill>
+                        <a:srgbClr val="15505E"/>
+                      </a:solidFill>
+                    </a:lnT>
+                    <a:lnR w="25400" cap="flat" cmpd="sng" algn="ctr">
+                      <a:solidFill>
+                        <a:srgbClr val="15505E"/>
+                      </a:solidFill>
+                    </a:lnR>
+                    <a:lnL w="25400" cap="flat" cmpd="sng" algn="ctr">
+                      <a:solidFill>
+                        <a:srgbClr val="15505E"/>
+                      </a:solidFill>
+                    </a:lnL>
+                    <a:solidFill>
+                      <a:srgbClr val="F4EFE4"/>
+                    </a:solidFill>
+                  </a:tcPr>
+                </a:tc>
+                <a:tc>
+                  <a:txBody>
+                    <a:bodyPr wrap="square"/>
+                    <a:lstStyle/>
+                    <a:p>
+                      <a:pPr algn="ctr">
+                        <a:lnSpc>
+                          <a:spcPct val="102000"/>
+                        </a:lnSpc>
+                        <a:spcAft>
+                          <a:spcPts val="0"/>
+                        </a:spcAft>
+                      </a:pPr>
+                      <a:r>
+                        <a:rPr sz="1250" b="0">
+                          <a:solidFill>
+                            <a:srgbClr val="15505E"/>
+                          </a:solidFill>
+                          <a:latin typeface="Calibri"/>
+                        </a:rPr>
+                        <a:t>46%</a:t>
                       </a:r>
                     </a:p>
                   </a:txBody>
@@ -5334,7 +5478,7 @@
                         </a:spcAft>
                       </a:pPr>
                       <a:r>
-                        <a:rPr sz="1400" b="0">
+                        <a:rPr sz="1250" b="0">
                           <a:solidFill>
                             <a:srgbClr val="15505E"/>
                           </a:solidFill>
@@ -5384,7 +5528,7 @@
                         </a:spcAft>
                       </a:pPr>
                       <a:r>
-                        <a:rPr sz="1400" b="0">
+                        <a:rPr sz="1250" b="0">
                           <a:solidFill>
                             <a:srgbClr val="15505E"/>
                           </a:solidFill>
@@ -5434,7 +5578,7 @@
                         </a:spcAft>
                       </a:pPr>
                       <a:r>
-                        <a:rPr sz="1400" b="0">
+                        <a:rPr sz="1250" b="0">
                           <a:solidFill>
                             <a:srgbClr val="15505E"/>
                           </a:solidFill>
@@ -5484,13 +5628,63 @@
                         </a:spcAft>
                       </a:pPr>
                       <a:r>
-                        <a:rPr sz="1400" b="0">
+                        <a:rPr sz="1250" b="0">
                           <a:solidFill>
                             <a:srgbClr val="15505E"/>
                           </a:solidFill>
                           <a:latin typeface="Calibri"/>
                         </a:rPr>
                         <a:t>6,57</a:t>
+                      </a:r>
+                    </a:p>
+                  </a:txBody>
+                  <a:tcPr marL="91440" marR="91440" marT="36576" marB="36576" anchor="ctr">
+                    <a:lnB w="25400" cap="flat" cmpd="sng" algn="ctr">
+                      <a:solidFill>
+                        <a:srgbClr val="15505E"/>
+                      </a:solidFill>
+                    </a:lnB>
+                    <a:lnT w="25400" cap="flat" cmpd="sng" algn="ctr">
+                      <a:solidFill>
+                        <a:srgbClr val="15505E"/>
+                      </a:solidFill>
+                    </a:lnT>
+                    <a:lnR w="25400" cap="flat" cmpd="sng" algn="ctr">
+                      <a:solidFill>
+                        <a:srgbClr val="15505E"/>
+                      </a:solidFill>
+                    </a:lnR>
+                    <a:lnL w="25400" cap="flat" cmpd="sng" algn="ctr">
+                      <a:solidFill>
+                        <a:srgbClr val="15505E"/>
+                      </a:solidFill>
+                    </a:lnL>
+                    <a:solidFill>
+                      <a:srgbClr val="F4EFE4"/>
+                    </a:solidFill>
+                  </a:tcPr>
+                </a:tc>
+                <a:tc>
+                  <a:txBody>
+                    <a:bodyPr wrap="square"/>
+                    <a:lstStyle/>
+                    <a:p>
+                      <a:pPr algn="ctr">
+                        <a:lnSpc>
+                          <a:spcPct val="102000"/>
+                        </a:lnSpc>
+                        <a:spcAft>
+                          <a:spcPts val="0"/>
+                        </a:spcAft>
+                      </a:pPr>
+                      <a:r>
+                        <a:rPr sz="1250" b="0">
+                          <a:solidFill>
+                            <a:srgbClr val="15505E"/>
+                          </a:solidFill>
+                          <a:latin typeface="Calibri"/>
+                        </a:rPr>
+                        <a:t>24%</a:t>
                       </a:r>
                     </a:p>
                   </a:txBody>
@@ -5536,7 +5730,7 @@
                         </a:spcAft>
                       </a:pPr>
                       <a:r>
-                        <a:rPr sz="1400" b="0">
+                        <a:rPr sz="1250" b="0">
                           <a:solidFill>
                             <a:srgbClr val="15505E"/>
                           </a:solidFill>
@@ -5586,7 +5780,7 @@
                         </a:spcAft>
                       </a:pPr>
                       <a:r>
-                        <a:rPr sz="1400" b="0">
+                        <a:rPr sz="1250" b="0">
                           <a:solidFill>
                             <a:srgbClr val="15505E"/>
                           </a:solidFill>
@@ -5636,7 +5830,7 @@
                         </a:spcAft>
                       </a:pPr>
                       <a:r>
-                        <a:rPr sz="1400" b="0">
+                        <a:rPr sz="1250" b="0">
                           <a:solidFill>
                             <a:srgbClr val="15505E"/>
                           </a:solidFill>
@@ -5686,13 +5880,63 @@
                         </a:spcAft>
                       </a:pPr>
                       <a:r>
-                        <a:rPr sz="1400" b="0">
+                        <a:rPr sz="1250" b="0">
                           <a:solidFill>
                             <a:srgbClr val="15505E"/>
                           </a:solidFill>
                           <a:latin typeface="Calibri"/>
                         </a:rPr>
                         <a:t>3,65</a:t>
+                      </a:r>
+                    </a:p>
+                  </a:txBody>
+                  <a:tcPr marL="91440" marR="91440" marT="36576" marB="36576" anchor="ctr">
+                    <a:lnB w="25400" cap="flat" cmpd="sng" algn="ctr">
+                      <a:solidFill>
+                        <a:srgbClr val="15505E"/>
+                      </a:solidFill>
+                    </a:lnB>
+                    <a:lnT w="25400" cap="flat" cmpd="sng" algn="ctr">
+                      <a:solidFill>
+                        <a:srgbClr val="15505E"/>
+                      </a:solidFill>
+                    </a:lnT>
+                    <a:lnR w="25400" cap="flat" cmpd="sng" algn="ctr">
+                      <a:solidFill>
+                        <a:srgbClr val="15505E"/>
+                      </a:solidFill>
+                    </a:lnR>
+                    <a:lnL w="25400" cap="flat" cmpd="sng" algn="ctr">
+                      <a:solidFill>
+                        <a:srgbClr val="15505E"/>
+                      </a:solidFill>
+                    </a:lnL>
+                    <a:solidFill>
+                      <a:srgbClr val="F4EFE4"/>
+                    </a:solidFill>
+                  </a:tcPr>
+                </a:tc>
+                <a:tc>
+                  <a:txBody>
+                    <a:bodyPr wrap="square"/>
+                    <a:lstStyle/>
+                    <a:p>
+                      <a:pPr algn="ctr">
+                        <a:lnSpc>
+                          <a:spcPct val="102000"/>
+                        </a:lnSpc>
+                        <a:spcAft>
+                          <a:spcPts val="0"/>
+                        </a:spcAft>
+                      </a:pPr>
+                      <a:r>
+                        <a:rPr sz="1250" b="0">
+                          <a:solidFill>
+                            <a:srgbClr val="15505E"/>
+                          </a:solidFill>
+                          <a:latin typeface="Calibri"/>
+                        </a:rPr>
+                        <a:t>44%</a:t>
                       </a:r>
                     </a:p>
                   </a:txBody>
@@ -5729,14 +5973,14 @@
       </p:graphicFrame>
       <p:sp>
         <p:nvSpPr>
-          <p:cNvPr id="10" name="TextBox 9"/>
+          <p:cNvPr id="11" name="TextBox 10"/>
           <p:cNvSpPr txBox="1"/>
           <p:nvPr/>
         </p:nvSpPr>
         <p:spPr>
           <a:xfrm>
             <a:off x="6400800" y="4480560"/>
-            <a:ext cx="4937760" cy="1645920"/>
+            <a:ext cx="4937760" cy="1783080"/>
           </a:xfrm>
           <a:prstGeom prst="rect">
             <a:avLst/>
@@ -5754,17 +5998,45 @@
                 <a:spcPct val="116000"/>
               </a:lnSpc>
               <a:spcAft>
-                <a:spcPts val="1300"/>
+                <a:spcPts val="900"/>
               </a:spcAft>
             </a:pPr>
             <a:r>
-              <a:rPr sz="1600" b="0">
+              <a:rPr sz="1450" b="0">
                 <a:solidFill>
                   <a:srgbClr val="15505E"/>
                 </a:solidFill>
                 <a:latin typeface="Calibri"/>
               </a:rPr>
-              <a:t>El precio real fue más alto durante la ley (107 contra 92 y 90). Pero si sacamos 2023 cae a 98: buena parte de ese pico es el salto inflacionario, no la ley.</a:t>
+              <a:t>El precio real fue más alto durante la ley (107 contra 92 y 90). Pero si sacamos 2023 cae a 98: buena parte de ese pico es el salto inflacionario.</a:t>
+            </a:r>
+          </a:p>
+          <a:p>
+            <a:pPr>
+              <a:lnSpc>
+                <a:spcPct val="116000"/>
+              </a:lnSpc>
+              <a:spcAft>
+                <a:spcPts val="900"/>
+              </a:spcAft>
+            </a:pPr>
+            <a:r>
+              <a:rPr sz="1450" b="1">
+                <a:solidFill>
+                  <a:srgbClr val="15505E"/>
+                </a:solidFill>
+                <a:latin typeface="Calibri"/>
+              </a:rPr>
+              <a:t>Descompusimos el Theil. </a:t>
+            </a:r>
+            <a:r>
+              <a:rPr sz="1450" b="0">
+                <a:solidFill>
+                  <a:srgbClr val="15505E"/>
+                </a:solidFill>
+                <a:latin typeface="Calibri"/>
+              </a:rPr>
+              <a:t>Durante la ley solo el 24% de la desigualdad de precios era entre zonas: el resto estaba dentro de cada zona. Antes y después, casi la mitad.</a:t>
             </a:r>
           </a:p>
         </p:txBody>
@@ -5865,6 +6137,48 @@
         </p:nvSpPr>
         <p:spPr>
           <a:xfrm>
+            <a:off x="841248" y="402336"/>
+            <a:ext cx="10515600" cy="274320"/>
+          </a:xfrm>
+          <a:prstGeom prst="rect">
+            <a:avLst/>
+          </a:prstGeom>
+          <a:noFill/>
+        </p:spPr>
+        <p:txBody>
+          <a:bodyPr wrap="square" lIns="0" rIns="0" tIns="0" bIns="0" anchor="t">
+            <a:spAutoFit/>
+          </a:bodyPr>
+          <a:lstStyle/>
+          <a:p>
+            <a:pPr algn="l">
+              <a:lnSpc>
+                <a:spcPct val="100000"/>
+              </a:lnSpc>
+              <a:spcAft>
+                <a:spcPts val="0"/>
+              </a:spcAft>
+            </a:pPr>
+            <a:r>
+              <a:rPr sz="1050" b="1">
+                <a:solidFill>
+                  <a:srgbClr val="F4EFE4"/>
+                </a:solidFill>
+                <a:latin typeface="Calibri"/>
+              </a:rPr>
+              <a:t>¿QUÉ ENCONTRAMOS?</a:t>
+            </a:r>
+          </a:p>
+        </p:txBody>
+      </p:sp>
+      <p:sp>
+        <p:nvSpPr>
+          <p:cNvPr id="5" name="TextBox 4"/>
+          <p:cNvSpPr txBox="1"/>
+          <p:nvPr/>
+        </p:nvSpPr>
+        <p:spPr>
+          <a:xfrm>
             <a:off x="822960" y="658368"/>
             <a:ext cx="10545775" cy="1463040"/>
           </a:xfrm>
@@ -5901,7 +6215,7 @@
       </p:sp>
       <p:pic>
         <p:nvPicPr>
-          <p:cNvPr id="5" name="Picture 4" descr="i2_g02_indice_real.png"/>
+          <p:cNvPr id="6" name="Picture 5" descr="i2_g02_indice_real.png"/>
           <p:cNvPicPr>
             <a:picLocks noChangeAspect="1"/>
           </p:cNvPicPr>
@@ -5925,7 +6239,7 @@
       </p:pic>
       <p:pic>
         <p:nvPicPr>
-          <p:cNvPr id="6" name="Picture 5" descr="i2_g03_theil.png"/>
+          <p:cNvPr id="7" name="Picture 6" descr="i2_g03_theil.png"/>
           <p:cNvPicPr>
             <a:picLocks noChangeAspect="1"/>
           </p:cNvPicPr>
@@ -5949,7 +6263,7 @@
       </p:pic>
       <p:sp>
         <p:nvSpPr>
-          <p:cNvPr id="7" name="TextBox 6"/>
+          <p:cNvPr id="8" name="TextBox 7"/>
           <p:cNvSpPr txBox="1"/>
           <p:nvPr/>
         </p:nvSpPr>
@@ -6094,6 +6408,48 @@
         </p:nvSpPr>
         <p:spPr>
           <a:xfrm>
+            <a:off x="841248" y="402336"/>
+            <a:ext cx="10515600" cy="274320"/>
+          </a:xfrm>
+          <a:prstGeom prst="rect">
+            <a:avLst/>
+          </a:prstGeom>
+          <a:noFill/>
+        </p:spPr>
+        <p:txBody>
+          <a:bodyPr wrap="square" lIns="0" rIns="0" tIns="0" bIns="0" anchor="t">
+            <a:spAutoFit/>
+          </a:bodyPr>
+          <a:lstStyle/>
+          <a:p>
+            <a:pPr algn="l">
+              <a:lnSpc>
+                <a:spcPct val="100000"/>
+              </a:lnSpc>
+              <a:spcAft>
+                <a:spcPts val="0"/>
+              </a:spcAft>
+            </a:pPr>
+            <a:r>
+              <a:rPr sz="1050" b="1">
+                <a:solidFill>
+                  <a:srgbClr val="15505E"/>
+                </a:solidFill>
+                <a:latin typeface="Calibri"/>
+              </a:rPr>
+              <a:t>¿QUÉ MÉTODO APLICAMOS Y POR QUÉ?</a:t>
+            </a:r>
+          </a:p>
+        </p:txBody>
+      </p:sp>
+      <p:sp>
+        <p:nvSpPr>
+          <p:cNvPr id="5" name="TextBox 4"/>
+          <p:cNvSpPr txBox="1"/>
+          <p:nvPr/>
+        </p:nvSpPr>
+        <p:spPr>
+          <a:xfrm>
             <a:off x="822960" y="658368"/>
             <a:ext cx="10545775" cy="1463040"/>
           </a:xfrm>
@@ -6130,7 +6486,7 @@
       </p:sp>
       <p:sp>
         <p:nvSpPr>
-          <p:cNvPr id="5" name="TextBox 4"/>
+          <p:cNvPr id="6" name="TextBox 5"/>
           <p:cNvSpPr txBox="1"/>
           <p:nvPr/>
         </p:nvSpPr>
@@ -6229,7 +6585,7 @@
       </p:sp>
       <p:graphicFrame>
         <p:nvGraphicFramePr>
-          <p:cNvPr id="6" name="Table 5"/>
+          <p:cNvPr id="7" name="Table 6"/>
           <p:cNvGraphicFramePr>
             <a:graphicFrameLocks noGrp="1"/>
           </p:cNvGraphicFramePr>
@@ -7267,7 +7623,7 @@
       </p:graphicFrame>
       <p:sp>
         <p:nvSpPr>
-          <p:cNvPr id="7" name="TextBox 6"/>
+          <p:cNvPr id="8" name="TextBox 7"/>
           <p:cNvSpPr txBox="1"/>
           <p:nvPr/>
         </p:nvSpPr>
@@ -7403,6 +7759,48 @@
         </p:nvSpPr>
         <p:spPr>
           <a:xfrm>
+            <a:off x="841248" y="402336"/>
+            <a:ext cx="10515600" cy="274320"/>
+          </a:xfrm>
+          <a:prstGeom prst="rect">
+            <a:avLst/>
+          </a:prstGeom>
+          <a:noFill/>
+        </p:spPr>
+        <p:txBody>
+          <a:bodyPr wrap="square" lIns="0" rIns="0" tIns="0" bIns="0" anchor="t">
+            <a:spAutoFit/>
+          </a:bodyPr>
+          <a:lstStyle/>
+          <a:p>
+            <a:pPr algn="l">
+              <a:lnSpc>
+                <a:spcPct val="100000"/>
+              </a:lnSpc>
+              <a:spcAft>
+                <a:spcPts val="0"/>
+              </a:spcAft>
+            </a:pPr>
+            <a:r>
+              <a:rPr sz="1050" b="1">
+                <a:solidFill>
+                  <a:srgbClr val="F4EFE4"/>
+                </a:solidFill>
+                <a:latin typeface="Calibri"/>
+              </a:rPr>
+              <a:t>¿QUÉ MÉTODO APLICAMOS Y POR QUÉ?</a:t>
+            </a:r>
+          </a:p>
+        </p:txBody>
+      </p:sp>
+      <p:sp>
+        <p:nvSpPr>
+          <p:cNvPr id="5" name="TextBox 4"/>
+          <p:cNvSpPr txBox="1"/>
+          <p:nvPr/>
+        </p:nvSpPr>
+        <p:spPr>
+          <a:xfrm>
             <a:off x="822960" y="777240"/>
             <a:ext cx="5486400" cy="1463040"/>
           </a:xfrm>
@@ -7439,7 +7837,7 @@
       </p:sp>
       <p:sp>
         <p:nvSpPr>
-          <p:cNvPr id="5" name="TextBox 4"/>
+          <p:cNvPr id="6" name="TextBox 5"/>
           <p:cNvSpPr txBox="1"/>
           <p:nvPr/>
         </p:nvSpPr>
@@ -7500,7 +7898,7 @@
       </p:sp>
       <p:graphicFrame>
         <p:nvGraphicFramePr>
-          <p:cNvPr id="6" name="Table 5"/>
+          <p:cNvPr id="7" name="Table 6"/>
           <p:cNvGraphicFramePr>
             <a:graphicFrameLocks noGrp="1"/>
           </p:cNvGraphicFramePr>
@@ -8287,7 +8685,7 @@
       </p:graphicFrame>
       <p:pic>
         <p:nvPicPr>
-          <p:cNvPr id="7" name="Picture 6" descr="i2_g05_beta_por_zona.png"/>
+          <p:cNvPr id="8" name="Picture 7" descr="i2_g05_beta_por_zona.png"/>
           <p:cNvPicPr>
             <a:picLocks noChangeAspect="1"/>
           </p:cNvPicPr>
@@ -8301,8 +8699,8 @@
         </p:blipFill>
         <p:spPr>
           <a:xfrm>
-            <a:off x="6537960" y="1508760"/>
-            <a:ext cx="4800600" cy="2987040"/>
+            <a:off x="6629400" y="1463040"/>
+            <a:ext cx="4617720" cy="2873248"/>
           </a:xfrm>
           <a:prstGeom prst="rect">
             <a:avLst/>
@@ -8311,14 +8709,14 @@
       </p:pic>
       <p:sp>
         <p:nvSpPr>
-          <p:cNvPr id="8" name="TextBox 7"/>
+          <p:cNvPr id="9" name="TextBox 8"/>
           <p:cNvSpPr txBox="1"/>
           <p:nvPr/>
         </p:nvSpPr>
         <p:spPr>
           <a:xfrm>
-            <a:off x="6537960" y="4663440"/>
-            <a:ext cx="4800600" cy="1463040"/>
+            <a:off x="6537960" y="4498848"/>
+            <a:ext cx="4800600" cy="1737360"/>
           </a:xfrm>
           <a:prstGeom prst="rect">
             <a:avLst/>
@@ -8340,7 +8738,7 @@
               </a:spcAft>
             </a:pPr>
             <a:r>
-              <a:rPr sz="1500" b="1">
+              <a:rPr sz="1450" b="1">
                 <a:solidFill>
                   <a:srgbClr val="F4EFE4"/>
                 </a:solidFill>
@@ -8349,13 +8747,13 @@
               <a:t>El ANOVA da significativo (p = 0,042) pero no resiste las versiones robustas: </a:t>
             </a:r>
             <a:r>
-              <a:rPr sz="1500" b="0">
+              <a:rPr sz="1450" b="0">
                 <a:solidFill>
                   <a:srgbClr val="F4EFE4"/>
                 </a:solidFill>
                 <a:latin typeface="Calibri"/>
               </a:rPr>
-              <a:t>con Welch y Kruskal-Wallis sube a 0,11. Los supuestos se cumplen. El problema es que agrupar por zona pierde información: son muy heterogéneas por dentro.</a:t>
+              <a:t>con Welch y Kruskal-Wallis sube a 0,11. Los supuestos se cumplen. El post-hoc de Tukey no encuentra ningún par de zonas significativo al 5%: el más cercano es Oeste-Norte (p = 0,059). Agrupar por zona pierde información: son muy heterogéneas por dentro.</a:t>
             </a:r>
           </a:p>
         </p:txBody>
@@ -8456,6 +8854,48 @@
         </p:nvSpPr>
         <p:spPr>
           <a:xfrm>
+            <a:off x="841248" y="402336"/>
+            <a:ext cx="10515600" cy="274320"/>
+          </a:xfrm>
+          <a:prstGeom prst="rect">
+            <a:avLst/>
+          </a:prstGeom>
+          <a:noFill/>
+        </p:spPr>
+        <p:txBody>
+          <a:bodyPr wrap="square" lIns="0" rIns="0" tIns="0" bIns="0" anchor="t">
+            <a:spAutoFit/>
+          </a:bodyPr>
+          <a:lstStyle/>
+          <a:p>
+            <a:pPr algn="l">
+              <a:lnSpc>
+                <a:spcPct val="100000"/>
+              </a:lnSpc>
+              <a:spcAft>
+                <a:spcPts val="0"/>
+              </a:spcAft>
+            </a:pPr>
+            <a:r>
+              <a:rPr sz="1050" b="1">
+                <a:solidFill>
+                  <a:srgbClr val="15505E"/>
+                </a:solidFill>
+                <a:latin typeface="Calibri"/>
+              </a:rPr>
+              <a:t>¿QUÉ ENCONTRAMOS?</a:t>
+            </a:r>
+          </a:p>
+        </p:txBody>
+      </p:sp>
+      <p:sp>
+        <p:nvSpPr>
+          <p:cNvPr id="5" name="TextBox 4"/>
+          <p:cNvSpPr txBox="1"/>
+          <p:nvPr/>
+        </p:nvSpPr>
+        <p:spPr>
+          <a:xfrm>
             <a:off x="7635240" y="1417320"/>
             <a:ext cx="3703320" cy="1463040"/>
           </a:xfrm>
@@ -8492,7 +8932,7 @@
       </p:sp>
       <p:pic>
         <p:nvPicPr>
-          <p:cNvPr id="5" name="Picture 4" descr="i2_g04_beta_vs_nivel.png"/>
+          <p:cNvPr id="6" name="Picture 5" descr="i2_g04_beta_vs_nivel.png"/>
           <p:cNvPicPr>
             <a:picLocks noChangeAspect="1"/>
           </p:cNvPicPr>
@@ -8516,7 +8956,7 @@
       </p:pic>
       <p:sp>
         <p:nvSpPr>
-          <p:cNvPr id="6" name="TextBox 5"/>
+          <p:cNvPr id="7" name="TextBox 6"/>
           <p:cNvSpPr txBox="1"/>
           <p:nvPr/>
         </p:nvSpPr>
@@ -8577,7 +9017,7 @@
       </p:sp>
       <p:graphicFrame>
         <p:nvGraphicFramePr>
-          <p:cNvPr id="7" name="Table 6"/>
+          <p:cNvPr id="8" name="Table 7"/>
           <p:cNvGraphicFramePr>
             <a:graphicFrameLocks noGrp="1"/>
           </p:cNvGraphicFramePr>
@@ -9458,6 +9898,48 @@
         </p:nvSpPr>
         <p:spPr>
           <a:xfrm>
+            <a:off x="841248" y="402336"/>
+            <a:ext cx="10515600" cy="274320"/>
+          </a:xfrm>
+          <a:prstGeom prst="rect">
+            <a:avLst/>
+          </a:prstGeom>
+          <a:noFill/>
+        </p:spPr>
+        <p:txBody>
+          <a:bodyPr wrap="square" lIns="0" rIns="0" tIns="0" bIns="0" anchor="t">
+            <a:spAutoFit/>
+          </a:bodyPr>
+          <a:lstStyle/>
+          <a:p>
+            <a:pPr algn="l">
+              <a:lnSpc>
+                <a:spcPct val="100000"/>
+              </a:lnSpc>
+              <a:spcAft>
+                <a:spcPts val="0"/>
+              </a:spcAft>
+            </a:pPr>
+            <a:r>
+              <a:rPr sz="1050" b="1">
+                <a:solidFill>
+                  <a:srgbClr val="F4EFE4"/>
+                </a:solidFill>
+                <a:latin typeface="Calibri"/>
+              </a:rPr>
+              <a:t>¿QUÉ ENCONTRAMOS?</a:t>
+            </a:r>
+          </a:p>
+        </p:txBody>
+      </p:sp>
+      <p:sp>
+        <p:nvSpPr>
+          <p:cNvPr id="5" name="TextBox 4"/>
+          <p:cNvSpPr txBox="1"/>
+          <p:nvPr/>
+        </p:nvSpPr>
+        <p:spPr>
+          <a:xfrm>
             <a:off x="822960" y="658368"/>
             <a:ext cx="10545775" cy="1463040"/>
           </a:xfrm>
@@ -9494,7 +9976,7 @@
       </p:sp>
       <p:pic>
         <p:nvPicPr>
-          <p:cNvPr id="5" name="Picture 4" descr="i2_g06_asimetria.png"/>
+          <p:cNvPr id="6" name="Picture 5" descr="i2_g06_asimetria.png"/>
           <p:cNvPicPr>
             <a:picLocks noChangeAspect="1"/>
           </p:cNvPicPr>
@@ -9518,7 +10000,7 @@
       </p:pic>
       <p:sp>
         <p:nvSpPr>
-          <p:cNvPr id="6" name="TextBox 5"/>
+          <p:cNvPr id="7" name="TextBox 6"/>
           <p:cNvSpPr txBox="1"/>
           <p:nvPr/>
         </p:nvSpPr>
@@ -9711,6 +10193,48 @@
         </p:nvSpPr>
         <p:spPr>
           <a:xfrm>
+            <a:off x="841248" y="402336"/>
+            <a:ext cx="10515600" cy="274320"/>
+          </a:xfrm>
+          <a:prstGeom prst="rect">
+            <a:avLst/>
+          </a:prstGeom>
+          <a:noFill/>
+        </p:spPr>
+        <p:txBody>
+          <a:bodyPr wrap="square" lIns="0" rIns="0" tIns="0" bIns="0" anchor="t">
+            <a:spAutoFit/>
+          </a:bodyPr>
+          <a:lstStyle/>
+          <a:p>
+            <a:pPr algn="l">
+              <a:lnSpc>
+                <a:spcPct val="100000"/>
+              </a:lnSpc>
+              <a:spcAft>
+                <a:spcPts val="0"/>
+              </a:spcAft>
+            </a:pPr>
+            <a:r>
+              <a:rPr sz="1050" b="1">
+                <a:solidFill>
+                  <a:srgbClr val="15505E"/>
+                </a:solidFill>
+                <a:latin typeface="Calibri"/>
+              </a:rPr>
+              <a:t>¿QUÉ SIGNIFICA PARA NUESTRA HIPÓTESIS?</a:t>
+            </a:r>
+          </a:p>
+        </p:txBody>
+      </p:sp>
+      <p:sp>
+        <p:nvSpPr>
+          <p:cNvPr id="5" name="TextBox 4"/>
+          <p:cNvSpPr txBox="1"/>
+          <p:nvPr/>
+        </p:nvSpPr>
+        <p:spPr>
+          <a:xfrm>
             <a:off x="822960" y="777240"/>
             <a:ext cx="5760720" cy="1463040"/>
           </a:xfrm>
@@ -9747,7 +10271,7 @@
       </p:sp>
       <p:sp>
         <p:nvSpPr>
-          <p:cNvPr id="5" name="TextBox 4"/>
+          <p:cNvPr id="6" name="TextBox 5"/>
           <p:cNvSpPr txBox="1"/>
           <p:nvPr/>
         </p:nvSpPr>
@@ -9884,7 +10408,7 @@
       </p:sp>
       <p:sp>
         <p:nvSpPr>
-          <p:cNvPr id="6" name="TextBox 5"/>
+          <p:cNvPr id="7" name="TextBox 6"/>
           <p:cNvSpPr txBox="1"/>
           <p:nvPr/>
         </p:nvSpPr>
@@ -9926,7 +10450,7 @@
       </p:sp>
       <p:sp>
         <p:nvSpPr>
-          <p:cNvPr id="7" name="TextBox 6"/>
+          <p:cNvPr id="8" name="TextBox 7"/>
           <p:cNvSpPr txBox="1"/>
           <p:nvPr/>
         </p:nvSpPr>
@@ -10100,6 +10624,48 @@
         </p:nvSpPr>
         <p:spPr>
           <a:xfrm>
+            <a:off x="841248" y="402336"/>
+            <a:ext cx="10515600" cy="274320"/>
+          </a:xfrm>
+          <a:prstGeom prst="rect">
+            <a:avLst/>
+          </a:prstGeom>
+          <a:noFill/>
+        </p:spPr>
+        <p:txBody>
+          <a:bodyPr wrap="square" lIns="0" rIns="0" tIns="0" bIns="0" anchor="t">
+            <a:spAutoFit/>
+          </a:bodyPr>
+          <a:lstStyle/>
+          <a:p>
+            <a:pPr algn="l">
+              <a:lnSpc>
+                <a:spcPct val="100000"/>
+              </a:lnSpc>
+              <a:spcAft>
+                <a:spcPts val="0"/>
+              </a:spcAft>
+            </a:pPr>
+            <a:r>
+              <a:rPr sz="1050" b="1">
+                <a:solidFill>
+                  <a:srgbClr val="15505E"/>
+                </a:solidFill>
+                <a:latin typeface="Calibri"/>
+              </a:rPr>
+              <a:t>¿DE DÓNDE VENIMOS?</a:t>
+            </a:r>
+          </a:p>
+        </p:txBody>
+      </p:sp>
+      <p:sp>
+        <p:nvSpPr>
+          <p:cNvPr id="5" name="TextBox 4"/>
+          <p:cNvSpPr txBox="1"/>
+          <p:nvPr/>
+        </p:nvSpPr>
+        <p:spPr>
+          <a:xfrm>
             <a:off x="822960" y="658368"/>
             <a:ext cx="10545775" cy="1463040"/>
           </a:xfrm>
@@ -10136,7 +10702,7 @@
       </p:sp>
       <p:sp>
         <p:nvSpPr>
-          <p:cNvPr id="5" name="TextBox 4"/>
+          <p:cNvPr id="6" name="TextBox 5"/>
           <p:cNvSpPr txBox="1"/>
           <p:nvPr/>
         </p:nvSpPr>
@@ -10187,7 +10753,7 @@
       </p:sp>
       <p:graphicFrame>
         <p:nvGraphicFramePr>
-          <p:cNvPr id="6" name="Table 5"/>
+          <p:cNvPr id="7" name="Table 6"/>
           <p:cNvGraphicFramePr>
             <a:graphicFrameLocks noGrp="1"/>
           </p:cNvGraphicFramePr>
@@ -16657,7 +17223,7 @@
       </p:graphicFrame>
       <p:sp>
         <p:nvSpPr>
-          <p:cNvPr id="7" name="TextBox 6"/>
+          <p:cNvPr id="8" name="TextBox 7"/>
           <p:cNvSpPr txBox="1"/>
           <p:nvPr/>
         </p:nvSpPr>
@@ -16793,6 +17359,48 @@
         </p:nvSpPr>
         <p:spPr>
           <a:xfrm>
+            <a:off x="841248" y="402336"/>
+            <a:ext cx="10515600" cy="274320"/>
+          </a:xfrm>
+          <a:prstGeom prst="rect">
+            <a:avLst/>
+          </a:prstGeom>
+          <a:noFill/>
+        </p:spPr>
+        <p:txBody>
+          <a:bodyPr wrap="square" lIns="0" rIns="0" tIns="0" bIns="0" anchor="t">
+            <a:spAutoFit/>
+          </a:bodyPr>
+          <a:lstStyle/>
+          <a:p>
+            <a:pPr algn="l">
+              <a:lnSpc>
+                <a:spcPct val="100000"/>
+              </a:lnSpc>
+              <a:spcAft>
+                <a:spcPts val="0"/>
+              </a:spcAft>
+            </a:pPr>
+            <a:r>
+              <a:rPr sz="1050" b="1">
+                <a:solidFill>
+                  <a:srgbClr val="F4EFE4"/>
+                </a:solidFill>
+                <a:latin typeface="Calibri"/>
+              </a:rPr>
+              <a:t>¿DE DÓNDE VENIMOS?</a:t>
+            </a:r>
+          </a:p>
+        </p:txBody>
+      </p:sp>
+      <p:sp>
+        <p:nvSpPr>
+          <p:cNvPr id="5" name="TextBox 4"/>
+          <p:cNvSpPr txBox="1"/>
+          <p:nvPr/>
+        </p:nvSpPr>
+        <p:spPr>
+          <a:xfrm>
             <a:off x="822960" y="658368"/>
             <a:ext cx="10545775" cy="1463040"/>
           </a:xfrm>
@@ -16829,7 +17437,7 @@
       </p:sp>
       <p:sp>
         <p:nvSpPr>
-          <p:cNvPr id="5" name="TextBox 4"/>
+          <p:cNvPr id="6" name="TextBox 5"/>
           <p:cNvSpPr txBox="1"/>
           <p:nvPr/>
         </p:nvSpPr>
@@ -16880,7 +17488,7 @@
       </p:sp>
       <p:graphicFrame>
         <p:nvGraphicFramePr>
-          <p:cNvPr id="6" name="Table 5"/>
+          <p:cNvPr id="7" name="Table 6"/>
           <p:cNvGraphicFramePr>
             <a:graphicFrameLocks noGrp="1"/>
           </p:cNvGraphicFramePr>
@@ -17930,7 +18538,7 @@
       </p:graphicFrame>
       <p:sp>
         <p:nvSpPr>
-          <p:cNvPr id="7" name="TextBox 6"/>
+          <p:cNvPr id="8" name="TextBox 7"/>
           <p:cNvSpPr txBox="1"/>
           <p:nvPr/>
         </p:nvSpPr>
@@ -18075,6 +18683,48 @@
         </p:nvSpPr>
         <p:spPr>
           <a:xfrm>
+            <a:off x="841248" y="402336"/>
+            <a:ext cx="10515600" cy="274320"/>
+          </a:xfrm>
+          <a:prstGeom prst="rect">
+            <a:avLst/>
+          </a:prstGeom>
+          <a:noFill/>
+        </p:spPr>
+        <p:txBody>
+          <a:bodyPr wrap="square" lIns="0" rIns="0" tIns="0" bIns="0" anchor="t">
+            <a:spAutoFit/>
+          </a:bodyPr>
+          <a:lstStyle/>
+          <a:p>
+            <a:pPr algn="l">
+              <a:lnSpc>
+                <a:spcPct val="100000"/>
+              </a:lnSpc>
+              <a:spcAft>
+                <a:spcPts val="0"/>
+              </a:spcAft>
+            </a:pPr>
+            <a:r>
+              <a:rPr sz="1050" b="1">
+                <a:solidFill>
+                  <a:srgbClr val="15505E"/>
+                </a:solidFill>
+                <a:latin typeface="Calibri"/>
+              </a:rPr>
+              <a:t>¿DE DÓNDE VENIMOS?</a:t>
+            </a:r>
+          </a:p>
+        </p:txBody>
+      </p:sp>
+      <p:sp>
+        <p:nvSpPr>
+          <p:cNvPr id="5" name="TextBox 4"/>
+          <p:cNvSpPr txBox="1"/>
+          <p:nvPr/>
+        </p:nvSpPr>
+        <p:spPr>
+          <a:xfrm>
             <a:off x="822960" y="658368"/>
             <a:ext cx="10545775" cy="1463040"/>
           </a:xfrm>
@@ -18111,14 +18761,14 @@
       </p:sp>
       <p:sp>
         <p:nvSpPr>
-          <p:cNvPr id="5" name="TextBox 4"/>
+          <p:cNvPr id="6" name="TextBox 5"/>
           <p:cNvSpPr txBox="1"/>
           <p:nvPr/>
         </p:nvSpPr>
         <p:spPr>
           <a:xfrm>
-            <a:off x="822960" y="1965960"/>
-            <a:ext cx="10515600" cy="731520"/>
+            <a:off x="822960" y="1554480"/>
+            <a:ext cx="10515600" cy="1371600"/>
           </a:xfrm>
           <a:prstGeom prst="rect">
             <a:avLst/>
@@ -18136,31 +18786,68 @@
                 <a:spcPct val="116000"/>
               </a:lnSpc>
               <a:spcAft>
-                <a:spcPts val="1300"/>
+                <a:spcPts val="800"/>
               </a:spcAft>
             </a:pPr>
             <a:r>
-              <a:rPr sz="1700" b="0">
+              <a:rPr sz="1450" b="1">
                 <a:solidFill>
                   <a:srgbClr val="15505E"/>
                 </a:solidFill>
                 <a:latin typeface="Calibri"/>
               </a:rPr>
-              <a:t>Decir que la jerarquía de precios entre comunas es estable describe, pero no explica nada. Buscamos dos regularidades que sí pidan una explicación.</a:t>
+              <a:t>La base. </a:t>
+            </a:r>
+            <a:r>
+              <a:rPr sz="1450" b="0">
+                <a:solidFill>
+                  <a:srgbClr val="15505E"/>
+                </a:solidFill>
+                <a:latin typeface="Calibri"/>
+              </a:rPr>
+              <a:t>Precio promedio de publicación de departamentos en alquiler por comuna, del Instituto de Estadística y Censos de la Ciudad, con datos de Argenprop. Cada observación es una comuna, para un tipo de departamento, en un trimestre: 1.530 en total, entre 2018-T1 y 2026-T2.</a:t>
+            </a:r>
+          </a:p>
+          <a:p>
+            <a:pPr>
+              <a:lnSpc>
+                <a:spcPct val="116000"/>
+              </a:lnSpc>
+              <a:spcAft>
+                <a:spcPts val="800"/>
+              </a:spcAft>
+            </a:pPr>
+            <a:r>
+              <a:rPr sz="1450" b="1">
+                <a:solidFill>
+                  <a:srgbClr val="15505E"/>
+                </a:solidFill>
+                <a:latin typeface="Calibri"/>
+              </a:rPr>
+              <a:t>Antes teníamos una hipótesis descriptiva. </a:t>
+            </a:r>
+            <a:r>
+              <a:rPr sz="1450" b="0">
+                <a:solidFill>
+                  <a:srgbClr val="15505E"/>
+                </a:solidFill>
+                <a:latin typeface="Calibri"/>
+              </a:rPr>
+              <a:t>Decíamos que la jerarquía de precios entre comunas es estable. Describe, pero no explica nada: le pasa a casi cualquier ciudad.</a:t>
             </a:r>
           </a:p>
         </p:txBody>
       </p:sp>
       <p:sp>
         <p:nvSpPr>
-          <p:cNvPr id="6" name="TextBox 5"/>
+          <p:cNvPr id="7" name="TextBox 6"/>
           <p:cNvSpPr txBox="1"/>
           <p:nvPr/>
         </p:nvSpPr>
         <p:spPr>
           <a:xfrm>
-            <a:off x="822960" y="3017520"/>
-            <a:ext cx="5029200" cy="2834640"/>
+            <a:off x="822960" y="3063240"/>
+            <a:ext cx="5029200" cy="2697480"/>
           </a:xfrm>
           <a:prstGeom prst="rect">
             <a:avLst/>
@@ -18214,14 +18901,14 @@
       </p:sp>
       <p:sp>
         <p:nvSpPr>
-          <p:cNvPr id="7" name="TextBox 6"/>
+          <p:cNvPr id="8" name="TextBox 7"/>
           <p:cNvSpPr txBox="1"/>
           <p:nvPr/>
         </p:nvSpPr>
         <p:spPr>
           <a:xfrm>
-            <a:off x="6355080" y="3017520"/>
-            <a:ext cx="4983480" cy="2834640"/>
+            <a:off x="6355080" y="3063240"/>
+            <a:ext cx="4983480" cy="2697480"/>
           </a:xfrm>
           <a:prstGeom prst="rect">
             <a:avLst/>
@@ -18269,6 +18956,57 @@
                 <a:latin typeface="Calibri"/>
               </a:rPr>
               <a:t>En finanzas la beta mide cuánto se mueve un activo cuando se mueve el mercado. Pensamos que las comunas caras funcionan como un activo de beta alta: suben más en los auges y caen más en las bajas.</a:t>
+            </a:r>
+          </a:p>
+        </p:txBody>
+      </p:sp>
+      <p:sp>
+        <p:nvSpPr>
+          <p:cNvPr id="9" name="TextBox 8"/>
+          <p:cNvSpPr txBox="1"/>
+          <p:nvPr/>
+        </p:nvSpPr>
+        <p:spPr>
+          <a:xfrm>
+            <a:off x="822960" y="5897880"/>
+            <a:ext cx="10515600" cy="457200"/>
+          </a:xfrm>
+          <a:prstGeom prst="rect">
+            <a:avLst/>
+          </a:prstGeom>
+          <a:noFill/>
+        </p:spPr>
+        <p:txBody>
+          <a:bodyPr wrap="square" lIns="0" rIns="0" tIns="0" bIns="0" anchor="t">
+            <a:spAutoFit/>
+          </a:bodyPr>
+          <a:lstStyle/>
+          <a:p>
+            <a:pPr algn="l">
+              <a:lnSpc>
+                <a:spcPct val="116000"/>
+              </a:lnSpc>
+              <a:spcAft>
+                <a:spcPts val="1300"/>
+              </a:spcAft>
+            </a:pPr>
+            <a:r>
+              <a:rPr sz="1450" b="1">
+                <a:solidFill>
+                  <a:srgbClr val="15505E"/>
+                </a:solidFill>
+                <a:latin typeface="Calibri"/>
+              </a:rPr>
+              <a:t>El trabajo es exploratorio: </a:t>
+            </a:r>
+            <a:r>
+              <a:rPr sz="1450" b="0">
+                <a:solidFill>
+                  <a:srgbClr val="15505E"/>
+                </a:solidFill>
+                <a:latin typeface="Calibri"/>
+              </a:rPr>
+              <a:t>los métodos que siguen muestran asociaciones, no relaciones de causa y efecto.</a:t>
             </a:r>
           </a:p>
         </p:txBody>
@@ -18369,6 +19107,48 @@
         </p:nvSpPr>
         <p:spPr>
           <a:xfrm>
+            <a:off x="841248" y="402336"/>
+            <a:ext cx="10515600" cy="274320"/>
+          </a:xfrm>
+          <a:prstGeom prst="rect">
+            <a:avLst/>
+          </a:prstGeom>
+          <a:noFill/>
+        </p:spPr>
+        <p:txBody>
+          <a:bodyPr wrap="square" lIns="0" rIns="0" tIns="0" bIns="0" anchor="t">
+            <a:spAutoFit/>
+          </a:bodyPr>
+          <a:lstStyle/>
+          <a:p>
+            <a:pPr algn="l">
+              <a:lnSpc>
+                <a:spcPct val="100000"/>
+              </a:lnSpc>
+              <a:spcAft>
+                <a:spcPts val="0"/>
+              </a:spcAft>
+            </a:pPr>
+            <a:r>
+              <a:rPr sz="1050" b="1">
+                <a:solidFill>
+                  <a:srgbClr val="F4EFE4"/>
+                </a:solidFill>
+                <a:latin typeface="Calibri"/>
+              </a:rPr>
+              <a:t>¿QUÉ HICIMOS CON LOS FALTANTES Y LOS OUTLIERS?</a:t>
+            </a:r>
+          </a:p>
+        </p:txBody>
+      </p:sp>
+      <p:sp>
+        <p:nvSpPr>
+          <p:cNvPr id="5" name="TextBox 4"/>
+          <p:cNvSpPr txBox="1"/>
+          <p:nvPr/>
+        </p:nvSpPr>
+        <p:spPr>
+          <a:xfrm>
             <a:off x="822960" y="777240"/>
             <a:ext cx="4389120" cy="1463040"/>
           </a:xfrm>
@@ -18405,7 +19185,7 @@
       </p:sp>
       <p:sp>
         <p:nvSpPr>
-          <p:cNvPr id="5" name="TextBox 4"/>
+          <p:cNvPr id="6" name="TextBox 5"/>
           <p:cNvSpPr txBox="1"/>
           <p:nvPr/>
         </p:nvSpPr>
@@ -18542,7 +19322,7 @@
       </p:sp>
       <p:graphicFrame>
         <p:nvGraphicFramePr>
-          <p:cNvPr id="6" name="Table 5"/>
+          <p:cNvPr id="7" name="Table 6"/>
           <p:cNvGraphicFramePr>
             <a:graphicFrameLocks noGrp="1"/>
           </p:cNvGraphicFramePr>
@@ -19580,6 +20360,48 @@
         </p:nvSpPr>
         <p:spPr>
           <a:xfrm>
+            <a:off x="841248" y="402336"/>
+            <a:ext cx="10515600" cy="274320"/>
+          </a:xfrm>
+          <a:prstGeom prst="rect">
+            <a:avLst/>
+          </a:prstGeom>
+          <a:noFill/>
+        </p:spPr>
+        <p:txBody>
+          <a:bodyPr wrap="square" lIns="0" rIns="0" tIns="0" bIns="0" anchor="t">
+            <a:spAutoFit/>
+          </a:bodyPr>
+          <a:lstStyle/>
+          <a:p>
+            <a:pPr algn="l">
+              <a:lnSpc>
+                <a:spcPct val="100000"/>
+              </a:lnSpc>
+              <a:spcAft>
+                <a:spcPts val="0"/>
+              </a:spcAft>
+            </a:pPr>
+            <a:r>
+              <a:rPr sz="1050" b="1">
+                <a:solidFill>
+                  <a:srgbClr val="15505E"/>
+                </a:solidFill>
+                <a:latin typeface="Calibri"/>
+              </a:rPr>
+              <a:t>¿QUÉ HICIMOS CON LOS FALTANTES Y LOS OUTLIERS?</a:t>
+            </a:r>
+          </a:p>
+        </p:txBody>
+      </p:sp>
+      <p:sp>
+        <p:nvSpPr>
+          <p:cNvPr id="5" name="TextBox 4"/>
+          <p:cNvSpPr txBox="1"/>
+          <p:nvPr/>
+        </p:nvSpPr>
+        <p:spPr>
+          <a:xfrm>
             <a:off x="822960" y="658368"/>
             <a:ext cx="10545775" cy="1463040"/>
           </a:xfrm>
@@ -19616,7 +20438,7 @@
       </p:sp>
       <p:sp>
         <p:nvSpPr>
-          <p:cNvPr id="5" name="TextBox 4"/>
+          <p:cNvPr id="6" name="TextBox 5"/>
           <p:cNvSpPr txBox="1"/>
           <p:nvPr/>
         </p:nvSpPr>
@@ -19658,7 +20480,7 @@
       </p:sp>
       <p:graphicFrame>
         <p:nvGraphicFramePr>
-          <p:cNvPr id="6" name="Table 5"/>
+          <p:cNvPr id="7" name="Table 6"/>
           <p:cNvGraphicFramePr>
             <a:graphicFrameLocks noGrp="1"/>
           </p:cNvGraphicFramePr>
@@ -19888,7 +20710,7 @@
       </p:graphicFrame>
       <p:sp>
         <p:nvSpPr>
-          <p:cNvPr id="7" name="TextBox 6"/>
+          <p:cNvPr id="8" name="TextBox 7"/>
           <p:cNvSpPr txBox="1"/>
           <p:nvPr/>
         </p:nvSpPr>
@@ -20033,6 +20855,48 @@
         </p:nvSpPr>
         <p:spPr>
           <a:xfrm>
+            <a:off x="841248" y="402336"/>
+            <a:ext cx="10515600" cy="274320"/>
+          </a:xfrm>
+          <a:prstGeom prst="rect">
+            <a:avLst/>
+          </a:prstGeom>
+          <a:noFill/>
+        </p:spPr>
+        <p:txBody>
+          <a:bodyPr wrap="square" lIns="0" rIns="0" tIns="0" bIns="0" anchor="t">
+            <a:spAutoFit/>
+          </a:bodyPr>
+          <a:lstStyle/>
+          <a:p>
+            <a:pPr algn="l">
+              <a:lnSpc>
+                <a:spcPct val="100000"/>
+              </a:lnSpc>
+              <a:spcAft>
+                <a:spcPts val="0"/>
+              </a:spcAft>
+            </a:pPr>
+            <a:r>
+              <a:rPr sz="1050" b="1">
+                <a:solidFill>
+                  <a:srgbClr val="F4EFE4"/>
+                </a:solidFill>
+                <a:latin typeface="Calibri"/>
+              </a:rPr>
+              <a:t>¿QUÉ HICIMOS CON LOS FALTANTES Y LOS OUTLIERS?</a:t>
+            </a:r>
+          </a:p>
+        </p:txBody>
+      </p:sp>
+      <p:sp>
+        <p:nvSpPr>
+          <p:cNvPr id="5" name="TextBox 4"/>
+          <p:cNvSpPr txBox="1"/>
+          <p:nvPr/>
+        </p:nvSpPr>
+        <p:spPr>
+          <a:xfrm>
             <a:off x="822960" y="658368"/>
             <a:ext cx="10545775" cy="1463040"/>
           </a:xfrm>
@@ -20069,7 +20933,7 @@
       </p:sp>
       <p:sp>
         <p:nvSpPr>
-          <p:cNvPr id="5" name="TextBox 4"/>
+          <p:cNvPr id="6" name="TextBox 5"/>
           <p:cNvSpPr txBox="1"/>
           <p:nvPr/>
         </p:nvSpPr>
@@ -20168,7 +21032,7 @@
       </p:sp>
       <p:graphicFrame>
         <p:nvGraphicFramePr>
-          <p:cNvPr id="6" name="Table 5"/>
+          <p:cNvPr id="7" name="Table 6"/>
           <p:cNvGraphicFramePr>
             <a:graphicFrameLocks noGrp="1"/>
           </p:cNvGraphicFramePr>
@@ -20651,7 +21515,7 @@
       </p:graphicFrame>
       <p:sp>
         <p:nvSpPr>
-          <p:cNvPr id="7" name="TextBox 6"/>
+          <p:cNvPr id="8" name="TextBox 7"/>
           <p:cNvSpPr txBox="1"/>
           <p:nvPr/>
         </p:nvSpPr>
@@ -20796,6 +21660,48 @@
         </p:nvSpPr>
         <p:spPr>
           <a:xfrm>
+            <a:off x="841248" y="402336"/>
+            <a:ext cx="10515600" cy="274320"/>
+          </a:xfrm>
+          <a:prstGeom prst="rect">
+            <a:avLst/>
+          </a:prstGeom>
+          <a:noFill/>
+        </p:spPr>
+        <p:txBody>
+          <a:bodyPr wrap="square" lIns="0" rIns="0" tIns="0" bIns="0" anchor="t">
+            <a:spAutoFit/>
+          </a:bodyPr>
+          <a:lstStyle/>
+          <a:p>
+            <a:pPr algn="l">
+              <a:lnSpc>
+                <a:spcPct val="100000"/>
+              </a:lnSpc>
+              <a:spcAft>
+                <a:spcPts val="0"/>
+              </a:spcAft>
+            </a:pPr>
+            <a:r>
+              <a:rPr sz="1050" b="1">
+                <a:solidFill>
+                  <a:srgbClr val="15505E"/>
+                </a:solidFill>
+                <a:latin typeface="Calibri"/>
+              </a:rPr>
+              <a:t>¿QUÉ MÉTODO APLICAMOS Y POR QUÉ?</a:t>
+            </a:r>
+          </a:p>
+        </p:txBody>
+      </p:sp>
+      <p:sp>
+        <p:nvSpPr>
+          <p:cNvPr id="5" name="TextBox 4"/>
+          <p:cNvSpPr txBox="1"/>
+          <p:nvPr/>
+        </p:nvSpPr>
+        <p:spPr>
+          <a:xfrm>
             <a:off x="822960" y="658368"/>
             <a:ext cx="10545775" cy="1463040"/>
           </a:xfrm>
@@ -20832,7 +21738,7 @@
       </p:sp>
       <p:pic>
         <p:nvPicPr>
-          <p:cNvPr id="5" name="Picture 4" descr="i2_g01_faltantes_trimestre.png"/>
+          <p:cNvPr id="6" name="Picture 5" descr="i2_g01_faltantes_trimestre.png"/>
           <p:cNvPicPr>
             <a:picLocks noChangeAspect="1"/>
           </p:cNvPicPr>
@@ -20856,7 +21762,7 @@
       </p:pic>
       <p:sp>
         <p:nvSpPr>
-          <p:cNvPr id="6" name="TextBox 5"/>
+          <p:cNvPr id="7" name="TextBox 6"/>
           <p:cNvSpPr txBox="1"/>
           <p:nvPr/>
         </p:nvSpPr>
@@ -21049,6 +21955,48 @@
         </p:nvSpPr>
         <p:spPr>
           <a:xfrm>
+            <a:off x="841248" y="402336"/>
+            <a:ext cx="10515600" cy="274320"/>
+          </a:xfrm>
+          <a:prstGeom prst="rect">
+            <a:avLst/>
+          </a:prstGeom>
+          <a:noFill/>
+        </p:spPr>
+        <p:txBody>
+          <a:bodyPr wrap="square" lIns="0" rIns="0" tIns="0" bIns="0" anchor="t">
+            <a:spAutoFit/>
+          </a:bodyPr>
+          <a:lstStyle/>
+          <a:p>
+            <a:pPr algn="l">
+              <a:lnSpc>
+                <a:spcPct val="100000"/>
+              </a:lnSpc>
+              <a:spcAft>
+                <a:spcPts val="0"/>
+              </a:spcAft>
+            </a:pPr>
+            <a:r>
+              <a:rPr sz="1050" b="1">
+                <a:solidFill>
+                  <a:srgbClr val="F4EFE4"/>
+                </a:solidFill>
+                <a:latin typeface="Calibri"/>
+              </a:rPr>
+              <a:t>¿QUÉ MÉTODO APLICAMOS Y POR QUÉ?</a:t>
+            </a:r>
+          </a:p>
+        </p:txBody>
+      </p:sp>
+      <p:sp>
+        <p:nvSpPr>
+          <p:cNvPr id="5" name="TextBox 4"/>
+          <p:cNvSpPr txBox="1"/>
+          <p:nvPr/>
+        </p:nvSpPr>
+        <p:spPr>
+          <a:xfrm>
             <a:off x="822960" y="777240"/>
             <a:ext cx="4937760" cy="1463040"/>
           </a:xfrm>
@@ -21085,7 +22033,7 @@
       </p:sp>
       <p:sp>
         <p:nvSpPr>
-          <p:cNvPr id="5" name="TextBox 4"/>
+          <p:cNvPr id="6" name="TextBox 5"/>
           <p:cNvSpPr txBox="1"/>
           <p:nvPr/>
         </p:nvSpPr>
@@ -21184,7 +22132,7 @@
       </p:sp>
       <p:graphicFrame>
         <p:nvGraphicFramePr>
-          <p:cNvPr id="6" name="Table 5"/>
+          <p:cNvPr id="7" name="Table 6"/>
           <p:cNvGraphicFramePr>
             <a:graphicFrameLocks noGrp="1"/>
           </p:cNvGraphicFramePr>
@@ -22221,7 +23169,7 @@
       </p:graphicFrame>
       <p:sp>
         <p:nvSpPr>
-          <p:cNvPr id="7" name="TextBox 6"/>
+          <p:cNvPr id="8" name="TextBox 7"/>
           <p:cNvSpPr txBox="1"/>
           <p:nvPr/>
         </p:nvSpPr>

--- a/TP_instancia2_alquileres_CABA.pptx
+++ b/TP_instancia2_alquileres_CABA.pptx
@@ -10443,7 +10443,7 @@
                 </a:solidFill>
                 <a:latin typeface="Calibri"/>
               </a:rPr>
-              <a:t>Próximos pasos</a:t>
+              <a:t>Preguntas que surgieron…</a:t>
             </a:r>
           </a:p>
         </p:txBody>
@@ -10456,8 +10456,88 @@
         </p:nvSpPr>
         <p:spPr>
           <a:xfrm>
-            <a:off x="7132320" y="2834640"/>
-            <a:ext cx="4206240" cy="3108960"/>
+            <a:off x="7132320" y="2816352"/>
+            <a:ext cx="4206240" cy="2286000"/>
+          </a:xfrm>
+          <a:prstGeom prst="rect">
+            <a:avLst/>
+          </a:prstGeom>
+          <a:noFill/>
+        </p:spPr>
+        <p:txBody>
+          <a:bodyPr wrap="square" lIns="0" rIns="0" tIns="0" bIns="0" anchor="t">
+            <a:spAutoFit/>
+          </a:bodyPr>
+          <a:lstStyle/>
+          <a:p>
+            <a:pPr algn="l">
+              <a:lnSpc>
+                <a:spcPct val="116000"/>
+              </a:lnSpc>
+              <a:spcAft>
+                <a:spcPts val="1100"/>
+              </a:spcAft>
+            </a:pPr>
+            <a:r>
+              <a:rPr sz="1500" b="0">
+                <a:solidFill>
+                  <a:srgbClr val="15505E"/>
+                </a:solidFill>
+                <a:latin typeface="Calibri"/>
+              </a:rPr>
+              <a:t>¿Cuánto del pico de 2023 es la ley y cuánto la inflación?</a:t>
+            </a:r>
+          </a:p>
+          <a:p>
+            <a:pPr>
+              <a:lnSpc>
+                <a:spcPct val="116000"/>
+              </a:lnSpc>
+              <a:spcAft>
+                <a:spcPts val="1100"/>
+              </a:spcAft>
+            </a:pPr>
+            <a:r>
+              <a:rPr sz="1500" b="0">
+                <a:solidFill>
+                  <a:srgbClr val="15505E"/>
+                </a:solidFill>
+                <a:latin typeface="Calibri"/>
+              </a:rPr>
+              <a:t>¿Las comunas se agrupan solas por nivel, beta y faltantes, o ese agrupamiento no tiene nada que ver con las zonas?</a:t>
+            </a:r>
+          </a:p>
+          <a:p>
+            <a:pPr>
+              <a:lnSpc>
+                <a:spcPct val="116000"/>
+              </a:lnSpc>
+              <a:spcAft>
+                <a:spcPts val="1100"/>
+              </a:spcAft>
+            </a:pPr>
+            <a:r>
+              <a:rPr sz="1500" b="0">
+                <a:solidFill>
+                  <a:srgbClr val="15505E"/>
+                </a:solidFill>
+                <a:latin typeface="Calibri"/>
+              </a:rPr>
+              <a:t>¿La beta de una comuna tiene que ver con el ingreso de quienes viven ahí?</a:t>
+            </a:r>
+          </a:p>
+        </p:txBody>
+      </p:sp>
+      <p:sp>
+        <p:nvSpPr>
+          <p:cNvPr id="9" name="TextBox 8"/>
+          <p:cNvSpPr txBox="1"/>
+          <p:nvPr/>
+        </p:nvSpPr>
+        <p:spPr>
+          <a:xfrm>
+            <a:off x="7132320" y="5120640"/>
+            <a:ext cx="4206240" cy="1280160"/>
           </a:xfrm>
           <a:prstGeom prst="rect">
             <a:avLst/>
@@ -10479,51 +10559,22 @@
               </a:spcAft>
             </a:pPr>
             <a:r>
-              <a:rPr sz="1550" b="0">
+              <a:rPr sz="1400" b="1">
                 <a:solidFill>
                   <a:srgbClr val="15505E"/>
                 </a:solidFill>
                 <a:latin typeface="Calibri"/>
               </a:rPr>
-              <a:t>Clustering de comunas por nivel, beta y faltantes, para ver si los grupos coinciden con las zonas.</a:t>
+              <a:t>Para la próxima. </a:t>
             </a:r>
-          </a:p>
-          <a:p>
-            <a:pPr>
-              <a:lnSpc>
-                <a:spcPct val="116000"/>
-              </a:lnSpc>
-              <a:spcAft>
-                <a:spcPts val="1300"/>
-              </a:spcAft>
-            </a:pPr>
             <a:r>
-              <a:rPr sz="1550" b="0">
+              <a:rPr sz="1400" b="0">
                 <a:solidFill>
                   <a:srgbClr val="15505E"/>
                 </a:solidFill>
                 <a:latin typeface="Calibri"/>
               </a:rPr>
-              <a:t>Separar la ley de la inflación comparando trimestres de inflación alta y baja dentro de cada período.</a:t>
-            </a:r>
-          </a:p>
-          <a:p>
-            <a:pPr>
-              <a:lnSpc>
-                <a:spcPct val="116000"/>
-              </a:lnSpc>
-              <a:spcAft>
-                <a:spcPts val="1300"/>
-              </a:spcAft>
-            </a:pPr>
-            <a:r>
-              <a:rPr sz="1550" b="0">
-                <a:solidFill>
-                  <a:srgbClr val="15505E"/>
-                </a:solidFill>
-                <a:latin typeface="Calibri"/>
-              </a:rPr>
-              <a:t>Sumar ingresos por comuna (EAH) para relacionar la beta con la capacidad de pago.</a:t>
+              <a:t>Probaríamos un clustering y sumaríamos los ingresos por comuna de la EAH. Y nos llevamos dos candidatos a visualización para la instancia 3: el gráfico de faltantes y el de beta contra nivel.</a:t>
             </a:r>
           </a:p>
         </p:txBody>
